--- a/figures_n_tables/figures/MambaSL-all_figures.pptx
+++ b/figures_n_tables/figures/MambaSL-all_figures.pptx
@@ -200,7 +200,7 @@
           <a:p>
             <a:fld id="{7B5A7408-C7A7-0B4C-89B9-93481003164D}" type="datetimeFigureOut">
               <a:rPr kumimoji="1" lang="ko-KR" altLang="en-US" smtClean="0"/>
-              <a:t>2025. 9. 22.</a:t>
+              <a:t>2026. 2. 25.</a:t>
             </a:fld>
             <a:endParaRPr kumimoji="1" lang="ko-KR" altLang="en-US"/>
           </a:p>
@@ -968,7 +968,7 @@
           <a:p>
             <a:fld id="{B525902D-BB37-6C49-B65D-6A118E49E45E}" type="datetimeFigureOut">
               <a:rPr kumimoji="1" lang="ko-KR" altLang="en-US" smtClean="0"/>
-              <a:t>2025. 9. 22.</a:t>
+              <a:t>2026. 2. 25.</a:t>
             </a:fld>
             <a:endParaRPr kumimoji="1" lang="ko-KR" altLang="en-US"/>
           </a:p>
@@ -1138,7 +1138,7 @@
           <a:p>
             <a:fld id="{B525902D-BB37-6C49-B65D-6A118E49E45E}" type="datetimeFigureOut">
               <a:rPr kumimoji="1" lang="ko-KR" altLang="en-US" smtClean="0"/>
-              <a:t>2025. 9. 22.</a:t>
+              <a:t>2026. 2. 25.</a:t>
             </a:fld>
             <a:endParaRPr kumimoji="1" lang="ko-KR" altLang="en-US"/>
           </a:p>
@@ -1318,7 +1318,7 @@
           <a:p>
             <a:fld id="{B525902D-BB37-6C49-B65D-6A118E49E45E}" type="datetimeFigureOut">
               <a:rPr kumimoji="1" lang="ko-KR" altLang="en-US" smtClean="0"/>
-              <a:t>2025. 9. 22.</a:t>
+              <a:t>2026. 2. 25.</a:t>
             </a:fld>
             <a:endParaRPr kumimoji="1" lang="ko-KR" altLang="en-US"/>
           </a:p>
@@ -1488,7 +1488,7 @@
           <a:p>
             <a:fld id="{B525902D-BB37-6C49-B65D-6A118E49E45E}" type="datetimeFigureOut">
               <a:rPr kumimoji="1" lang="ko-KR" altLang="en-US" smtClean="0"/>
-              <a:t>2025. 9. 22.</a:t>
+              <a:t>2026. 2. 25.</a:t>
             </a:fld>
             <a:endParaRPr kumimoji="1" lang="ko-KR" altLang="en-US"/>
           </a:p>
@@ -1734,7 +1734,7 @@
           <a:p>
             <a:fld id="{B525902D-BB37-6C49-B65D-6A118E49E45E}" type="datetimeFigureOut">
               <a:rPr kumimoji="1" lang="ko-KR" altLang="en-US" smtClean="0"/>
-              <a:t>2025. 9. 22.</a:t>
+              <a:t>2026. 2. 25.</a:t>
             </a:fld>
             <a:endParaRPr kumimoji="1" lang="ko-KR" altLang="en-US"/>
           </a:p>
@@ -1966,7 +1966,7 @@
           <a:p>
             <a:fld id="{B525902D-BB37-6C49-B65D-6A118E49E45E}" type="datetimeFigureOut">
               <a:rPr kumimoji="1" lang="ko-KR" altLang="en-US" smtClean="0"/>
-              <a:t>2025. 9. 22.</a:t>
+              <a:t>2026. 2. 25.</a:t>
             </a:fld>
             <a:endParaRPr kumimoji="1" lang="ko-KR" altLang="en-US"/>
           </a:p>
@@ -2333,7 +2333,7 @@
           <a:p>
             <a:fld id="{B525902D-BB37-6C49-B65D-6A118E49E45E}" type="datetimeFigureOut">
               <a:rPr kumimoji="1" lang="ko-KR" altLang="en-US" smtClean="0"/>
-              <a:t>2025. 9. 22.</a:t>
+              <a:t>2026. 2. 25.</a:t>
             </a:fld>
             <a:endParaRPr kumimoji="1" lang="ko-KR" altLang="en-US"/>
           </a:p>
@@ -2451,7 +2451,7 @@
           <a:p>
             <a:fld id="{B525902D-BB37-6C49-B65D-6A118E49E45E}" type="datetimeFigureOut">
               <a:rPr kumimoji="1" lang="ko-KR" altLang="en-US" smtClean="0"/>
-              <a:t>2025. 9. 22.</a:t>
+              <a:t>2026. 2. 25.</a:t>
             </a:fld>
             <a:endParaRPr kumimoji="1" lang="ko-KR" altLang="en-US"/>
           </a:p>
@@ -2546,7 +2546,7 @@
           <a:p>
             <a:fld id="{B525902D-BB37-6C49-B65D-6A118E49E45E}" type="datetimeFigureOut">
               <a:rPr kumimoji="1" lang="ko-KR" altLang="en-US" smtClean="0"/>
-              <a:t>2025. 9. 22.</a:t>
+              <a:t>2026. 2. 25.</a:t>
             </a:fld>
             <a:endParaRPr kumimoji="1" lang="ko-KR" altLang="en-US"/>
           </a:p>
@@ -2823,7 +2823,7 @@
           <a:p>
             <a:fld id="{B525902D-BB37-6C49-B65D-6A118E49E45E}" type="datetimeFigureOut">
               <a:rPr kumimoji="1" lang="ko-KR" altLang="en-US" smtClean="0"/>
-              <a:t>2025. 9. 22.</a:t>
+              <a:t>2026. 2. 25.</a:t>
             </a:fld>
             <a:endParaRPr kumimoji="1" lang="ko-KR" altLang="en-US"/>
           </a:p>
@@ -3080,7 +3080,7 @@
           <a:p>
             <a:fld id="{B525902D-BB37-6C49-B65D-6A118E49E45E}" type="datetimeFigureOut">
               <a:rPr kumimoji="1" lang="ko-KR" altLang="en-US" smtClean="0"/>
-              <a:t>2025. 9. 22.</a:t>
+              <a:t>2026. 2. 25.</a:t>
             </a:fld>
             <a:endParaRPr kumimoji="1" lang="ko-KR" altLang="en-US"/>
           </a:p>
@@ -3293,7 +3293,7 @@
           <a:p>
             <a:fld id="{B525902D-BB37-6C49-B65D-6A118E49E45E}" type="datetimeFigureOut">
               <a:rPr kumimoji="1" lang="ko-KR" altLang="en-US" smtClean="0"/>
-              <a:t>2025. 9. 22.</a:t>
+              <a:t>2026. 2. 25.</a:t>
             </a:fld>
             <a:endParaRPr kumimoji="1" lang="ko-KR" altLang="en-US"/>
           </a:p>
@@ -7693,8 +7693,8 @@
           </a:ln>
         </p:spPr>
       </p:cxnSp>
-      <mc:AlternateContent xmlns:mc="http://schemas.openxmlformats.org/markup-compatibility/2006">
-        <mc:Choice xmlns:a14="http://schemas.microsoft.com/office/drawing/2010/main" Requires="a14">
+      <mc:AlternateContent xmlns:mc="http://schemas.openxmlformats.org/markup-compatibility/2006" xmlns:a14="http://schemas.microsoft.com/office/drawing/2010/main">
+        <mc:Choice Requires="a14">
           <p:sp>
             <p:nvSpPr>
               <p:cNvPr id="625" name="TextBox 624">
@@ -7925,7 +7925,7 @@
             </p:txBody>
           </p:sp>
         </mc:Choice>
-        <mc:Fallback>
+        <mc:Fallback xmlns="">
           <p:sp>
             <p:nvSpPr>
               <p:cNvPr id="625" name="TextBox 624">
@@ -11194,11 +11194,11 @@
               </a:avLst>
             </a:prstGeom>
             <a:noFill/>
-            <a:ln w="12700" cap="flat" cmpd="sng">
+            <a:ln w="9525" cap="flat" cmpd="sng">
               <a:solidFill>
-                <a:srgbClr val="FE6467"/>
+                <a:srgbClr val="595959"/>
               </a:solidFill>
-              <a:prstDash val="sysDot"/>
+              <a:prstDash val="solid"/>
               <a:round/>
               <a:headEnd type="none" w="med" len="med"/>
               <a:tailEnd type="triangle" w="med" len="med"/>
@@ -11232,11 +11232,11 @@
               </a:avLst>
             </a:prstGeom>
             <a:noFill/>
-            <a:ln w="12700" cap="flat" cmpd="sng">
+            <a:ln w="9525" cap="flat" cmpd="sng">
               <a:solidFill>
-                <a:srgbClr val="FE6467"/>
+                <a:srgbClr val="595959"/>
               </a:solidFill>
-              <a:prstDash val="sysDot"/>
+              <a:prstDash val="solid"/>
               <a:round/>
               <a:headEnd type="none" w="med" len="med"/>
               <a:tailEnd type="triangle" w="med" len="med"/>
@@ -11270,11 +11270,11 @@
               </a:avLst>
             </a:prstGeom>
             <a:noFill/>
-            <a:ln w="12700" cap="flat" cmpd="sng">
+            <a:ln w="9525" cap="flat" cmpd="sng">
               <a:solidFill>
-                <a:srgbClr val="FE6467"/>
+                <a:srgbClr val="595959"/>
               </a:solidFill>
-              <a:prstDash val="sysDot"/>
+              <a:prstDash val="solid"/>
               <a:round/>
               <a:headEnd type="none" w="med" len="med"/>
               <a:tailEnd type="triangle" w="med" len="med"/>
@@ -11814,11 +11814,11 @@
             <a:solidFill>
               <a:srgbClr val="FFEAEA"/>
             </a:solidFill>
-            <a:ln w="12700" cap="flat" cmpd="sng">
+            <a:ln w="9525" cap="flat" cmpd="sng">
               <a:solidFill>
-                <a:srgbClr val="FE6467"/>
+                <a:srgbClr val="595959"/>
               </a:solidFill>
-              <a:prstDash val="sysDot"/>
+              <a:prstDash val="solid"/>
               <a:round/>
               <a:headEnd type="none" w="sm" len="sm"/>
               <a:tailEnd type="none" w="sm" len="sm"/>
@@ -11872,11 +11872,11 @@
             <a:solidFill>
               <a:srgbClr val="FFEAEA"/>
             </a:solidFill>
-            <a:ln w="12700" cap="flat" cmpd="sng">
+            <a:ln w="9525" cap="flat" cmpd="sng">
               <a:solidFill>
-                <a:srgbClr val="FE6467"/>
+                <a:srgbClr val="595959"/>
               </a:solidFill>
-              <a:prstDash val="sysDot"/>
+              <a:prstDash val="solid"/>
               <a:round/>
               <a:headEnd type="none" w="sm" len="sm"/>
               <a:tailEnd type="none" w="sm" len="sm"/>
@@ -11930,11 +11930,11 @@
             <a:solidFill>
               <a:srgbClr val="FFEAEA"/>
             </a:solidFill>
-            <a:ln w="12700" cap="flat" cmpd="sng">
+            <a:ln w="9525" cap="flat" cmpd="sng">
               <a:solidFill>
-                <a:srgbClr val="FE6467"/>
+                <a:srgbClr val="595959"/>
               </a:solidFill>
-              <a:prstDash val="sysDot"/>
+              <a:prstDash val="solid"/>
               <a:round/>
               <a:headEnd type="none" w="sm" len="sm"/>
               <a:tailEnd type="none" w="sm" len="sm"/>
@@ -15036,10 +15036,10 @@
       </p:grpSpPr>
       <p:cxnSp>
         <p:nvCxnSpPr>
-          <p:cNvPr id="2" name="직선 연결선[R] 1">
+          <p:cNvPr id="3" name="직선 연결선[R] 2">
             <a:extLst>
               <a:ext uri="{FF2B5EF4-FFF2-40B4-BE49-F238E27FC236}">
-                <a16:creationId xmlns:a16="http://schemas.microsoft.com/office/drawing/2014/main" id="{0BEE0200-19FF-4B19-7E4A-14C88AD9ADAD}"/>
+                <a16:creationId xmlns:a16="http://schemas.microsoft.com/office/drawing/2014/main" id="{40F21F52-9CEE-8EF7-BC1D-1B6360A3775C}"/>
               </a:ext>
             </a:extLst>
           </p:cNvPr>
@@ -15082,10 +15082,10 @@
       </p:cxnSp>
       <p:sp>
         <p:nvSpPr>
-          <p:cNvPr id="4" name="TextBox 3">
+          <p:cNvPr id="14" name="TextBox 13">
             <a:extLst>
               <a:ext uri="{FF2B5EF4-FFF2-40B4-BE49-F238E27FC236}">
-                <a16:creationId xmlns:a16="http://schemas.microsoft.com/office/drawing/2014/main" id="{71E7C2F1-D93B-850B-40B6-77A411AA01EC}"/>
+                <a16:creationId xmlns:a16="http://schemas.microsoft.com/office/drawing/2014/main" id="{3F156A00-85D5-EB4F-A029-C924833C9B0F}"/>
               </a:ext>
             </a:extLst>
           </p:cNvPr>
@@ -15156,10 +15156,10 @@
       </p:sp>
       <p:grpSp>
         <p:nvGrpSpPr>
-          <p:cNvPr id="5" name="그룹 4">
+          <p:cNvPr id="16" name="그룹 15">
             <a:extLst>
               <a:ext uri="{FF2B5EF4-FFF2-40B4-BE49-F238E27FC236}">
-                <a16:creationId xmlns:a16="http://schemas.microsoft.com/office/drawing/2014/main" id="{63607B1A-7D24-584B-EA66-F32EDE19526F}"/>
+                <a16:creationId xmlns:a16="http://schemas.microsoft.com/office/drawing/2014/main" id="{4B82EB1F-3EFC-30D4-164A-2BB1F245A8CB}"/>
               </a:ext>
             </a:extLst>
           </p:cNvPr>
@@ -15168,20 +15168,20 @@
         </p:nvGrpSpPr>
         <p:grpSpPr>
           <a:xfrm>
-            <a:off x="136372" y="1516103"/>
-            <a:ext cx="1404870" cy="152617"/>
+            <a:off x="136372" y="1516104"/>
+            <a:ext cx="1404870" cy="184666"/>
             <a:chOff x="108431" y="1819802"/>
-            <a:chExt cx="1404870" cy="184666"/>
+            <a:chExt cx="1404870" cy="223445"/>
           </a:xfrm>
         </p:grpSpPr>
         <mc:AlternateContent xmlns:mc="http://schemas.openxmlformats.org/markup-compatibility/2006" xmlns:a14="http://schemas.microsoft.com/office/drawing/2010/main">
           <mc:Choice Requires="a14">
             <p:sp>
               <p:nvSpPr>
-                <p:cNvPr id="6" name="TextBox 5">
+                <p:cNvPr id="17" name="TextBox 16">
                   <a:extLst>
                     <a:ext uri="{FF2B5EF4-FFF2-40B4-BE49-F238E27FC236}">
-                      <a16:creationId xmlns:a16="http://schemas.microsoft.com/office/drawing/2014/main" id="{8CA20E89-9E22-5350-D3AE-67C27922FAB8}"/>
+                      <a16:creationId xmlns:a16="http://schemas.microsoft.com/office/drawing/2014/main" id="{6E8958D5-E82D-AF10-D3F5-0E9BC4835429}"/>
                     </a:ext>
                   </a:extLst>
                 </p:cNvPr>
@@ -15191,7 +15191,7 @@
               <p:spPr bwMode="auto">
                 <a:xfrm>
                   <a:off x="108431" y="1819802"/>
-                  <a:ext cx="302493" cy="184666"/>
+                  <a:ext cx="302493" cy="223445"/>
                 </a:xfrm>
                 <a:prstGeom prst="rect">
                   <a:avLst/>
@@ -15223,56 +15223,29 @@
                         <m:jc m:val="centerGroup"/>
                       </m:oMathParaPr>
                       <m:oMath xmlns:m="http://schemas.openxmlformats.org/officeDocument/2006/math">
-                        <m:sSub>
-                          <m:sSubPr>
-                            <m:ctrlPr>
-                              <a:rPr kumimoji="1" lang="en-US" altLang="ko-KR" sz="1200" b="0" i="1" kern="0" dirty="0" smtClean="0">
-                                <a:solidFill>
-                                  <a:srgbClr val="5887DA"/>
-                                </a:solidFill>
-                                <a:latin typeface="Cambria Math" panose="02040503050406030204" pitchFamily="18" charset="0"/>
-                                <a:cs typeface="Arial" panose="020B0604020202020204" pitchFamily="34" charset="0"/>
-                              </a:rPr>
-                            </m:ctrlPr>
-                          </m:sSubPr>
-                          <m:e>
-                            <m:r>
-                              <a:rPr kumimoji="1" lang="en-US" altLang="ko-KR" sz="1200" b="0" i="0" kern="0" dirty="0" smtClean="0">
-                                <a:solidFill>
-                                  <a:srgbClr val="5887DA"/>
-                                </a:solidFill>
-                                <a:latin typeface="Cambria Math" panose="02040503050406030204" pitchFamily="18" charset="0"/>
-                                <a:cs typeface="Arial" panose="020B0604020202020204" pitchFamily="34" charset="0"/>
-                              </a:rPr>
-                              <m:t> </m:t>
-                            </m:r>
-                            <m:r>
-                              <m:rPr>
-                                <m:sty m:val="p"/>
-                              </m:rPr>
-                              <a:rPr kumimoji="1" lang="el-GR" altLang="ko-KR" sz="1200" i="0" kern="0" dirty="0" smtClean="0">
-                                <a:solidFill>
-                                  <a:srgbClr val="5887DA"/>
-                                </a:solidFill>
-                                <a:latin typeface="Cambria Math" panose="02040503050406030204" pitchFamily="18" charset="0"/>
-                                <a:cs typeface="Arial" panose="020B0604020202020204" pitchFamily="34" charset="0"/>
-                              </a:rPr>
-                              <m:t>Δ</m:t>
-                            </m:r>
-                          </m:e>
-                          <m:sub>
-                            <m:r>
-                              <a:rPr kumimoji="1" lang="en-US" altLang="ko-KR" sz="1200" b="0" i="0" kern="0" dirty="0" smtClean="0">
-                                <a:solidFill>
-                                  <a:srgbClr val="5887DA"/>
-                                </a:solidFill>
-                                <a:latin typeface="Cambria Math" panose="02040503050406030204" pitchFamily="18" charset="0"/>
-                                <a:cs typeface="Arial" panose="020B0604020202020204" pitchFamily="34" charset="0"/>
-                              </a:rPr>
-                              <m:t>1</m:t>
-                            </m:r>
-                          </m:sub>
-                        </m:sSub>
+                        <m:r>
+                          <a:rPr kumimoji="1" lang="el-GR" altLang="ko-KR" sz="1200" i="0" kern="0" dirty="0">
+                            <a:solidFill>
+                              <a:srgbClr val="5887DA"/>
+                            </a:solidFill>
+                            <a:latin typeface="Cambria Math" panose="02040503050406030204" pitchFamily="18" charset="0"/>
+                            <a:cs typeface="Arial" panose="020B0604020202020204" pitchFamily="34" charset="0"/>
+                          </a:rPr>
+                          <m:t> </m:t>
+                        </m:r>
+                        <m:r>
+                          <m:rPr>
+                            <m:sty m:val="p"/>
+                          </m:rPr>
+                          <a:rPr kumimoji="1" lang="el-GR" altLang="ko-KR" sz="1200" i="0" kern="0" dirty="0">
+                            <a:solidFill>
+                              <a:srgbClr val="5887DA"/>
+                            </a:solidFill>
+                            <a:latin typeface="Cambria Math" panose="02040503050406030204" pitchFamily="18" charset="0"/>
+                            <a:cs typeface="Arial" panose="020B0604020202020204" pitchFamily="34" charset="0"/>
+                          </a:rPr>
+                          <m:t>Δ</m:t>
+                        </m:r>
                       </m:oMath>
                     </m:oMathPara>
                   </a14:m>
@@ -15284,10 +15257,10 @@
           <mc:Fallback xmlns="">
             <p:sp>
               <p:nvSpPr>
-                <p:cNvPr id="130" name="TextBox 129">
+                <p:cNvPr id="16" name="TextBox 15">
                   <a:extLst>
                     <a:ext uri="{FF2B5EF4-FFF2-40B4-BE49-F238E27FC236}">
-                      <a16:creationId xmlns:a16="http://schemas.microsoft.com/office/drawing/2014/main" id="{685108EC-7692-C538-5F69-CC3291241513}"/>
+                      <a16:creationId xmlns:a16="http://schemas.microsoft.com/office/drawing/2014/main" id="{43EFB2ED-CE66-27F5-3AFC-419E037B1594}"/>
                     </a:ext>
                   </a:extLst>
                 </p:cNvPr>
@@ -15299,7 +15272,7 @@
               <p:spPr bwMode="auto">
                 <a:xfrm>
                   <a:off x="108431" y="1819802"/>
-                  <a:ext cx="302493" cy="184666"/>
+                  <a:ext cx="302493" cy="223445"/>
                 </a:xfrm>
                 <a:prstGeom prst="rect">
                   <a:avLst/>
@@ -15307,7 +15280,7 @@
                 <a:blipFill>
                   <a:blip r:embed="rId3"/>
                   <a:stretch>
-                    <a:fillRect l="-12000" t="-28571" r="-16000" b="-57143"/>
+                    <a:fillRect t="-26667" r="-4000" b="-46667"/>
                   </a:stretch>
                 </a:blipFill>
                 <a:ln w="9525">
@@ -15336,10 +15309,10 @@
           <mc:Choice Requires="a14">
             <p:sp>
               <p:nvSpPr>
-                <p:cNvPr id="7" name="TextBox 6">
+                <p:cNvPr id="18" name="TextBox 17">
                   <a:extLst>
                     <a:ext uri="{FF2B5EF4-FFF2-40B4-BE49-F238E27FC236}">
-                      <a16:creationId xmlns:a16="http://schemas.microsoft.com/office/drawing/2014/main" id="{4AE8266D-22E9-004D-2939-8FE74FD9EE07}"/>
+                      <a16:creationId xmlns:a16="http://schemas.microsoft.com/office/drawing/2014/main" id="{BE8F052F-B6E6-7FC4-A3D8-484A3758C679}"/>
                     </a:ext>
                   </a:extLst>
                 </p:cNvPr>
@@ -15349,7 +15322,7 @@
               <p:spPr bwMode="auto">
                 <a:xfrm>
                   <a:off x="475890" y="1819802"/>
-                  <a:ext cx="302493" cy="184666"/>
+                  <a:ext cx="302493" cy="223445"/>
                 </a:xfrm>
                 <a:prstGeom prst="rect">
                   <a:avLst/>
@@ -15381,60 +15354,38 @@
                         <m:jc m:val="centerGroup"/>
                       </m:oMathParaPr>
                       <m:oMath xmlns:m="http://schemas.openxmlformats.org/officeDocument/2006/math">
-                        <m:sSub>
-                          <m:sSubPr>
-                            <m:ctrlPr>
-                              <a:rPr kumimoji="1" lang="en-US" altLang="ko-KR" sz="1200" b="0" i="1" kern="0" dirty="0" smtClean="0">
-                                <a:solidFill>
-                                  <a:srgbClr val="5887DA"/>
-                                </a:solidFill>
-                                <a:latin typeface="Cambria Math" panose="02040503050406030204" pitchFamily="18" charset="0"/>
-                                <a:cs typeface="Arial" panose="020B0604020202020204" pitchFamily="34" charset="0"/>
-                              </a:rPr>
-                            </m:ctrlPr>
-                          </m:sSubPr>
-                          <m:e>
-                            <m:r>
-                              <a:rPr kumimoji="1" lang="en-US" altLang="ko-KR" sz="1200" b="0" i="0" kern="0" dirty="0" smtClean="0">
-                                <a:solidFill>
-                                  <a:srgbClr val="5887DA"/>
-                                </a:solidFill>
-                                <a:latin typeface="Cambria Math" panose="02040503050406030204" pitchFamily="18" charset="0"/>
-                                <a:cs typeface="Arial" panose="020B0604020202020204" pitchFamily="34" charset="0"/>
-                              </a:rPr>
-                              <m:t> </m:t>
-                            </m:r>
-                            <m:r>
-                              <m:rPr>
-                                <m:sty m:val="p"/>
-                              </m:rPr>
-                              <a:rPr kumimoji="1" lang="el-GR" altLang="ko-KR" sz="1200" i="0" kern="0" dirty="0" smtClean="0">
-                                <a:solidFill>
-                                  <a:srgbClr val="5887DA"/>
-                                </a:solidFill>
-                                <a:latin typeface="Cambria Math" panose="02040503050406030204" pitchFamily="18" charset="0"/>
-                                <a:cs typeface="Arial" panose="020B0604020202020204" pitchFamily="34" charset="0"/>
-                              </a:rPr>
-                              <m:t>Δ</m:t>
-                            </m:r>
-                          </m:e>
-                          <m:sub>
-                            <m:r>
-                              <a:rPr kumimoji="1" lang="en-US" altLang="ko-KR" sz="1200" b="0" i="1" kern="0" dirty="0" smtClean="0">
-                                <a:solidFill>
-                                  <a:srgbClr val="5887DA"/>
-                                </a:solidFill>
-                                <a:latin typeface="Cambria Math" panose="02040503050406030204" pitchFamily="18" charset="0"/>
-                                <a:cs typeface="Arial" panose="020B0604020202020204" pitchFamily="34" charset="0"/>
-                              </a:rPr>
-                              <m:t>2</m:t>
-                            </m:r>
-                          </m:sub>
-                        </m:sSub>
+                        <m:r>
+                          <a:rPr kumimoji="1" lang="el-GR" altLang="ko-KR" sz="1200" kern="0" dirty="0">
+                            <a:solidFill>
+                              <a:srgbClr val="5887DA"/>
+                            </a:solidFill>
+                            <a:latin typeface="Cambria Math" panose="02040503050406030204" pitchFamily="18" charset="0"/>
+                            <a:cs typeface="Arial" panose="020B0604020202020204" pitchFamily="34" charset="0"/>
+                          </a:rPr>
+                          <m:t> </m:t>
+                        </m:r>
+                        <m:r>
+                          <m:rPr>
+                            <m:sty m:val="p"/>
+                          </m:rPr>
+                          <a:rPr kumimoji="1" lang="el-GR" altLang="ko-KR" sz="1200" kern="0" dirty="0">
+                            <a:solidFill>
+                              <a:srgbClr val="5887DA"/>
+                            </a:solidFill>
+                            <a:latin typeface="Cambria Math" panose="02040503050406030204" pitchFamily="18" charset="0"/>
+                            <a:cs typeface="Arial" panose="020B0604020202020204" pitchFamily="34" charset="0"/>
+                          </a:rPr>
+                          <m:t>Δ</m:t>
+                        </m:r>
                       </m:oMath>
                     </m:oMathPara>
                   </a14:m>
-                  <a:endParaRPr/>
+                  <a:endParaRPr kumimoji="1" lang="el-GR" altLang="ko-KR" sz="1200" kern="0" dirty="0">
+                    <a:solidFill>
+                      <a:srgbClr val="5887DA"/>
+                    </a:solidFill>
+                    <a:cs typeface="Arial" panose="020B0604020202020204" pitchFamily="34" charset="0"/>
+                  </a:endParaRPr>
                 </a:p>
               </p:txBody>
             </p:sp>
@@ -15442,10 +15393,10 @@
           <mc:Fallback xmlns="">
             <p:sp>
               <p:nvSpPr>
-                <p:cNvPr id="134" name="TextBox 133">
+                <p:cNvPr id="17" name="TextBox 16">
                   <a:extLst>
                     <a:ext uri="{FF2B5EF4-FFF2-40B4-BE49-F238E27FC236}">
-                      <a16:creationId xmlns:a16="http://schemas.microsoft.com/office/drawing/2014/main" id="{43F03E93-DCF5-6380-51A4-DB33E7DDA31F}"/>
+                      <a16:creationId xmlns:a16="http://schemas.microsoft.com/office/drawing/2014/main" id="{07FA5DD3-3A5B-40F6-A269-FEC121A674F4}"/>
                     </a:ext>
                   </a:extLst>
                 </p:cNvPr>
@@ -15457,7 +15408,7 @@
               <p:spPr bwMode="auto">
                 <a:xfrm>
                   <a:off x="475890" y="1819802"/>
-                  <a:ext cx="302493" cy="184666"/>
+                  <a:ext cx="302493" cy="223445"/>
                 </a:xfrm>
                 <a:prstGeom prst="rect">
                   <a:avLst/>
@@ -15465,7 +15416,7 @@
                 <a:blipFill>
                   <a:blip r:embed="rId4"/>
                   <a:stretch>
-                    <a:fillRect l="-12000" t="-28571" r="-16000" b="-57143"/>
+                    <a:fillRect b="-6667"/>
                   </a:stretch>
                 </a:blipFill>
                 <a:ln w="9525">
@@ -15494,10 +15445,10 @@
           <mc:Choice Requires="a14">
             <p:sp>
               <p:nvSpPr>
-                <p:cNvPr id="8" name="TextBox 7">
+                <p:cNvPr id="19" name="TextBox 18">
                   <a:extLst>
                     <a:ext uri="{FF2B5EF4-FFF2-40B4-BE49-F238E27FC236}">
-                      <a16:creationId xmlns:a16="http://schemas.microsoft.com/office/drawing/2014/main" id="{975BFC5C-5565-46EE-0719-C63B32710690}"/>
+                      <a16:creationId xmlns:a16="http://schemas.microsoft.com/office/drawing/2014/main" id="{8ABBB331-E61C-A2B8-CCED-C8D171AE45CE}"/>
                     </a:ext>
                   </a:extLst>
                 </p:cNvPr>
@@ -15507,7 +15458,7 @@
               <p:spPr bwMode="auto">
                 <a:xfrm>
                   <a:off x="1210808" y="1819802"/>
-                  <a:ext cx="302493" cy="184666"/>
+                  <a:ext cx="302493" cy="223445"/>
                 </a:xfrm>
                 <a:prstGeom prst="rect">
                   <a:avLst/>
@@ -15539,60 +15490,38 @@
                         <m:jc m:val="centerGroup"/>
                       </m:oMathParaPr>
                       <m:oMath xmlns:m="http://schemas.openxmlformats.org/officeDocument/2006/math">
-                        <m:sSub>
-                          <m:sSubPr>
-                            <m:ctrlPr>
-                              <a:rPr kumimoji="1" lang="en-US" altLang="ko-KR" sz="1200" b="0" i="1" kern="0" dirty="0" smtClean="0">
-                                <a:solidFill>
-                                  <a:srgbClr val="5887DA"/>
-                                </a:solidFill>
-                                <a:latin typeface="Cambria Math" panose="02040503050406030204" pitchFamily="18" charset="0"/>
-                                <a:cs typeface="Arial" panose="020B0604020202020204" pitchFamily="34" charset="0"/>
-                              </a:rPr>
-                            </m:ctrlPr>
-                          </m:sSubPr>
-                          <m:e>
-                            <m:r>
-                              <a:rPr kumimoji="1" lang="en-US" altLang="ko-KR" sz="1200" b="0" i="0" kern="0" dirty="0" smtClean="0">
-                                <a:solidFill>
-                                  <a:srgbClr val="5887DA"/>
-                                </a:solidFill>
-                                <a:latin typeface="Cambria Math" panose="02040503050406030204" pitchFamily="18" charset="0"/>
-                                <a:cs typeface="Arial" panose="020B0604020202020204" pitchFamily="34" charset="0"/>
-                              </a:rPr>
-                              <m:t> </m:t>
-                            </m:r>
-                            <m:r>
-                              <m:rPr>
-                                <m:sty m:val="p"/>
-                              </m:rPr>
-                              <a:rPr kumimoji="1" lang="el-GR" altLang="ko-KR" sz="1200" i="0" kern="0" dirty="0" smtClean="0">
-                                <a:solidFill>
-                                  <a:srgbClr val="5887DA"/>
-                                </a:solidFill>
-                                <a:latin typeface="Cambria Math" panose="02040503050406030204" pitchFamily="18" charset="0"/>
-                                <a:cs typeface="Arial" panose="020B0604020202020204" pitchFamily="34" charset="0"/>
-                              </a:rPr>
-                              <m:t>Δ</m:t>
-                            </m:r>
-                          </m:e>
-                          <m:sub>
-                            <m:r>
-                              <a:rPr kumimoji="1" lang="en-US" altLang="ko-KR" sz="1200" b="0" i="0" kern="0" dirty="0" smtClean="0">
-                                <a:solidFill>
-                                  <a:srgbClr val="5887DA"/>
-                                </a:solidFill>
-                                <a:latin typeface="Cambria Math" panose="02040503050406030204" pitchFamily="18" charset="0"/>
-                                <a:cs typeface="Arial" panose="020B0604020202020204" pitchFamily="34" charset="0"/>
-                              </a:rPr>
-                              <m:t>4</m:t>
-                            </m:r>
-                          </m:sub>
-                        </m:sSub>
+                        <m:r>
+                          <a:rPr kumimoji="1" lang="el-GR" altLang="ko-KR" sz="1200" kern="0" dirty="0">
+                            <a:solidFill>
+                              <a:srgbClr val="5887DA"/>
+                            </a:solidFill>
+                            <a:latin typeface="Cambria Math" panose="02040503050406030204" pitchFamily="18" charset="0"/>
+                            <a:cs typeface="Arial" panose="020B0604020202020204" pitchFamily="34" charset="0"/>
+                          </a:rPr>
+                          <m:t> </m:t>
+                        </m:r>
+                        <m:r>
+                          <m:rPr>
+                            <m:sty m:val="p"/>
+                          </m:rPr>
+                          <a:rPr kumimoji="1" lang="el-GR" altLang="ko-KR" sz="1200" kern="0" dirty="0">
+                            <a:solidFill>
+                              <a:srgbClr val="5887DA"/>
+                            </a:solidFill>
+                            <a:latin typeface="Cambria Math" panose="02040503050406030204" pitchFamily="18" charset="0"/>
+                            <a:cs typeface="Arial" panose="020B0604020202020204" pitchFamily="34" charset="0"/>
+                          </a:rPr>
+                          <m:t>Δ</m:t>
+                        </m:r>
                       </m:oMath>
                     </m:oMathPara>
                   </a14:m>
-                  <a:endParaRPr/>
+                  <a:endParaRPr kumimoji="1" lang="el-GR" altLang="ko-KR" sz="1200" kern="0" dirty="0">
+                    <a:solidFill>
+                      <a:srgbClr val="5887DA"/>
+                    </a:solidFill>
+                    <a:cs typeface="Arial" panose="020B0604020202020204" pitchFamily="34" charset="0"/>
+                  </a:endParaRPr>
                 </a:p>
               </p:txBody>
             </p:sp>
@@ -15600,10 +15529,10 @@
           <mc:Fallback xmlns="">
             <p:sp>
               <p:nvSpPr>
-                <p:cNvPr id="135" name="TextBox 134">
+                <p:cNvPr id="18" name="TextBox 17">
                   <a:extLst>
                     <a:ext uri="{FF2B5EF4-FFF2-40B4-BE49-F238E27FC236}">
-                      <a16:creationId xmlns:a16="http://schemas.microsoft.com/office/drawing/2014/main" id="{97AFF0AE-5932-D2AA-39FA-620184964207}"/>
+                      <a16:creationId xmlns:a16="http://schemas.microsoft.com/office/drawing/2014/main" id="{EAA9C7E9-3E59-B9CB-A94E-72F29DECC1BB}"/>
                     </a:ext>
                   </a:extLst>
                 </p:cNvPr>
@@ -15615,7 +15544,7 @@
               <p:spPr bwMode="auto">
                 <a:xfrm>
                   <a:off x="1210808" y="1819802"/>
-                  <a:ext cx="302493" cy="184666"/>
+                  <a:ext cx="302493" cy="223445"/>
                 </a:xfrm>
                 <a:prstGeom prst="rect">
                   <a:avLst/>
@@ -15623,7 +15552,7 @@
                 <a:blipFill>
                   <a:blip r:embed="rId5"/>
                   <a:stretch>
-                    <a:fillRect l="-12000" t="-28571" r="-16000" b="-57143"/>
+                    <a:fillRect b="-6667"/>
                   </a:stretch>
                 </a:blipFill>
                 <a:ln w="9525">
@@ -15652,10 +15581,10 @@
           <mc:Choice Requires="a14">
             <p:sp>
               <p:nvSpPr>
-                <p:cNvPr id="9" name="TextBox 8">
+                <p:cNvPr id="20" name="TextBox 19">
                   <a:extLst>
                     <a:ext uri="{FF2B5EF4-FFF2-40B4-BE49-F238E27FC236}">
-                      <a16:creationId xmlns:a16="http://schemas.microsoft.com/office/drawing/2014/main" id="{E9DE4EFE-83B8-3D9B-87FB-D766B4B8C18A}"/>
+                      <a16:creationId xmlns:a16="http://schemas.microsoft.com/office/drawing/2014/main" id="{5D8736EC-F98D-4BAF-2397-A770418B8C6E}"/>
                     </a:ext>
                   </a:extLst>
                 </p:cNvPr>
@@ -15665,7 +15594,7 @@
               <p:spPr bwMode="auto">
                 <a:xfrm>
                   <a:off x="843349" y="1819802"/>
-                  <a:ext cx="302493" cy="184666"/>
+                  <a:ext cx="302493" cy="223445"/>
                 </a:xfrm>
                 <a:prstGeom prst="rect">
                   <a:avLst/>
@@ -15697,60 +15626,38 @@
                         <m:jc m:val="centerGroup"/>
                       </m:oMathParaPr>
                       <m:oMath xmlns:m="http://schemas.openxmlformats.org/officeDocument/2006/math">
-                        <m:sSub>
-                          <m:sSubPr>
-                            <m:ctrlPr>
-                              <a:rPr kumimoji="1" lang="en-US" altLang="ko-KR" sz="1200" b="0" i="1" kern="0" dirty="0" smtClean="0">
-                                <a:solidFill>
-                                  <a:srgbClr val="5887DA"/>
-                                </a:solidFill>
-                                <a:latin typeface="Cambria Math" panose="02040503050406030204" pitchFamily="18" charset="0"/>
-                                <a:cs typeface="Arial" panose="020B0604020202020204" pitchFamily="34" charset="0"/>
-                              </a:rPr>
-                            </m:ctrlPr>
-                          </m:sSubPr>
-                          <m:e>
-                            <m:r>
-                              <a:rPr kumimoji="1" lang="en-US" altLang="ko-KR" sz="1200" b="0" i="0" kern="0" dirty="0" smtClean="0">
-                                <a:solidFill>
-                                  <a:srgbClr val="5887DA"/>
-                                </a:solidFill>
-                                <a:latin typeface="Cambria Math" panose="02040503050406030204" pitchFamily="18" charset="0"/>
-                                <a:cs typeface="Arial" panose="020B0604020202020204" pitchFamily="34" charset="0"/>
-                              </a:rPr>
-                              <m:t> </m:t>
-                            </m:r>
-                            <m:r>
-                              <m:rPr>
-                                <m:sty m:val="p"/>
-                              </m:rPr>
-                              <a:rPr kumimoji="1" lang="el-GR" altLang="ko-KR" sz="1200" i="0" kern="0" dirty="0" smtClean="0">
-                                <a:solidFill>
-                                  <a:srgbClr val="5887DA"/>
-                                </a:solidFill>
-                                <a:latin typeface="Cambria Math" panose="02040503050406030204" pitchFamily="18" charset="0"/>
-                                <a:cs typeface="Arial" panose="020B0604020202020204" pitchFamily="34" charset="0"/>
-                              </a:rPr>
-                              <m:t>Δ</m:t>
-                            </m:r>
-                          </m:e>
-                          <m:sub>
-                            <m:r>
-                              <a:rPr kumimoji="1" lang="en-US" altLang="ko-KR" sz="1200" b="0" i="1" kern="0" dirty="0" smtClean="0">
-                                <a:solidFill>
-                                  <a:srgbClr val="5887DA"/>
-                                </a:solidFill>
-                                <a:latin typeface="Cambria Math" panose="02040503050406030204" pitchFamily="18" charset="0"/>
-                                <a:cs typeface="Arial" panose="020B0604020202020204" pitchFamily="34" charset="0"/>
-                              </a:rPr>
-                              <m:t>3</m:t>
-                            </m:r>
-                          </m:sub>
-                        </m:sSub>
+                        <m:r>
+                          <a:rPr kumimoji="1" lang="el-GR" altLang="ko-KR" sz="1200" kern="0" dirty="0">
+                            <a:solidFill>
+                              <a:srgbClr val="5887DA"/>
+                            </a:solidFill>
+                            <a:latin typeface="Cambria Math" panose="02040503050406030204" pitchFamily="18" charset="0"/>
+                            <a:cs typeface="Arial" panose="020B0604020202020204" pitchFamily="34" charset="0"/>
+                          </a:rPr>
+                          <m:t> </m:t>
+                        </m:r>
+                        <m:r>
+                          <m:rPr>
+                            <m:sty m:val="p"/>
+                          </m:rPr>
+                          <a:rPr kumimoji="1" lang="el-GR" altLang="ko-KR" sz="1200" kern="0" dirty="0">
+                            <a:solidFill>
+                              <a:srgbClr val="5887DA"/>
+                            </a:solidFill>
+                            <a:latin typeface="Cambria Math" panose="02040503050406030204" pitchFamily="18" charset="0"/>
+                            <a:cs typeface="Arial" panose="020B0604020202020204" pitchFamily="34" charset="0"/>
+                          </a:rPr>
+                          <m:t>Δ</m:t>
+                        </m:r>
                       </m:oMath>
                     </m:oMathPara>
                   </a14:m>
-                  <a:endParaRPr/>
+                  <a:endParaRPr kumimoji="1" lang="el-GR" altLang="ko-KR" sz="1200" kern="0" dirty="0">
+                    <a:solidFill>
+                      <a:srgbClr val="5887DA"/>
+                    </a:solidFill>
+                    <a:cs typeface="Arial" panose="020B0604020202020204" pitchFamily="34" charset="0"/>
+                  </a:endParaRPr>
                 </a:p>
               </p:txBody>
             </p:sp>
@@ -15758,10 +15665,10 @@
           <mc:Fallback xmlns="">
             <p:sp>
               <p:nvSpPr>
-                <p:cNvPr id="136" name="TextBox 135">
+                <p:cNvPr id="19" name="TextBox 18">
                   <a:extLst>
                     <a:ext uri="{FF2B5EF4-FFF2-40B4-BE49-F238E27FC236}">
-                      <a16:creationId xmlns:a16="http://schemas.microsoft.com/office/drawing/2014/main" id="{590C5BEE-AB16-3FE5-51BC-50E25A2FDFAC}"/>
+                      <a16:creationId xmlns:a16="http://schemas.microsoft.com/office/drawing/2014/main" id="{0DCEF8B4-6921-6A63-D4ED-31F8512B6FDC}"/>
                     </a:ext>
                   </a:extLst>
                 </p:cNvPr>
@@ -15773,15 +15680,15 @@
               <p:spPr bwMode="auto">
                 <a:xfrm>
                   <a:off x="843349" y="1819802"/>
-                  <a:ext cx="302493" cy="184666"/>
+                  <a:ext cx="302493" cy="223445"/>
                 </a:xfrm>
                 <a:prstGeom prst="rect">
                   <a:avLst/>
                 </a:prstGeom>
                 <a:blipFill>
-                  <a:blip r:embed="rId6"/>
+                  <a:blip r:embed="rId5"/>
                   <a:stretch>
-                    <a:fillRect l="-12000" t="-28571" r="-16000" b="-57143"/>
+                    <a:fillRect b="-6667"/>
                   </a:stretch>
                 </a:blipFill>
                 <a:ln w="9525">
@@ -15809,10 +15716,10 @@
       </p:grpSp>
       <p:cxnSp>
         <p:nvCxnSpPr>
-          <p:cNvPr id="10" name="직선 화살표 연결선 9">
+          <p:cNvPr id="21" name="직선 화살표 연결선 20">
             <a:extLst>
               <a:ext uri="{FF2B5EF4-FFF2-40B4-BE49-F238E27FC236}">
-                <a16:creationId xmlns:a16="http://schemas.microsoft.com/office/drawing/2014/main" id="{8A862B94-298C-AFD9-7B74-45585F078C84}"/>
+                <a16:creationId xmlns:a16="http://schemas.microsoft.com/office/drawing/2014/main" id="{39A502D0-78A4-FB2E-9D58-032700169BA1}"/>
               </a:ext>
             </a:extLst>
           </p:cNvPr>
@@ -15853,10 +15760,10 @@
       </p:cxnSp>
       <p:cxnSp>
         <p:nvCxnSpPr>
-          <p:cNvPr id="11" name="직선 화살표 연결선 10">
+          <p:cNvPr id="22" name="직선 화살표 연결선 21">
             <a:extLst>
               <a:ext uri="{FF2B5EF4-FFF2-40B4-BE49-F238E27FC236}">
-                <a16:creationId xmlns:a16="http://schemas.microsoft.com/office/drawing/2014/main" id="{C2D6BDE2-5C1E-5948-6C80-A1EFE4E52271}"/>
+                <a16:creationId xmlns:a16="http://schemas.microsoft.com/office/drawing/2014/main" id="{567F79B2-9237-A7E3-3FE0-28C96295003A}"/>
               </a:ext>
             </a:extLst>
           </p:cNvPr>
@@ -15897,10 +15804,10 @@
       </p:cxnSp>
       <p:cxnSp>
         <p:nvCxnSpPr>
-          <p:cNvPr id="12" name="직선 연결선[R] 11">
+          <p:cNvPr id="28" name="직선 연결선[R] 27">
             <a:extLst>
               <a:ext uri="{FF2B5EF4-FFF2-40B4-BE49-F238E27FC236}">
-                <a16:creationId xmlns:a16="http://schemas.microsoft.com/office/drawing/2014/main" id="{0C2DF347-D20A-FCAE-4174-E35B0CF4E5FF}"/>
+                <a16:creationId xmlns:a16="http://schemas.microsoft.com/office/drawing/2014/main" id="{7AE83434-5DD1-F527-52B2-71C212416359}"/>
               </a:ext>
             </a:extLst>
           </p:cNvPr>
@@ -15943,10 +15850,10 @@
       </p:cxnSp>
       <p:cxnSp>
         <p:nvCxnSpPr>
-          <p:cNvPr id="13" name="직선 연결선[R] 12">
+          <p:cNvPr id="29" name="직선 연결선[R] 28">
             <a:extLst>
               <a:ext uri="{FF2B5EF4-FFF2-40B4-BE49-F238E27FC236}">
-                <a16:creationId xmlns:a16="http://schemas.microsoft.com/office/drawing/2014/main" id="{1DC7FCD4-6A3B-1851-969A-0ADFAE447504}"/>
+                <a16:creationId xmlns:a16="http://schemas.microsoft.com/office/drawing/2014/main" id="{0D35646C-69E7-907E-A1D4-A52A36B4D67A}"/>
               </a:ext>
             </a:extLst>
           </p:cNvPr>
@@ -15989,10 +15896,10 @@
       </p:cxnSp>
       <p:cxnSp>
         <p:nvCxnSpPr>
-          <p:cNvPr id="15" name="직선 연결선[R] 14">
+          <p:cNvPr id="30" name="직선 연결선[R] 29">
             <a:extLst>
               <a:ext uri="{FF2B5EF4-FFF2-40B4-BE49-F238E27FC236}">
-                <a16:creationId xmlns:a16="http://schemas.microsoft.com/office/drawing/2014/main" id="{7911E9FA-877D-5B3F-B51E-D1D88A0E37A2}"/>
+                <a16:creationId xmlns:a16="http://schemas.microsoft.com/office/drawing/2014/main" id="{CABD2E7D-F4C3-E2DF-87B5-440CC3D94BDD}"/>
               </a:ext>
             </a:extLst>
           </p:cNvPr>
@@ -16035,10 +15942,10 @@
       </p:cxnSp>
       <p:cxnSp>
         <p:nvCxnSpPr>
-          <p:cNvPr id="23" name="직선 연결선[R] 22">
+          <p:cNvPr id="31" name="직선 연결선[R] 30">
             <a:extLst>
               <a:ext uri="{FF2B5EF4-FFF2-40B4-BE49-F238E27FC236}">
-                <a16:creationId xmlns:a16="http://schemas.microsoft.com/office/drawing/2014/main" id="{93195D5E-3918-37D3-C39A-1ABB96BE1DB8}"/>
+                <a16:creationId xmlns:a16="http://schemas.microsoft.com/office/drawing/2014/main" id="{D7952B4E-4EC4-7FE4-73D7-2F8B180E7EA8}"/>
               </a:ext>
             </a:extLst>
           </p:cNvPr>
@@ -16081,10 +15988,10 @@
       </p:cxnSp>
       <p:cxnSp>
         <p:nvCxnSpPr>
-          <p:cNvPr id="24" name="직선 연결선[R] 23">
+          <p:cNvPr id="33" name="직선 연결선[R] 32">
             <a:extLst>
               <a:ext uri="{FF2B5EF4-FFF2-40B4-BE49-F238E27FC236}">
-                <a16:creationId xmlns:a16="http://schemas.microsoft.com/office/drawing/2014/main" id="{E6FB29F3-4AE3-547A-5A7D-CA498CE83E55}"/>
+                <a16:creationId xmlns:a16="http://schemas.microsoft.com/office/drawing/2014/main" id="{1AA4395A-AC69-E6B5-C4FA-220BC6252AFB}"/>
               </a:ext>
             </a:extLst>
           </p:cNvPr>
@@ -16127,10 +16034,10 @@
       </p:cxnSp>
       <p:grpSp>
         <p:nvGrpSpPr>
-          <p:cNvPr id="25" name="그룹 24">
+          <p:cNvPr id="34" name="그룹 33">
             <a:extLst>
               <a:ext uri="{FF2B5EF4-FFF2-40B4-BE49-F238E27FC236}">
-                <a16:creationId xmlns:a16="http://schemas.microsoft.com/office/drawing/2014/main" id="{1B835F78-1A93-DA0D-3EF6-E680260AE6D7}"/>
+                <a16:creationId xmlns:a16="http://schemas.microsoft.com/office/drawing/2014/main" id="{D3B7D30E-3B71-0C61-483E-54653E776BFB}"/>
               </a:ext>
             </a:extLst>
           </p:cNvPr>
@@ -16147,10 +16054,10 @@
         </p:grpSpPr>
         <p:cxnSp>
           <p:nvCxnSpPr>
-            <p:cNvPr id="26" name="직선 연결선[R] 25">
+            <p:cNvPr id="35" name="직선 연결선[R] 34">
               <a:extLst>
                 <a:ext uri="{FF2B5EF4-FFF2-40B4-BE49-F238E27FC236}">
-                  <a16:creationId xmlns:a16="http://schemas.microsoft.com/office/drawing/2014/main" id="{51397F07-77B9-1AD2-5792-D538386951DA}"/>
+                  <a16:creationId xmlns:a16="http://schemas.microsoft.com/office/drawing/2014/main" id="{85816C3E-3DF6-AB14-D43C-0DCB73EA5BF1}"/>
                 </a:ext>
               </a:extLst>
             </p:cNvPr>
@@ -16193,10 +16100,10 @@
         </p:cxnSp>
         <p:grpSp>
           <p:nvGrpSpPr>
-            <p:cNvPr id="27" name="그룹 26">
+            <p:cNvPr id="36" name="그룹 35">
               <a:extLst>
                 <a:ext uri="{FF2B5EF4-FFF2-40B4-BE49-F238E27FC236}">
-                  <a16:creationId xmlns:a16="http://schemas.microsoft.com/office/drawing/2014/main" id="{774EF43C-55C2-584E-5488-5FBE035E7553}"/>
+                  <a16:creationId xmlns:a16="http://schemas.microsoft.com/office/drawing/2014/main" id="{076E1B61-4A40-3D97-80EB-8EB89F0FCE47}"/>
                 </a:ext>
               </a:extLst>
             </p:cNvPr>
@@ -16213,10 +16120,10 @@
           </p:grpSpPr>
           <p:cxnSp>
             <p:nvCxnSpPr>
-              <p:cNvPr id="32" name="직선 연결선[R] 31">
+              <p:cNvPr id="79" name="직선 연결선[R] 78">
                 <a:extLst>
                   <a:ext uri="{FF2B5EF4-FFF2-40B4-BE49-F238E27FC236}">
-                    <a16:creationId xmlns:a16="http://schemas.microsoft.com/office/drawing/2014/main" id="{A4FB58CE-E5E8-850A-1F37-92D35DC27665}"/>
+                    <a16:creationId xmlns:a16="http://schemas.microsoft.com/office/drawing/2014/main" id="{089A9D5D-2CED-9280-183B-358957523214}"/>
                   </a:ext>
                 </a:extLst>
               </p:cNvPr>
@@ -16259,10 +16166,10 @@
           </p:cxnSp>
           <p:cxnSp>
             <p:nvCxnSpPr>
-              <p:cNvPr id="37" name="직선 연결선[R] 36">
+              <p:cNvPr id="80" name="직선 연결선[R] 79">
                 <a:extLst>
                   <a:ext uri="{FF2B5EF4-FFF2-40B4-BE49-F238E27FC236}">
-                    <a16:creationId xmlns:a16="http://schemas.microsoft.com/office/drawing/2014/main" id="{BE608EC8-4AA5-ABE7-D77C-FC5ED57C5667}"/>
+                    <a16:creationId xmlns:a16="http://schemas.microsoft.com/office/drawing/2014/main" id="{06DC6B51-6E9C-E4D3-F96E-357B73FF2780}"/>
                   </a:ext>
                 </a:extLst>
               </p:cNvPr>
@@ -16305,10 +16212,10 @@
           </p:cxnSp>
           <p:cxnSp>
             <p:nvCxnSpPr>
-              <p:cNvPr id="38" name="직선 연결선[R] 37">
+              <p:cNvPr id="82" name="직선 연결선[R] 81">
                 <a:extLst>
                   <a:ext uri="{FF2B5EF4-FFF2-40B4-BE49-F238E27FC236}">
-                    <a16:creationId xmlns:a16="http://schemas.microsoft.com/office/drawing/2014/main" id="{DE5DE66B-B8C5-4226-EE00-928983549D87}"/>
+                    <a16:creationId xmlns:a16="http://schemas.microsoft.com/office/drawing/2014/main" id="{FEC1FA0A-5E15-27FA-8A01-A70EA850B88B}"/>
                   </a:ext>
                 </a:extLst>
               </p:cNvPr>
@@ -16353,10 +16260,10 @@
       </p:grpSp>
       <p:grpSp>
         <p:nvGrpSpPr>
-          <p:cNvPr id="39" name="그룹 38">
+          <p:cNvPr id="83" name="그룹 82">
             <a:extLst>
               <a:ext uri="{FF2B5EF4-FFF2-40B4-BE49-F238E27FC236}">
-                <a16:creationId xmlns:a16="http://schemas.microsoft.com/office/drawing/2014/main" id="{1F6313E3-43D3-475E-1ED9-5D1ACB7CCE83}"/>
+                <a16:creationId xmlns:a16="http://schemas.microsoft.com/office/drawing/2014/main" id="{35B0D981-5C2F-C4B5-CBFD-B91D402903DC}"/>
               </a:ext>
             </a:extLst>
           </p:cNvPr>
@@ -16373,10 +16280,10 @@
         </p:grpSpPr>
         <p:grpSp>
           <p:nvGrpSpPr>
-            <p:cNvPr id="40" name="그룹 39">
+            <p:cNvPr id="84" name="그룹 83">
               <a:extLst>
                 <a:ext uri="{FF2B5EF4-FFF2-40B4-BE49-F238E27FC236}">
-                  <a16:creationId xmlns:a16="http://schemas.microsoft.com/office/drawing/2014/main" id="{2E88A98B-6122-D313-62C1-BD9DC9DCA39E}"/>
+                  <a16:creationId xmlns:a16="http://schemas.microsoft.com/office/drawing/2014/main" id="{5956947B-E511-17C7-2996-71DF7077D23E}"/>
                 </a:ext>
               </a:extLst>
             </p:cNvPr>
@@ -16393,10 +16300,10 @@
           </p:grpSpPr>
           <p:cxnSp>
             <p:nvCxnSpPr>
-              <p:cNvPr id="44" name="직선 연결선[R] 43">
+              <p:cNvPr id="88" name="직선 연결선[R] 87">
                 <a:extLst>
                   <a:ext uri="{FF2B5EF4-FFF2-40B4-BE49-F238E27FC236}">
-                    <a16:creationId xmlns:a16="http://schemas.microsoft.com/office/drawing/2014/main" id="{7CCA5AA6-257D-85ED-3324-4D499AFEFEEE}"/>
+                    <a16:creationId xmlns:a16="http://schemas.microsoft.com/office/drawing/2014/main" id="{1FBDF78F-1862-F5CB-1AD0-5303685B5E93}"/>
                   </a:ext>
                 </a:extLst>
               </p:cNvPr>
@@ -16439,10 +16346,10 @@
           </p:cxnSp>
           <p:cxnSp>
             <p:nvCxnSpPr>
-              <p:cNvPr id="45" name="직선 연결선[R] 44">
+              <p:cNvPr id="90" name="직선 연결선[R] 89">
                 <a:extLst>
                   <a:ext uri="{FF2B5EF4-FFF2-40B4-BE49-F238E27FC236}">
-                    <a16:creationId xmlns:a16="http://schemas.microsoft.com/office/drawing/2014/main" id="{75D802B6-F4F8-5F74-DBE6-C41CE6059180}"/>
+                    <a16:creationId xmlns:a16="http://schemas.microsoft.com/office/drawing/2014/main" id="{59306CB8-73A3-87BC-E63A-7497D8531B77}"/>
                   </a:ext>
                 </a:extLst>
               </p:cNvPr>
@@ -16486,10 +16393,10 @@
         </p:grpSp>
         <p:grpSp>
           <p:nvGrpSpPr>
-            <p:cNvPr id="41" name="그룹 40">
+            <p:cNvPr id="85" name="그룹 84">
               <a:extLst>
                 <a:ext uri="{FF2B5EF4-FFF2-40B4-BE49-F238E27FC236}">
-                  <a16:creationId xmlns:a16="http://schemas.microsoft.com/office/drawing/2014/main" id="{84F9DECC-669D-6008-392B-5C0BBD3EC092}"/>
+                  <a16:creationId xmlns:a16="http://schemas.microsoft.com/office/drawing/2014/main" id="{C5ACD26A-EA42-2B36-9674-BC946A543079}"/>
                 </a:ext>
               </a:extLst>
             </p:cNvPr>
@@ -16506,10 +16413,10 @@
           </p:grpSpPr>
           <p:cxnSp>
             <p:nvCxnSpPr>
-              <p:cNvPr id="42" name="직선 연결선[R] 41">
+              <p:cNvPr id="86" name="직선 연결선[R] 85">
                 <a:extLst>
                   <a:ext uri="{FF2B5EF4-FFF2-40B4-BE49-F238E27FC236}">
-                    <a16:creationId xmlns:a16="http://schemas.microsoft.com/office/drawing/2014/main" id="{F90ED3FD-AB8C-FAC2-0FF1-17E1B97F1B6E}"/>
+                    <a16:creationId xmlns:a16="http://schemas.microsoft.com/office/drawing/2014/main" id="{E482B131-3854-12AE-47B1-ECF96FB9FB61}"/>
                   </a:ext>
                 </a:extLst>
               </p:cNvPr>
@@ -16552,10 +16459,10 @@
           </p:cxnSp>
           <p:cxnSp>
             <p:nvCxnSpPr>
-              <p:cNvPr id="43" name="직선 연결선[R] 42">
+              <p:cNvPr id="87" name="직선 연결선[R] 86">
                 <a:extLst>
                   <a:ext uri="{FF2B5EF4-FFF2-40B4-BE49-F238E27FC236}">
-                    <a16:creationId xmlns:a16="http://schemas.microsoft.com/office/drawing/2014/main" id="{0E8113E0-CD97-E395-0AA6-E1B48DE4F5BF}"/>
+                    <a16:creationId xmlns:a16="http://schemas.microsoft.com/office/drawing/2014/main" id="{71A3AA57-93C9-F63F-1731-345B1457FE85}"/>
                   </a:ext>
                 </a:extLst>
               </p:cNvPr>
@@ -16600,10 +16507,10 @@
       </p:grpSp>
       <p:grpSp>
         <p:nvGrpSpPr>
-          <p:cNvPr id="46" name="그룹 45">
+          <p:cNvPr id="95" name="그룹 94">
             <a:extLst>
               <a:ext uri="{FF2B5EF4-FFF2-40B4-BE49-F238E27FC236}">
-                <a16:creationId xmlns:a16="http://schemas.microsoft.com/office/drawing/2014/main" id="{85ED8BBB-2D26-1DC1-EF89-282FB8AD60F5}"/>
+                <a16:creationId xmlns:a16="http://schemas.microsoft.com/office/drawing/2014/main" id="{3A1A3F10-FA3D-5DB9-5CB7-B9CB348AB3DE}"/>
               </a:ext>
             </a:extLst>
           </p:cNvPr>
@@ -16612,20 +16519,20 @@
         </p:nvGrpSpPr>
         <p:grpSpPr>
           <a:xfrm>
-            <a:off x="136372" y="752736"/>
-            <a:ext cx="1404870" cy="152617"/>
+            <a:off x="136372" y="752738"/>
+            <a:ext cx="1404870" cy="184667"/>
             <a:chOff x="108431" y="960651"/>
-            <a:chExt cx="1404870" cy="184666"/>
+            <a:chExt cx="1404870" cy="223446"/>
           </a:xfrm>
         </p:grpSpPr>
         <mc:AlternateContent xmlns:mc="http://schemas.openxmlformats.org/markup-compatibility/2006" xmlns:a14="http://schemas.microsoft.com/office/drawing/2010/main">
           <mc:Choice Requires="a14">
             <p:sp>
               <p:nvSpPr>
-                <p:cNvPr id="47" name="TextBox 46">
+                <p:cNvPr id="112" name="TextBox 111">
                   <a:extLst>
                     <a:ext uri="{FF2B5EF4-FFF2-40B4-BE49-F238E27FC236}">
-                      <a16:creationId xmlns:a16="http://schemas.microsoft.com/office/drawing/2014/main" id="{B6FA20CF-7CB0-BE77-11B5-A8D6A286B944}"/>
+                      <a16:creationId xmlns:a16="http://schemas.microsoft.com/office/drawing/2014/main" id="{B50A7169-4418-2834-FFF8-EFE73DAA5559}"/>
                     </a:ext>
                   </a:extLst>
                 </p:cNvPr>
@@ -16634,8 +16541,8 @@
               </p:nvSpPr>
               <p:spPr bwMode="auto">
                 <a:xfrm>
-                  <a:off x="108431" y="960651"/>
-                  <a:ext cx="302493" cy="184666"/>
+                  <a:off x="108431" y="960652"/>
+                  <a:ext cx="302493" cy="223445"/>
                 </a:xfrm>
                 <a:prstGeom prst="rect">
                   <a:avLst/>
@@ -16667,60 +16574,33 @@
                         <m:jc m:val="centerGroup"/>
                       </m:oMathParaPr>
                       <m:oMath xmlns:m="http://schemas.openxmlformats.org/officeDocument/2006/math">
-                        <m:sSub>
-                          <m:sSubPr>
-                            <m:ctrlPr>
-                              <a:rPr kumimoji="1" lang="en-US" altLang="ko-KR" sz="1200" b="0" i="1" kern="0" dirty="0" smtClean="0">
-                                <a:solidFill>
-                                  <a:srgbClr val="DC5E65"/>
-                                </a:solidFill>
-                                <a:latin typeface="Cambria Math" panose="02040503050406030204" pitchFamily="18" charset="0"/>
-                                <a:cs typeface="Arial" panose="020B0604020202020204" pitchFamily="34" charset="0"/>
-                              </a:rPr>
-                            </m:ctrlPr>
-                          </m:sSubPr>
-                          <m:e>
-                            <m:r>
-                              <a:rPr kumimoji="1" lang="en-US" altLang="ko-KR" sz="1200" b="0" i="0" kern="0" dirty="0" smtClean="0">
-                                <a:solidFill>
-                                  <a:srgbClr val="DC5E65"/>
-                                </a:solidFill>
-                                <a:latin typeface="Cambria Math" panose="02040503050406030204" pitchFamily="18" charset="0"/>
-                                <a:cs typeface="Arial" panose="020B0604020202020204" pitchFamily="34" charset="0"/>
-                              </a:rPr>
-                              <m:t> </m:t>
-                            </m:r>
-                            <m:r>
-                              <m:rPr>
-                                <m:sty m:val="p"/>
-                              </m:rPr>
-                              <a:rPr kumimoji="1" lang="el-GR" altLang="ko-KR" sz="1200" i="0" kern="0" dirty="0" smtClean="0">
-                                <a:solidFill>
-                                  <a:srgbClr val="DC5E65"/>
-                                </a:solidFill>
-                                <a:latin typeface="Cambria Math" panose="02040503050406030204" pitchFamily="18" charset="0"/>
-                                <a:cs typeface="Arial" panose="020B0604020202020204" pitchFamily="34" charset="0"/>
-                              </a:rPr>
-                              <m:t>Δ</m:t>
-                            </m:r>
-                          </m:e>
-                          <m:sub>
-                            <m:r>
-                              <a:rPr kumimoji="1" lang="en-US" altLang="ko-KR" sz="1200" b="0" i="0" kern="0" dirty="0" smtClean="0">
-                                <a:solidFill>
-                                  <a:srgbClr val="DC5E65"/>
-                                </a:solidFill>
-                                <a:latin typeface="Cambria Math" panose="02040503050406030204" pitchFamily="18" charset="0"/>
-                                <a:cs typeface="Arial" panose="020B0604020202020204" pitchFamily="34" charset="0"/>
-                              </a:rPr>
-                              <m:t>1</m:t>
-                            </m:r>
-                          </m:sub>
-                        </m:sSub>
+                        <m:r>
+                          <a:rPr kumimoji="1" lang="en-US" altLang="ko-KR" sz="1200" b="0" i="0" kern="0" dirty="0" smtClean="0">
+                            <a:solidFill>
+                              <a:srgbClr val="DC5E65"/>
+                            </a:solidFill>
+                            <a:latin typeface="Cambria Math" panose="02040503050406030204" pitchFamily="18" charset="0"/>
+                            <a:cs typeface="Arial" panose="020B0604020202020204" pitchFamily="34" charset="0"/>
+                          </a:rPr>
+                          <m:t> </m:t>
+                        </m:r>
+                        <m:r>
+                          <m:rPr>
+                            <m:sty m:val="p"/>
+                          </m:rPr>
+                          <a:rPr kumimoji="1" lang="el-GR" altLang="ko-KR" sz="1200" b="0" i="0" kern="0" dirty="0" smtClean="0">
+                            <a:solidFill>
+                              <a:srgbClr val="DC5E65"/>
+                            </a:solidFill>
+                            <a:latin typeface="Cambria Math" panose="02040503050406030204" pitchFamily="18" charset="0"/>
+                            <a:cs typeface="Arial" panose="020B0604020202020204" pitchFamily="34" charset="0"/>
+                          </a:rPr>
+                          <m:t>Δ</m:t>
+                        </m:r>
                       </m:oMath>
                     </m:oMathPara>
                   </a14:m>
-                  <a:endParaRPr/>
+                  <a:endParaRPr dirty="0"/>
                 </a:p>
               </p:txBody>
             </p:sp>
@@ -16728,10 +16608,10 @@
           <mc:Fallback xmlns="">
             <p:sp>
               <p:nvSpPr>
-                <p:cNvPr id="155" name="TextBox 154">
+                <p:cNvPr id="95" name="TextBox 94">
                   <a:extLst>
                     <a:ext uri="{FF2B5EF4-FFF2-40B4-BE49-F238E27FC236}">
-                      <a16:creationId xmlns:a16="http://schemas.microsoft.com/office/drawing/2014/main" id="{C77FB5E6-D43B-C229-95F7-68B732E5B828}"/>
+                      <a16:creationId xmlns:a16="http://schemas.microsoft.com/office/drawing/2014/main" id="{0B758BB5-77DE-3D7E-E481-4B80B25BC8FC}"/>
                     </a:ext>
                   </a:extLst>
                 </p:cNvPr>
@@ -16742,16 +16622,16 @@
               </p:nvSpPr>
               <p:spPr bwMode="auto">
                 <a:xfrm>
-                  <a:off x="108431" y="960651"/>
-                  <a:ext cx="302493" cy="184666"/>
+                  <a:off x="108431" y="960652"/>
+                  <a:ext cx="302493" cy="223445"/>
                 </a:xfrm>
                 <a:prstGeom prst="rect">
                   <a:avLst/>
                 </a:prstGeom>
                 <a:blipFill>
-                  <a:blip r:embed="rId7"/>
+                  <a:blip r:embed="rId6"/>
                   <a:stretch>
-                    <a:fillRect l="-12000" t="-28571" r="-16000" b="-57143"/>
+                    <a:fillRect t="-13333" b="-40000"/>
                   </a:stretch>
                 </a:blipFill>
                 <a:ln w="9525">
@@ -16780,10 +16660,10 @@
           <mc:Choice Requires="a14">
             <p:sp>
               <p:nvSpPr>
-                <p:cNvPr id="48" name="TextBox 47">
+                <p:cNvPr id="115" name="TextBox 114">
                   <a:extLst>
                     <a:ext uri="{FF2B5EF4-FFF2-40B4-BE49-F238E27FC236}">
-                      <a16:creationId xmlns:a16="http://schemas.microsoft.com/office/drawing/2014/main" id="{7EE06AB8-C9E2-10F1-FB34-27F070F5456A}"/>
+                      <a16:creationId xmlns:a16="http://schemas.microsoft.com/office/drawing/2014/main" id="{79F98DCE-18BD-6994-D869-659F2EA610AD}"/>
                     </a:ext>
                   </a:extLst>
                 </p:cNvPr>
@@ -16793,7 +16673,7 @@
               <p:spPr bwMode="auto">
                 <a:xfrm>
                   <a:off x="475890" y="960651"/>
-                  <a:ext cx="302493" cy="184666"/>
+                  <a:ext cx="302493" cy="223445"/>
                 </a:xfrm>
                 <a:prstGeom prst="rect">
                   <a:avLst/>
@@ -16825,60 +16705,33 @@
                         <m:jc m:val="centerGroup"/>
                       </m:oMathParaPr>
                       <m:oMath xmlns:m="http://schemas.openxmlformats.org/officeDocument/2006/math">
-                        <m:sSub>
-                          <m:sSubPr>
-                            <m:ctrlPr>
-                              <a:rPr kumimoji="1" lang="en-US" altLang="ko-KR" sz="1200" b="0" i="1" kern="0" dirty="0" smtClean="0">
-                                <a:solidFill>
-                                  <a:srgbClr val="DC5E65"/>
-                                </a:solidFill>
-                                <a:latin typeface="Cambria Math" panose="02040503050406030204" pitchFamily="18" charset="0"/>
-                                <a:cs typeface="Arial" panose="020B0604020202020204" pitchFamily="34" charset="0"/>
-                              </a:rPr>
-                            </m:ctrlPr>
-                          </m:sSubPr>
-                          <m:e>
-                            <m:r>
-                              <a:rPr kumimoji="1" lang="en-US" altLang="ko-KR" sz="1200" b="0" i="0" kern="0" dirty="0" smtClean="0">
-                                <a:solidFill>
-                                  <a:srgbClr val="DC5E65"/>
-                                </a:solidFill>
-                                <a:latin typeface="Cambria Math" panose="02040503050406030204" pitchFamily="18" charset="0"/>
-                                <a:cs typeface="Arial" panose="020B0604020202020204" pitchFamily="34" charset="0"/>
-                              </a:rPr>
-                              <m:t> </m:t>
-                            </m:r>
-                            <m:r>
-                              <m:rPr>
-                                <m:sty m:val="p"/>
-                              </m:rPr>
-                              <a:rPr kumimoji="1" lang="el-GR" altLang="ko-KR" sz="1200" i="0" kern="0" dirty="0" smtClean="0">
-                                <a:solidFill>
-                                  <a:srgbClr val="DC5E65"/>
-                                </a:solidFill>
-                                <a:latin typeface="Cambria Math" panose="02040503050406030204" pitchFamily="18" charset="0"/>
-                                <a:cs typeface="Arial" panose="020B0604020202020204" pitchFamily="34" charset="0"/>
-                              </a:rPr>
-                              <m:t>Δ</m:t>
-                            </m:r>
-                          </m:e>
-                          <m:sub>
-                            <m:r>
-                              <a:rPr kumimoji="1" lang="en-US" altLang="ko-KR" sz="1200" b="0" i="1" kern="0" dirty="0" smtClean="0">
-                                <a:solidFill>
-                                  <a:srgbClr val="DC5E65"/>
-                                </a:solidFill>
-                                <a:latin typeface="Cambria Math" panose="02040503050406030204" pitchFamily="18" charset="0"/>
-                                <a:cs typeface="Arial" panose="020B0604020202020204" pitchFamily="34" charset="0"/>
-                              </a:rPr>
-                              <m:t>2</m:t>
-                            </m:r>
-                          </m:sub>
-                        </m:sSub>
+                        <m:r>
+                          <a:rPr kumimoji="1" lang="el-GR" altLang="ko-KR" sz="1200" kern="0" dirty="0">
+                            <a:solidFill>
+                              <a:srgbClr val="DC5E65"/>
+                            </a:solidFill>
+                            <a:latin typeface="Cambria Math" panose="02040503050406030204" pitchFamily="18" charset="0"/>
+                            <a:cs typeface="Arial" panose="020B0604020202020204" pitchFamily="34" charset="0"/>
+                          </a:rPr>
+                          <m:t> </m:t>
+                        </m:r>
+                        <m:r>
+                          <m:rPr>
+                            <m:sty m:val="p"/>
+                          </m:rPr>
+                          <a:rPr kumimoji="1" lang="el-GR" altLang="ko-KR" sz="1200" kern="0" dirty="0">
+                            <a:solidFill>
+                              <a:srgbClr val="DC5E65"/>
+                            </a:solidFill>
+                            <a:latin typeface="Cambria Math" panose="02040503050406030204" pitchFamily="18" charset="0"/>
+                            <a:cs typeface="Arial" panose="020B0604020202020204" pitchFamily="34" charset="0"/>
+                          </a:rPr>
+                          <m:t>Δ</m:t>
+                        </m:r>
                       </m:oMath>
                     </m:oMathPara>
                   </a14:m>
-                  <a:endParaRPr/>
+                  <a:endParaRPr lang="el-GR" altLang="ko-KR" sz="1200" dirty="0"/>
                 </a:p>
               </p:txBody>
             </p:sp>
@@ -16886,10 +16739,10 @@
           <mc:Fallback xmlns="">
             <p:sp>
               <p:nvSpPr>
-                <p:cNvPr id="156" name="TextBox 155">
+                <p:cNvPr id="112" name="TextBox 111">
                   <a:extLst>
                     <a:ext uri="{FF2B5EF4-FFF2-40B4-BE49-F238E27FC236}">
-                      <a16:creationId xmlns:a16="http://schemas.microsoft.com/office/drawing/2014/main" id="{BF1DB5E7-A244-5314-0CB3-66FD5A2C9D03}"/>
+                      <a16:creationId xmlns:a16="http://schemas.microsoft.com/office/drawing/2014/main" id="{DFAD96FB-D68A-AF70-E7F8-A875AF9381F4}"/>
                     </a:ext>
                   </a:extLst>
                 </p:cNvPr>
@@ -16901,15 +16754,15 @@
               <p:spPr bwMode="auto">
                 <a:xfrm>
                   <a:off x="475890" y="960651"/>
-                  <a:ext cx="302493" cy="184666"/>
+                  <a:ext cx="302493" cy="223445"/>
                 </a:xfrm>
                 <a:prstGeom prst="rect">
                   <a:avLst/>
                 </a:prstGeom>
                 <a:blipFill>
-                  <a:blip r:embed="rId8"/>
+                  <a:blip r:embed="rId7"/>
                   <a:stretch>
-                    <a:fillRect l="-12000" t="-28571" r="-16000" b="-57143"/>
+                    <a:fillRect b="-6667"/>
                   </a:stretch>
                 </a:blipFill>
                 <a:ln w="9525">
@@ -16938,10 +16791,10 @@
           <mc:Choice Requires="a14">
             <p:sp>
               <p:nvSpPr>
-                <p:cNvPr id="49" name="TextBox 48">
+                <p:cNvPr id="118" name="TextBox 117">
                   <a:extLst>
                     <a:ext uri="{FF2B5EF4-FFF2-40B4-BE49-F238E27FC236}">
-                      <a16:creationId xmlns:a16="http://schemas.microsoft.com/office/drawing/2014/main" id="{D2F271C0-D6FF-D595-8A2C-B6A9ED383CB3}"/>
+                      <a16:creationId xmlns:a16="http://schemas.microsoft.com/office/drawing/2014/main" id="{BAF490B3-1C40-CB58-E083-24A53CF41328}"/>
                     </a:ext>
                   </a:extLst>
                 </p:cNvPr>
@@ -16951,7 +16804,7 @@
               <p:spPr bwMode="auto">
                 <a:xfrm>
                   <a:off x="1210808" y="960651"/>
-                  <a:ext cx="302493" cy="184666"/>
+                  <a:ext cx="302493" cy="223445"/>
                 </a:xfrm>
                 <a:prstGeom prst="rect">
                   <a:avLst/>
@@ -16983,60 +16836,33 @@
                         <m:jc m:val="centerGroup"/>
                       </m:oMathParaPr>
                       <m:oMath xmlns:m="http://schemas.openxmlformats.org/officeDocument/2006/math">
-                        <m:sSub>
-                          <m:sSubPr>
-                            <m:ctrlPr>
-                              <a:rPr kumimoji="1" lang="en-US" altLang="ko-KR" sz="1200" b="0" i="1" kern="0" dirty="0" smtClean="0">
-                                <a:solidFill>
-                                  <a:srgbClr val="DC5E65"/>
-                                </a:solidFill>
-                                <a:latin typeface="Cambria Math" panose="02040503050406030204" pitchFamily="18" charset="0"/>
-                                <a:cs typeface="Arial" panose="020B0604020202020204" pitchFamily="34" charset="0"/>
-                              </a:rPr>
-                            </m:ctrlPr>
-                          </m:sSubPr>
-                          <m:e>
-                            <m:r>
-                              <a:rPr kumimoji="1" lang="en-US" altLang="ko-KR" sz="1200" b="0" i="0" kern="0" dirty="0" smtClean="0">
-                                <a:solidFill>
-                                  <a:srgbClr val="DC5E65"/>
-                                </a:solidFill>
-                                <a:latin typeface="Cambria Math" panose="02040503050406030204" pitchFamily="18" charset="0"/>
-                                <a:cs typeface="Arial" panose="020B0604020202020204" pitchFamily="34" charset="0"/>
-                              </a:rPr>
-                              <m:t> </m:t>
-                            </m:r>
-                            <m:r>
-                              <m:rPr>
-                                <m:sty m:val="p"/>
-                              </m:rPr>
-                              <a:rPr kumimoji="1" lang="el-GR" altLang="ko-KR" sz="1200" i="0" kern="0" dirty="0" smtClean="0">
-                                <a:solidFill>
-                                  <a:srgbClr val="DC5E65"/>
-                                </a:solidFill>
-                                <a:latin typeface="Cambria Math" panose="02040503050406030204" pitchFamily="18" charset="0"/>
-                                <a:cs typeface="Arial" panose="020B0604020202020204" pitchFamily="34" charset="0"/>
-                              </a:rPr>
-                              <m:t>Δ</m:t>
-                            </m:r>
-                          </m:e>
-                          <m:sub>
-                            <m:r>
-                              <a:rPr kumimoji="1" lang="en-US" altLang="ko-KR" sz="1200" b="0" i="0" kern="0" dirty="0" smtClean="0">
-                                <a:solidFill>
-                                  <a:srgbClr val="DC5E65"/>
-                                </a:solidFill>
-                                <a:latin typeface="Cambria Math" panose="02040503050406030204" pitchFamily="18" charset="0"/>
-                                <a:cs typeface="Arial" panose="020B0604020202020204" pitchFamily="34" charset="0"/>
-                              </a:rPr>
-                              <m:t>4</m:t>
-                            </m:r>
-                          </m:sub>
-                        </m:sSub>
+                        <m:r>
+                          <a:rPr kumimoji="1" lang="el-GR" altLang="ko-KR" sz="1200" kern="0" dirty="0">
+                            <a:solidFill>
+                              <a:srgbClr val="DC5E65"/>
+                            </a:solidFill>
+                            <a:latin typeface="Cambria Math" panose="02040503050406030204" pitchFamily="18" charset="0"/>
+                            <a:cs typeface="Arial" panose="020B0604020202020204" pitchFamily="34" charset="0"/>
+                          </a:rPr>
+                          <m:t> </m:t>
+                        </m:r>
+                        <m:r>
+                          <m:rPr>
+                            <m:sty m:val="p"/>
+                          </m:rPr>
+                          <a:rPr kumimoji="1" lang="el-GR" altLang="ko-KR" sz="1200" kern="0" dirty="0">
+                            <a:solidFill>
+                              <a:srgbClr val="DC5E65"/>
+                            </a:solidFill>
+                            <a:latin typeface="Cambria Math" panose="02040503050406030204" pitchFamily="18" charset="0"/>
+                            <a:cs typeface="Arial" panose="020B0604020202020204" pitchFamily="34" charset="0"/>
+                          </a:rPr>
+                          <m:t>Δ</m:t>
+                        </m:r>
                       </m:oMath>
                     </m:oMathPara>
                   </a14:m>
-                  <a:endParaRPr/>
+                  <a:endParaRPr lang="el-GR" altLang="ko-KR" sz="1200" dirty="0"/>
                 </a:p>
               </p:txBody>
             </p:sp>
@@ -17044,10 +16870,10 @@
           <mc:Fallback xmlns="">
             <p:sp>
               <p:nvSpPr>
-                <p:cNvPr id="157" name="TextBox 156">
+                <p:cNvPr id="115" name="TextBox 114">
                   <a:extLst>
                     <a:ext uri="{FF2B5EF4-FFF2-40B4-BE49-F238E27FC236}">
-                      <a16:creationId xmlns:a16="http://schemas.microsoft.com/office/drawing/2014/main" id="{AEF886C2-3DB2-2DB7-9BA8-E94C90FF7333}"/>
+                      <a16:creationId xmlns:a16="http://schemas.microsoft.com/office/drawing/2014/main" id="{25DEA341-A9D3-0DC7-7503-8259D1054192}"/>
                     </a:ext>
                   </a:extLst>
                 </p:cNvPr>
@@ -17059,15 +16885,15 @@
               <p:spPr bwMode="auto">
                 <a:xfrm>
                   <a:off x="1210808" y="960651"/>
-                  <a:ext cx="302493" cy="184666"/>
+                  <a:ext cx="302493" cy="223445"/>
                 </a:xfrm>
                 <a:prstGeom prst="rect">
                   <a:avLst/>
                 </a:prstGeom>
                 <a:blipFill>
-                  <a:blip r:embed="rId9"/>
+                  <a:blip r:embed="rId8"/>
                   <a:stretch>
-                    <a:fillRect l="-12000" t="-28571" r="-16000" b="-57143"/>
+                    <a:fillRect b="-6667"/>
                   </a:stretch>
                 </a:blipFill>
                 <a:ln w="9525">
@@ -17096,10 +16922,10 @@
           <mc:Choice Requires="a14">
             <p:sp>
               <p:nvSpPr>
-                <p:cNvPr id="50" name="TextBox 49">
+                <p:cNvPr id="121" name="TextBox 120">
                   <a:extLst>
                     <a:ext uri="{FF2B5EF4-FFF2-40B4-BE49-F238E27FC236}">
-                      <a16:creationId xmlns:a16="http://schemas.microsoft.com/office/drawing/2014/main" id="{24FC2DFC-66F3-FDA5-061F-A0EBFDD2A935}"/>
+                      <a16:creationId xmlns:a16="http://schemas.microsoft.com/office/drawing/2014/main" id="{50334249-2D21-8B1E-CE29-D1162462FB11}"/>
                     </a:ext>
                   </a:extLst>
                 </p:cNvPr>
@@ -17109,7 +16935,7 @@
               <p:spPr bwMode="auto">
                 <a:xfrm>
                   <a:off x="843349" y="960651"/>
-                  <a:ext cx="302493" cy="184666"/>
+                  <a:ext cx="302493" cy="223445"/>
                 </a:xfrm>
                 <a:prstGeom prst="rect">
                   <a:avLst/>
@@ -17141,60 +16967,33 @@
                         <m:jc m:val="centerGroup"/>
                       </m:oMathParaPr>
                       <m:oMath xmlns:m="http://schemas.openxmlformats.org/officeDocument/2006/math">
-                        <m:sSub>
-                          <m:sSubPr>
-                            <m:ctrlPr>
-                              <a:rPr kumimoji="1" lang="en-US" altLang="ko-KR" sz="1200" b="0" i="1" kern="0" dirty="0" smtClean="0">
-                                <a:solidFill>
-                                  <a:srgbClr val="DC5E65"/>
-                                </a:solidFill>
-                                <a:latin typeface="Cambria Math" panose="02040503050406030204" pitchFamily="18" charset="0"/>
-                                <a:cs typeface="Arial" panose="020B0604020202020204" pitchFamily="34" charset="0"/>
-                              </a:rPr>
-                            </m:ctrlPr>
-                          </m:sSubPr>
-                          <m:e>
-                            <m:r>
-                              <a:rPr kumimoji="1" lang="en-US" altLang="ko-KR" sz="1200" b="0" i="0" kern="0" dirty="0" smtClean="0">
-                                <a:solidFill>
-                                  <a:srgbClr val="DC5E65"/>
-                                </a:solidFill>
-                                <a:latin typeface="Cambria Math" panose="02040503050406030204" pitchFamily="18" charset="0"/>
-                                <a:cs typeface="Arial" panose="020B0604020202020204" pitchFamily="34" charset="0"/>
-                              </a:rPr>
-                              <m:t> </m:t>
-                            </m:r>
-                            <m:r>
-                              <m:rPr>
-                                <m:sty m:val="p"/>
-                              </m:rPr>
-                              <a:rPr kumimoji="1" lang="el-GR" altLang="ko-KR" sz="1200" i="0" kern="0" dirty="0" smtClean="0">
-                                <a:solidFill>
-                                  <a:srgbClr val="DC5E65"/>
-                                </a:solidFill>
-                                <a:latin typeface="Cambria Math" panose="02040503050406030204" pitchFamily="18" charset="0"/>
-                                <a:cs typeface="Arial" panose="020B0604020202020204" pitchFamily="34" charset="0"/>
-                              </a:rPr>
-                              <m:t>Δ</m:t>
-                            </m:r>
-                          </m:e>
-                          <m:sub>
-                            <m:r>
-                              <a:rPr kumimoji="1" lang="en-US" altLang="ko-KR" sz="1200" b="0" i="1" kern="0" dirty="0" smtClean="0">
-                                <a:solidFill>
-                                  <a:srgbClr val="DC5E65"/>
-                                </a:solidFill>
-                                <a:latin typeface="Cambria Math" panose="02040503050406030204" pitchFamily="18" charset="0"/>
-                                <a:cs typeface="Arial" panose="020B0604020202020204" pitchFamily="34" charset="0"/>
-                              </a:rPr>
-                              <m:t>3</m:t>
-                            </m:r>
-                          </m:sub>
-                        </m:sSub>
+                        <m:r>
+                          <a:rPr kumimoji="1" lang="el-GR" altLang="ko-KR" sz="1200" kern="0" dirty="0">
+                            <a:solidFill>
+                              <a:srgbClr val="DC5E65"/>
+                            </a:solidFill>
+                            <a:latin typeface="Cambria Math" panose="02040503050406030204" pitchFamily="18" charset="0"/>
+                            <a:cs typeface="Arial" panose="020B0604020202020204" pitchFamily="34" charset="0"/>
+                          </a:rPr>
+                          <m:t> </m:t>
+                        </m:r>
+                        <m:r>
+                          <m:rPr>
+                            <m:sty m:val="p"/>
+                          </m:rPr>
+                          <a:rPr kumimoji="1" lang="el-GR" altLang="ko-KR" sz="1200" kern="0" dirty="0">
+                            <a:solidFill>
+                              <a:srgbClr val="DC5E65"/>
+                            </a:solidFill>
+                            <a:latin typeface="Cambria Math" panose="02040503050406030204" pitchFamily="18" charset="0"/>
+                            <a:cs typeface="Arial" panose="020B0604020202020204" pitchFamily="34" charset="0"/>
+                          </a:rPr>
+                          <m:t>Δ</m:t>
+                        </m:r>
                       </m:oMath>
                     </m:oMathPara>
                   </a14:m>
-                  <a:endParaRPr/>
+                  <a:endParaRPr lang="el-GR" altLang="ko-KR" sz="1200" dirty="0"/>
                 </a:p>
               </p:txBody>
             </p:sp>
@@ -17202,10 +17001,10 @@
           <mc:Fallback xmlns="">
             <p:sp>
               <p:nvSpPr>
-                <p:cNvPr id="158" name="TextBox 157">
+                <p:cNvPr id="118" name="TextBox 117">
                   <a:extLst>
                     <a:ext uri="{FF2B5EF4-FFF2-40B4-BE49-F238E27FC236}">
-                      <a16:creationId xmlns:a16="http://schemas.microsoft.com/office/drawing/2014/main" id="{643AD5FE-BE09-CB6A-6B1E-D242BEF3131F}"/>
+                      <a16:creationId xmlns:a16="http://schemas.microsoft.com/office/drawing/2014/main" id="{F7162CD0-839C-F9FD-C79C-57104600F6DF}"/>
                     </a:ext>
                   </a:extLst>
                 </p:cNvPr>
@@ -17217,15 +17016,15 @@
               <p:spPr bwMode="auto">
                 <a:xfrm>
                   <a:off x="843349" y="960651"/>
-                  <a:ext cx="302493" cy="184666"/>
+                  <a:ext cx="302493" cy="223445"/>
                 </a:xfrm>
                 <a:prstGeom prst="rect">
                   <a:avLst/>
                 </a:prstGeom>
                 <a:blipFill>
-                  <a:blip r:embed="rId10"/>
+                  <a:blip r:embed="rId8"/>
                   <a:stretch>
-                    <a:fillRect l="-12000" t="-28571" r="-16000" b="-57143"/>
+                    <a:fillRect b="-6667"/>
                   </a:stretch>
                 </a:blipFill>
                 <a:ln w="9525">
@@ -17253,10 +17052,10 @@
       </p:grpSp>
       <p:sp>
         <p:nvSpPr>
-          <p:cNvPr id="51" name="TextBox 50">
+          <p:cNvPr id="124" name="TextBox 123">
             <a:extLst>
               <a:ext uri="{FF2B5EF4-FFF2-40B4-BE49-F238E27FC236}">
-                <a16:creationId xmlns:a16="http://schemas.microsoft.com/office/drawing/2014/main" id="{F732B6E9-BBC1-4D72-214C-46DDA0468C44}"/>
+                <a16:creationId xmlns:a16="http://schemas.microsoft.com/office/drawing/2014/main" id="{62EA2725-D33B-CC1C-0C6D-DF73D4D990D3}"/>
               </a:ext>
             </a:extLst>
           </p:cNvPr>
@@ -17327,10 +17126,10 @@
       </p:sp>
       <p:cxnSp>
         <p:nvCxnSpPr>
-          <p:cNvPr id="52" name="직선 연결선[R] 51">
+          <p:cNvPr id="125" name="직선 연결선[R] 124">
             <a:extLst>
               <a:ext uri="{FF2B5EF4-FFF2-40B4-BE49-F238E27FC236}">
-                <a16:creationId xmlns:a16="http://schemas.microsoft.com/office/drawing/2014/main" id="{2E3DA708-3B61-7FE7-8509-9184CA1ACF0A}"/>
+                <a16:creationId xmlns:a16="http://schemas.microsoft.com/office/drawing/2014/main" id="{81CB99D7-6743-327B-02B0-36A190A0C397}"/>
               </a:ext>
             </a:extLst>
           </p:cNvPr>
@@ -17373,10 +17172,10 @@
       </p:cxnSp>
       <p:cxnSp>
         <p:nvCxnSpPr>
-          <p:cNvPr id="53" name="직선 연결선[R] 52">
+          <p:cNvPr id="126" name="직선 연결선[R] 125">
             <a:extLst>
               <a:ext uri="{FF2B5EF4-FFF2-40B4-BE49-F238E27FC236}">
-                <a16:creationId xmlns:a16="http://schemas.microsoft.com/office/drawing/2014/main" id="{B2F3A3FF-365B-B120-762E-C1F2ED68C205}"/>
+                <a16:creationId xmlns:a16="http://schemas.microsoft.com/office/drawing/2014/main" id="{89B48B40-FCCC-E975-5761-143295027E3D}"/>
               </a:ext>
             </a:extLst>
           </p:cNvPr>
@@ -17419,10 +17218,10 @@
       </p:cxnSp>
       <p:cxnSp>
         <p:nvCxnSpPr>
-          <p:cNvPr id="54" name="직선 연결선[R] 53">
+          <p:cNvPr id="127" name="직선 연결선[R] 126">
             <a:extLst>
               <a:ext uri="{FF2B5EF4-FFF2-40B4-BE49-F238E27FC236}">
-                <a16:creationId xmlns:a16="http://schemas.microsoft.com/office/drawing/2014/main" id="{CFBDBBC9-CAC0-F934-1F1A-38B49CB77CAE}"/>
+                <a16:creationId xmlns:a16="http://schemas.microsoft.com/office/drawing/2014/main" id="{E6BB5CBF-0F09-26ED-8559-6F176032CA2B}"/>
               </a:ext>
             </a:extLst>
           </p:cNvPr>
@@ -17465,10 +17264,10 @@
       </p:cxnSp>
       <p:grpSp>
         <p:nvGrpSpPr>
-          <p:cNvPr id="55" name="그룹 54">
+          <p:cNvPr id="128" name="그룹 127">
             <a:extLst>
               <a:ext uri="{FF2B5EF4-FFF2-40B4-BE49-F238E27FC236}">
-                <a16:creationId xmlns:a16="http://schemas.microsoft.com/office/drawing/2014/main" id="{53193F96-E554-950F-58AB-6FFC58FF17D2}"/>
+                <a16:creationId xmlns:a16="http://schemas.microsoft.com/office/drawing/2014/main" id="{2ABC09B4-ABB6-1ACF-B8CA-783329B0C61D}"/>
               </a:ext>
             </a:extLst>
           </p:cNvPr>
@@ -17487,10 +17286,10 @@
           <mc:Choice Requires="a14">
             <p:sp>
               <p:nvSpPr>
-                <p:cNvPr id="56" name="TextBox 55">
+                <p:cNvPr id="129" name="TextBox 128">
                   <a:extLst>
                     <a:ext uri="{FF2B5EF4-FFF2-40B4-BE49-F238E27FC236}">
-                      <a16:creationId xmlns:a16="http://schemas.microsoft.com/office/drawing/2014/main" id="{8F72F3E1-7477-0AA1-ADDE-29633EB614E2}"/>
+                      <a16:creationId xmlns:a16="http://schemas.microsoft.com/office/drawing/2014/main" id="{3150B96D-26B2-3338-97F9-41AAFE897ED7}"/>
                     </a:ext>
                   </a:extLst>
                 </p:cNvPr>
@@ -17645,10 +17444,10 @@
           <mc:Choice Requires="a14">
             <p:sp>
               <p:nvSpPr>
-                <p:cNvPr id="57" name="TextBox 56">
+                <p:cNvPr id="130" name="TextBox 129">
                   <a:extLst>
                     <a:ext uri="{FF2B5EF4-FFF2-40B4-BE49-F238E27FC236}">
-                      <a16:creationId xmlns:a16="http://schemas.microsoft.com/office/drawing/2014/main" id="{007B1471-7303-1696-65C0-49C64D9C2E9D}"/>
+                      <a16:creationId xmlns:a16="http://schemas.microsoft.com/office/drawing/2014/main" id="{B8053C45-C317-8B27-5CC8-9CF679FCBC24}"/>
                     </a:ext>
                   </a:extLst>
                 </p:cNvPr>
@@ -17803,10 +17602,10 @@
           <mc:Choice Requires="a14">
             <p:sp>
               <p:nvSpPr>
-                <p:cNvPr id="58" name="TextBox 57">
+                <p:cNvPr id="134" name="TextBox 133">
                   <a:extLst>
                     <a:ext uri="{FF2B5EF4-FFF2-40B4-BE49-F238E27FC236}">
-                      <a16:creationId xmlns:a16="http://schemas.microsoft.com/office/drawing/2014/main" id="{36BA5AE5-3614-4728-3639-D7CA76682123}"/>
+                      <a16:creationId xmlns:a16="http://schemas.microsoft.com/office/drawing/2014/main" id="{8BDDF1EA-7A88-8533-B2DA-86D2F5AD52F5}"/>
                     </a:ext>
                   </a:extLst>
                 </p:cNvPr>
@@ -17961,10 +17760,10 @@
           <mc:Choice Requires="a14">
             <p:sp>
               <p:nvSpPr>
-                <p:cNvPr id="59" name="TextBox 58">
+                <p:cNvPr id="135" name="TextBox 134">
                   <a:extLst>
                     <a:ext uri="{FF2B5EF4-FFF2-40B4-BE49-F238E27FC236}">
-                      <a16:creationId xmlns:a16="http://schemas.microsoft.com/office/drawing/2014/main" id="{168245BA-89DE-C72B-7209-6CBD437A36AC}"/>
+                      <a16:creationId xmlns:a16="http://schemas.microsoft.com/office/drawing/2014/main" id="{2DF6F5EC-8BC2-2816-A9BD-EE797697F7F2}"/>
                     </a:ext>
                   </a:extLst>
                 </p:cNvPr>
@@ -18108,10 +17907,10 @@
       </p:grpSp>
       <p:cxnSp>
         <p:nvCxnSpPr>
-          <p:cNvPr id="60" name="직선 화살표 연결선 59">
+          <p:cNvPr id="136" name="직선 화살표 연결선 135">
             <a:extLst>
               <a:ext uri="{FF2B5EF4-FFF2-40B4-BE49-F238E27FC236}">
-                <a16:creationId xmlns:a16="http://schemas.microsoft.com/office/drawing/2014/main" id="{D1A48380-3C19-6992-4D30-8A49A6D9912B}"/>
+                <a16:creationId xmlns:a16="http://schemas.microsoft.com/office/drawing/2014/main" id="{D0C384A4-7CFE-B9FE-8A8C-AD10B6B521C0}"/>
               </a:ext>
             </a:extLst>
           </p:cNvPr>
@@ -18152,10 +17951,10 @@
       </p:cxnSp>
       <p:cxnSp>
         <p:nvCxnSpPr>
-          <p:cNvPr id="61" name="직선 화살표 연결선 60">
+          <p:cNvPr id="138" name="직선 화살표 연결선 137">
             <a:extLst>
               <a:ext uri="{FF2B5EF4-FFF2-40B4-BE49-F238E27FC236}">
-                <a16:creationId xmlns:a16="http://schemas.microsoft.com/office/drawing/2014/main" id="{5DEE5F98-4B55-2528-D2CF-C7A9FC012424}"/>
+                <a16:creationId xmlns:a16="http://schemas.microsoft.com/office/drawing/2014/main" id="{F45827E4-B60A-C286-649F-0E249A7B614D}"/>
               </a:ext>
             </a:extLst>
           </p:cNvPr>
@@ -18196,10 +17995,10 @@
       </p:cxnSp>
       <p:cxnSp>
         <p:nvCxnSpPr>
-          <p:cNvPr id="62" name="직선 연결선[R] 61">
+          <p:cNvPr id="139" name="직선 연결선[R] 138">
             <a:extLst>
               <a:ext uri="{FF2B5EF4-FFF2-40B4-BE49-F238E27FC236}">
-                <a16:creationId xmlns:a16="http://schemas.microsoft.com/office/drawing/2014/main" id="{F82D9312-0CD6-ED70-81FA-772BFAE63043}"/>
+                <a16:creationId xmlns:a16="http://schemas.microsoft.com/office/drawing/2014/main" id="{238009DB-4D0F-62FF-C405-DD684E276E93}"/>
               </a:ext>
             </a:extLst>
           </p:cNvPr>
@@ -18242,10 +18041,10 @@
       </p:cxnSp>
       <p:cxnSp>
         <p:nvCxnSpPr>
-          <p:cNvPr id="63" name="직선 연결선[R] 62">
+          <p:cNvPr id="141" name="직선 연결선[R] 140">
             <a:extLst>
               <a:ext uri="{FF2B5EF4-FFF2-40B4-BE49-F238E27FC236}">
-                <a16:creationId xmlns:a16="http://schemas.microsoft.com/office/drawing/2014/main" id="{4A98B629-E81E-8188-5BDD-EEC4FF564DCE}"/>
+                <a16:creationId xmlns:a16="http://schemas.microsoft.com/office/drawing/2014/main" id="{CD798B14-CECC-3E42-A367-2945BF5D4189}"/>
               </a:ext>
             </a:extLst>
           </p:cNvPr>
@@ -18288,16 +18087,16 @@
       </p:cxnSp>
       <p:cxnSp>
         <p:nvCxnSpPr>
-          <p:cNvPr id="64" name="직선 연결선[R] 63">
+          <p:cNvPr id="142" name="직선 연결선[R] 141">
             <a:extLst>
               <a:ext uri="{FF2B5EF4-FFF2-40B4-BE49-F238E27FC236}">
-                <a16:creationId xmlns:a16="http://schemas.microsoft.com/office/drawing/2014/main" id="{F1E0A6CA-211C-79D0-6E47-C494F6A795A5}"/>
+                <a16:creationId xmlns:a16="http://schemas.microsoft.com/office/drawing/2014/main" id="{CB26266A-18DE-5598-D485-16E0956258B4}"/>
               </a:ext>
             </a:extLst>
           </p:cNvPr>
           <p:cNvCxnSpPr>
             <a:cxnSpLocks/>
-            <a:endCxn id="231" idx="0"/>
+            <a:endCxn id="303" idx="0"/>
           </p:cNvCxnSpPr>
           <p:nvPr/>
         </p:nvCxnSpPr>
@@ -18335,10 +18134,10 @@
       </p:cxnSp>
       <p:cxnSp>
         <p:nvCxnSpPr>
-          <p:cNvPr id="65" name="직선 연결선[R] 64">
+          <p:cNvPr id="143" name="직선 연결선[R] 142">
             <a:extLst>
               <a:ext uri="{FF2B5EF4-FFF2-40B4-BE49-F238E27FC236}">
-                <a16:creationId xmlns:a16="http://schemas.microsoft.com/office/drawing/2014/main" id="{8A58CDEC-41C0-90F6-8F1F-9BFBF437B087}"/>
+                <a16:creationId xmlns:a16="http://schemas.microsoft.com/office/drawing/2014/main" id="{118CF67A-87BE-F8C8-2211-E60D86775214}"/>
               </a:ext>
             </a:extLst>
           </p:cNvPr>
@@ -18381,10 +18180,10 @@
       </p:cxnSp>
       <p:cxnSp>
         <p:nvCxnSpPr>
-          <p:cNvPr id="66" name="직선 연결선[R] 65">
+          <p:cNvPr id="144" name="직선 연결선[R] 143">
             <a:extLst>
               <a:ext uri="{FF2B5EF4-FFF2-40B4-BE49-F238E27FC236}">
-                <a16:creationId xmlns:a16="http://schemas.microsoft.com/office/drawing/2014/main" id="{DEB4A364-AA18-4162-30FB-BDA3DC8312B7}"/>
+                <a16:creationId xmlns:a16="http://schemas.microsoft.com/office/drawing/2014/main" id="{1512959A-E4A4-47F5-6C9A-AF72BE3500F1}"/>
               </a:ext>
             </a:extLst>
           </p:cNvPr>
@@ -18427,10 +18226,10 @@
       </p:cxnSp>
       <p:grpSp>
         <p:nvGrpSpPr>
-          <p:cNvPr id="67" name="그룹 66">
+          <p:cNvPr id="145" name="그룹 144">
             <a:extLst>
               <a:ext uri="{FF2B5EF4-FFF2-40B4-BE49-F238E27FC236}">
-                <a16:creationId xmlns:a16="http://schemas.microsoft.com/office/drawing/2014/main" id="{63F676C2-52AE-E592-7559-99AAE1DA0F8C}"/>
+                <a16:creationId xmlns:a16="http://schemas.microsoft.com/office/drawing/2014/main" id="{9CAEB528-1655-FEFE-AB89-8A57971D427C}"/>
               </a:ext>
             </a:extLst>
           </p:cNvPr>
@@ -18447,10 +18246,10 @@
         </p:grpSpPr>
         <p:cxnSp>
           <p:nvCxnSpPr>
-            <p:cNvPr id="68" name="직선 연결선[R] 67">
+            <p:cNvPr id="155" name="직선 연결선[R] 154">
               <a:extLst>
                 <a:ext uri="{FF2B5EF4-FFF2-40B4-BE49-F238E27FC236}">
-                  <a16:creationId xmlns:a16="http://schemas.microsoft.com/office/drawing/2014/main" id="{A7B10087-36E7-3B85-BE9A-710735686692}"/>
+                  <a16:creationId xmlns:a16="http://schemas.microsoft.com/office/drawing/2014/main" id="{7234E4FE-22C9-701D-5ED8-1751DF54642C}"/>
                 </a:ext>
               </a:extLst>
             </p:cNvPr>
@@ -18493,10 +18292,10 @@
         </p:cxnSp>
         <p:grpSp>
           <p:nvGrpSpPr>
-            <p:cNvPr id="69" name="그룹 68">
+            <p:cNvPr id="156" name="그룹 155">
               <a:extLst>
                 <a:ext uri="{FF2B5EF4-FFF2-40B4-BE49-F238E27FC236}">
-                  <a16:creationId xmlns:a16="http://schemas.microsoft.com/office/drawing/2014/main" id="{EBDBC679-9418-E60F-9931-2B35ACFDEDE8}"/>
+                  <a16:creationId xmlns:a16="http://schemas.microsoft.com/office/drawing/2014/main" id="{2FCC203F-872E-C8FA-5CE7-C94AB9CEF2F6}"/>
                 </a:ext>
               </a:extLst>
             </p:cNvPr>
@@ -18513,10 +18312,10 @@
           </p:grpSpPr>
           <p:cxnSp>
             <p:nvCxnSpPr>
-              <p:cNvPr id="70" name="직선 연결선[R] 69">
+              <p:cNvPr id="157" name="직선 연결선[R] 156">
                 <a:extLst>
                   <a:ext uri="{FF2B5EF4-FFF2-40B4-BE49-F238E27FC236}">
-                    <a16:creationId xmlns:a16="http://schemas.microsoft.com/office/drawing/2014/main" id="{7FBB72DF-BAAA-428B-ED05-67E4DBF8773B}"/>
+                    <a16:creationId xmlns:a16="http://schemas.microsoft.com/office/drawing/2014/main" id="{177A6F16-5015-4E86-7FE7-7F7BB0833C7C}"/>
                   </a:ext>
                 </a:extLst>
               </p:cNvPr>
@@ -18559,10 +18358,10 @@
           </p:cxnSp>
           <p:cxnSp>
             <p:nvCxnSpPr>
-              <p:cNvPr id="71" name="직선 연결선[R] 70">
+              <p:cNvPr id="158" name="직선 연결선[R] 157">
                 <a:extLst>
                   <a:ext uri="{FF2B5EF4-FFF2-40B4-BE49-F238E27FC236}">
-                    <a16:creationId xmlns:a16="http://schemas.microsoft.com/office/drawing/2014/main" id="{345EB2B2-037C-74D4-4BB5-AE058858111E}"/>
+                    <a16:creationId xmlns:a16="http://schemas.microsoft.com/office/drawing/2014/main" id="{A2D587E3-92BB-E983-FBFF-84472E821F8E}"/>
                   </a:ext>
                 </a:extLst>
               </p:cNvPr>
@@ -18605,10 +18404,10 @@
           </p:cxnSp>
           <p:cxnSp>
             <p:nvCxnSpPr>
-              <p:cNvPr id="72" name="직선 연결선[R] 71">
+              <p:cNvPr id="162" name="직선 연결선[R] 161">
                 <a:extLst>
                   <a:ext uri="{FF2B5EF4-FFF2-40B4-BE49-F238E27FC236}">
-                    <a16:creationId xmlns:a16="http://schemas.microsoft.com/office/drawing/2014/main" id="{B2E4EE8E-6469-3CAF-E8B2-D52A432D36AD}"/>
+                    <a16:creationId xmlns:a16="http://schemas.microsoft.com/office/drawing/2014/main" id="{BA649E32-D425-8988-01FA-E9A90C9E8170}"/>
                   </a:ext>
                 </a:extLst>
               </p:cNvPr>
@@ -18653,10 +18452,10 @@
       </p:grpSp>
       <p:grpSp>
         <p:nvGrpSpPr>
-          <p:cNvPr id="73" name="그룹 72">
+          <p:cNvPr id="163" name="그룹 162">
             <a:extLst>
               <a:ext uri="{FF2B5EF4-FFF2-40B4-BE49-F238E27FC236}">
-                <a16:creationId xmlns:a16="http://schemas.microsoft.com/office/drawing/2014/main" id="{549366CB-76E9-3517-BC8A-997FECB17D1D}"/>
+                <a16:creationId xmlns:a16="http://schemas.microsoft.com/office/drawing/2014/main" id="{503A6BC8-8427-9DDD-06CE-552EB15067FF}"/>
               </a:ext>
             </a:extLst>
           </p:cNvPr>
@@ -18673,10 +18472,10 @@
         </p:grpSpPr>
         <p:grpSp>
           <p:nvGrpSpPr>
-            <p:cNvPr id="74" name="그룹 73">
+            <p:cNvPr id="164" name="그룹 163">
               <a:extLst>
                 <a:ext uri="{FF2B5EF4-FFF2-40B4-BE49-F238E27FC236}">
-                  <a16:creationId xmlns:a16="http://schemas.microsoft.com/office/drawing/2014/main" id="{11AAFBE9-711D-3D3D-DBA5-62AFB6D02014}"/>
+                  <a16:creationId xmlns:a16="http://schemas.microsoft.com/office/drawing/2014/main" id="{25E8A6F0-3190-C437-2BB7-D66C0C8F72BE}"/>
                 </a:ext>
               </a:extLst>
             </p:cNvPr>
@@ -18693,10 +18492,10 @@
           </p:grpSpPr>
           <p:cxnSp>
             <p:nvCxnSpPr>
-              <p:cNvPr id="78" name="직선 연결선[R] 77">
+              <p:cNvPr id="168" name="직선 연결선[R] 167">
                 <a:extLst>
                   <a:ext uri="{FF2B5EF4-FFF2-40B4-BE49-F238E27FC236}">
-                    <a16:creationId xmlns:a16="http://schemas.microsoft.com/office/drawing/2014/main" id="{4DE05F75-103C-1538-D4BB-4FB2D31F7973}"/>
+                    <a16:creationId xmlns:a16="http://schemas.microsoft.com/office/drawing/2014/main" id="{399FC2A0-4D6A-3FEC-EEEB-ED23F14E54DA}"/>
                   </a:ext>
                 </a:extLst>
               </p:cNvPr>
@@ -18739,10 +18538,10 @@
           </p:cxnSp>
           <p:cxnSp>
             <p:nvCxnSpPr>
-              <p:cNvPr id="81" name="직선 연결선[R] 80">
+              <p:cNvPr id="169" name="직선 연결선[R] 168">
                 <a:extLst>
                   <a:ext uri="{FF2B5EF4-FFF2-40B4-BE49-F238E27FC236}">
-                    <a16:creationId xmlns:a16="http://schemas.microsoft.com/office/drawing/2014/main" id="{549CDF35-B7EB-7601-D218-A9AD633FF3AA}"/>
+                    <a16:creationId xmlns:a16="http://schemas.microsoft.com/office/drawing/2014/main" id="{6FEB6373-84AD-1D6A-4FB2-4234FE1E18B7}"/>
                   </a:ext>
                 </a:extLst>
               </p:cNvPr>
@@ -18786,10 +18585,10 @@
         </p:grpSp>
         <p:grpSp>
           <p:nvGrpSpPr>
-            <p:cNvPr id="75" name="그룹 74">
+            <p:cNvPr id="165" name="그룹 164">
               <a:extLst>
                 <a:ext uri="{FF2B5EF4-FFF2-40B4-BE49-F238E27FC236}">
-                  <a16:creationId xmlns:a16="http://schemas.microsoft.com/office/drawing/2014/main" id="{05979798-8222-9474-23D8-9D684386F71D}"/>
+                  <a16:creationId xmlns:a16="http://schemas.microsoft.com/office/drawing/2014/main" id="{A59DF132-266A-9991-8745-8C426B1DA59C}"/>
                 </a:ext>
               </a:extLst>
             </p:cNvPr>
@@ -18806,10 +18605,10 @@
           </p:grpSpPr>
           <p:cxnSp>
             <p:nvCxnSpPr>
-              <p:cNvPr id="76" name="직선 연결선[R] 75">
+              <p:cNvPr id="166" name="직선 연결선[R] 165">
                 <a:extLst>
                   <a:ext uri="{FF2B5EF4-FFF2-40B4-BE49-F238E27FC236}">
-                    <a16:creationId xmlns:a16="http://schemas.microsoft.com/office/drawing/2014/main" id="{0340736F-22EC-4E2F-EA14-C33F74A18DBC}"/>
+                    <a16:creationId xmlns:a16="http://schemas.microsoft.com/office/drawing/2014/main" id="{366E05A3-8517-3F75-3C4A-D04BA4DABC94}"/>
                   </a:ext>
                 </a:extLst>
               </p:cNvPr>
@@ -18852,10 +18651,10 @@
           </p:cxnSp>
           <p:cxnSp>
             <p:nvCxnSpPr>
-              <p:cNvPr id="77" name="직선 연결선[R] 76">
+              <p:cNvPr id="167" name="직선 연결선[R] 166">
                 <a:extLst>
                   <a:ext uri="{FF2B5EF4-FFF2-40B4-BE49-F238E27FC236}">
-                    <a16:creationId xmlns:a16="http://schemas.microsoft.com/office/drawing/2014/main" id="{22BE6066-4589-2981-2080-6FC7B5876FA6}"/>
+                    <a16:creationId xmlns:a16="http://schemas.microsoft.com/office/drawing/2014/main" id="{A7947152-3979-EA1A-198B-DBA2552233AE}"/>
                   </a:ext>
                 </a:extLst>
               </p:cNvPr>
@@ -18900,10 +18699,10 @@
       </p:grpSp>
       <p:grpSp>
         <p:nvGrpSpPr>
-          <p:cNvPr id="89" name="그룹 88">
+          <p:cNvPr id="170" name="그룹 169">
             <a:extLst>
               <a:ext uri="{FF2B5EF4-FFF2-40B4-BE49-F238E27FC236}">
-                <a16:creationId xmlns:a16="http://schemas.microsoft.com/office/drawing/2014/main" id="{3D6AD4D0-A55B-4213-5AEC-DD1C540439F0}"/>
+                <a16:creationId xmlns:a16="http://schemas.microsoft.com/office/drawing/2014/main" id="{20EC1274-A258-812D-FC70-42C35891B6BA}"/>
               </a:ext>
             </a:extLst>
           </p:cNvPr>
@@ -18922,10 +18721,10 @@
           <mc:Choice Requires="a14">
             <p:sp>
               <p:nvSpPr>
-                <p:cNvPr id="91" name="TextBox 90">
+                <p:cNvPr id="171" name="TextBox 170">
                   <a:extLst>
                     <a:ext uri="{FF2B5EF4-FFF2-40B4-BE49-F238E27FC236}">
-                      <a16:creationId xmlns:a16="http://schemas.microsoft.com/office/drawing/2014/main" id="{5C1E9733-5D25-5E00-A0E9-B553EC2B72B4}"/>
+                      <a16:creationId xmlns:a16="http://schemas.microsoft.com/office/drawing/2014/main" id="{090245B0-E7D9-B9CB-DB03-1FA12678C3E8}"/>
                     </a:ext>
                   </a:extLst>
                 </p:cNvPr>
@@ -19080,10 +18879,10 @@
           <mc:Choice Requires="a14">
             <p:sp>
               <p:nvSpPr>
-                <p:cNvPr id="92" name="TextBox 91">
+                <p:cNvPr id="172" name="TextBox 171">
                   <a:extLst>
                     <a:ext uri="{FF2B5EF4-FFF2-40B4-BE49-F238E27FC236}">
-                      <a16:creationId xmlns:a16="http://schemas.microsoft.com/office/drawing/2014/main" id="{1E69ACC3-5AC6-5893-7F2F-83406403AA18}"/>
+                      <a16:creationId xmlns:a16="http://schemas.microsoft.com/office/drawing/2014/main" id="{14CA3B56-E219-615B-D94A-AE03BE497766}"/>
                     </a:ext>
                   </a:extLst>
                 </p:cNvPr>
@@ -19238,10 +19037,10 @@
           <mc:Choice Requires="a14">
             <p:sp>
               <p:nvSpPr>
-                <p:cNvPr id="93" name="TextBox 92">
+                <p:cNvPr id="173" name="TextBox 172">
                   <a:extLst>
                     <a:ext uri="{FF2B5EF4-FFF2-40B4-BE49-F238E27FC236}">
-                      <a16:creationId xmlns:a16="http://schemas.microsoft.com/office/drawing/2014/main" id="{24B9A9D2-65C6-0B65-AC5F-ACEAF11BC045}"/>
+                      <a16:creationId xmlns:a16="http://schemas.microsoft.com/office/drawing/2014/main" id="{FB2B2CDB-A33D-D01B-6F83-0603B5416129}"/>
                     </a:ext>
                   </a:extLst>
                 </p:cNvPr>
@@ -19396,10 +19195,10 @@
           <mc:Choice Requires="a14">
             <p:sp>
               <p:nvSpPr>
-                <p:cNvPr id="94" name="TextBox 93">
+                <p:cNvPr id="175" name="TextBox 174">
                   <a:extLst>
                     <a:ext uri="{FF2B5EF4-FFF2-40B4-BE49-F238E27FC236}">
-                      <a16:creationId xmlns:a16="http://schemas.microsoft.com/office/drawing/2014/main" id="{F6A36453-7353-093E-5782-94EAFBF95017}"/>
+                      <a16:creationId xmlns:a16="http://schemas.microsoft.com/office/drawing/2014/main" id="{951C36B2-28D2-E93F-C046-2D20A182A2F8}"/>
                     </a:ext>
                   </a:extLst>
                 </p:cNvPr>
@@ -19553,10 +19352,10 @@
       </p:grpSp>
       <p:sp>
         <p:nvSpPr>
-          <p:cNvPr id="96" name="TextBox 95">
+          <p:cNvPr id="176" name="TextBox 175">
             <a:extLst>
               <a:ext uri="{FF2B5EF4-FFF2-40B4-BE49-F238E27FC236}">
-                <a16:creationId xmlns:a16="http://schemas.microsoft.com/office/drawing/2014/main" id="{B9C307B1-7775-DD14-4A7C-0D4A896F686E}"/>
+                <a16:creationId xmlns:a16="http://schemas.microsoft.com/office/drawing/2014/main" id="{23EDF9F8-E2FE-563C-4758-C5A02A9442B3}"/>
               </a:ext>
             </a:extLst>
           </p:cNvPr>
@@ -19610,10 +19409,10 @@
       </p:sp>
       <p:sp>
         <p:nvSpPr>
-          <p:cNvPr id="97" name="TextBox 96">
+          <p:cNvPr id="177" name="TextBox 176">
             <a:extLst>
               <a:ext uri="{FF2B5EF4-FFF2-40B4-BE49-F238E27FC236}">
-                <a16:creationId xmlns:a16="http://schemas.microsoft.com/office/drawing/2014/main" id="{39A11EBA-9653-B74E-7849-4EDB18F407F6}"/>
+                <a16:creationId xmlns:a16="http://schemas.microsoft.com/office/drawing/2014/main" id="{735FB7E1-4057-AFCF-7CDA-5164CA937763}"/>
               </a:ext>
             </a:extLst>
           </p:cNvPr>
@@ -19667,10 +19466,10 @@
       </p:sp>
       <p:sp>
         <p:nvSpPr>
-          <p:cNvPr id="98" name="오른쪽 중괄호[R] 97">
+          <p:cNvPr id="178" name="오른쪽 중괄호[R] 177">
             <a:extLst>
               <a:ext uri="{FF2B5EF4-FFF2-40B4-BE49-F238E27FC236}">
-                <a16:creationId xmlns:a16="http://schemas.microsoft.com/office/drawing/2014/main" id="{1D75ADF5-868D-D0F6-6610-E0E8F7E948B7}"/>
+                <a16:creationId xmlns:a16="http://schemas.microsoft.com/office/drawing/2014/main" id="{36A407A4-56B0-9031-21DB-2F17E418604B}"/>
               </a:ext>
             </a:extLst>
           </p:cNvPr>
@@ -19719,10 +19518,10 @@
       </p:sp>
       <p:grpSp>
         <p:nvGrpSpPr>
-          <p:cNvPr id="99" name="그룹 98">
+          <p:cNvPr id="179" name="그룹 178">
             <a:extLst>
               <a:ext uri="{FF2B5EF4-FFF2-40B4-BE49-F238E27FC236}">
-                <a16:creationId xmlns:a16="http://schemas.microsoft.com/office/drawing/2014/main" id="{C9B437CE-C51D-94E7-692D-643A6987096C}"/>
+                <a16:creationId xmlns:a16="http://schemas.microsoft.com/office/drawing/2014/main" id="{00236DA6-4D1C-185D-582A-7CC4B4A63984}"/>
               </a:ext>
             </a:extLst>
           </p:cNvPr>
@@ -19739,10 +19538,10 @@
         </p:grpSpPr>
         <p:grpSp>
           <p:nvGrpSpPr>
-            <p:cNvPr id="100" name="그룹 99">
+            <p:cNvPr id="180" name="그룹 179">
               <a:extLst>
                 <a:ext uri="{FF2B5EF4-FFF2-40B4-BE49-F238E27FC236}">
-                  <a16:creationId xmlns:a16="http://schemas.microsoft.com/office/drawing/2014/main" id="{60DDC5F7-4DB8-1065-4947-3BF84EE8C355}"/>
+                  <a16:creationId xmlns:a16="http://schemas.microsoft.com/office/drawing/2014/main" id="{31159A16-B3D3-525D-7956-771C04047187}"/>
                 </a:ext>
               </a:extLst>
             </p:cNvPr>
@@ -19759,10 +19558,10 @@
           </p:grpSpPr>
           <p:sp>
             <p:nvSpPr>
-              <p:cNvPr id="111" name="Google Shape;898;p28">
+              <p:cNvPr id="199" name="Google Shape;898;p28">
                 <a:extLst>
                   <a:ext uri="{FF2B5EF4-FFF2-40B4-BE49-F238E27FC236}">
-                    <a16:creationId xmlns:a16="http://schemas.microsoft.com/office/drawing/2014/main" id="{C9D4F220-6540-71CA-D1BF-5142B3D4BAE0}"/>
+                    <a16:creationId xmlns:a16="http://schemas.microsoft.com/office/drawing/2014/main" id="{6FD0B7D2-C411-9C6F-DD09-4249145CDB59}"/>
                   </a:ext>
                 </a:extLst>
               </p:cNvPr>
@@ -19817,10 +19616,10 @@
           </p:sp>
           <p:sp>
             <p:nvSpPr>
-              <p:cNvPr id="113" name="Google Shape;903;p28">
+              <p:cNvPr id="200" name="Google Shape;903;p28">
                 <a:extLst>
                   <a:ext uri="{FF2B5EF4-FFF2-40B4-BE49-F238E27FC236}">
-                    <a16:creationId xmlns:a16="http://schemas.microsoft.com/office/drawing/2014/main" id="{9DF91DE0-559D-BCBD-D891-27F5320D5674}"/>
+                    <a16:creationId xmlns:a16="http://schemas.microsoft.com/office/drawing/2014/main" id="{A5337390-FC51-9E35-1B06-F19ABAB686FF}"/>
                   </a:ext>
                 </a:extLst>
               </p:cNvPr>
@@ -19875,10 +19674,10 @@
           </p:sp>
           <p:sp>
             <p:nvSpPr>
-              <p:cNvPr id="114" name="Google Shape;908;p28">
+              <p:cNvPr id="207" name="Google Shape;908;p28">
                 <a:extLst>
                   <a:ext uri="{FF2B5EF4-FFF2-40B4-BE49-F238E27FC236}">
-                    <a16:creationId xmlns:a16="http://schemas.microsoft.com/office/drawing/2014/main" id="{C8282EC6-951A-56A4-3D95-EEFBDCCA18ED}"/>
+                    <a16:creationId xmlns:a16="http://schemas.microsoft.com/office/drawing/2014/main" id="{33CAAEBE-B3FB-3FEB-9F42-86215DDACEEA}"/>
                   </a:ext>
                 </a:extLst>
               </p:cNvPr>
@@ -19936,10 +19735,10 @@
           <mc:Choice Requires="a14">
             <p:sp>
               <p:nvSpPr>
-                <p:cNvPr id="101" name="Google Shape;1018;p28">
+                <p:cNvPr id="181" name="Google Shape;1018;p28">
                   <a:extLst>
                     <a:ext uri="{FF2B5EF4-FFF2-40B4-BE49-F238E27FC236}">
-                      <a16:creationId xmlns:a16="http://schemas.microsoft.com/office/drawing/2014/main" id="{F3E0C704-CCDB-B39F-A683-C43C96B18826}"/>
+                      <a16:creationId xmlns:a16="http://schemas.microsoft.com/office/drawing/2014/main" id="{4484D16F-AFFF-20C6-48A4-3305A409B8C3}"/>
                     </a:ext>
                   </a:extLst>
                 </p:cNvPr>
@@ -20085,10 +19884,10 @@
         </mc:AlternateContent>
         <p:grpSp>
           <p:nvGrpSpPr>
-            <p:cNvPr id="102" name="그룹 101">
+            <p:cNvPr id="182" name="그룹 181">
               <a:extLst>
                 <a:ext uri="{FF2B5EF4-FFF2-40B4-BE49-F238E27FC236}">
-                  <a16:creationId xmlns:a16="http://schemas.microsoft.com/office/drawing/2014/main" id="{754EED08-5E11-605C-9E63-3857CBCAC78D}"/>
+                  <a16:creationId xmlns:a16="http://schemas.microsoft.com/office/drawing/2014/main" id="{6BD70E7C-6548-4DEE-FACB-E100BAC17BF7}"/>
                 </a:ext>
               </a:extLst>
             </p:cNvPr>
@@ -20105,10 +19904,10 @@
           </p:grpSpPr>
           <p:sp>
             <p:nvSpPr>
-              <p:cNvPr id="108" name="Google Shape;899;p28">
+              <p:cNvPr id="188" name="Google Shape;899;p28">
                 <a:extLst>
                   <a:ext uri="{FF2B5EF4-FFF2-40B4-BE49-F238E27FC236}">
-                    <a16:creationId xmlns:a16="http://schemas.microsoft.com/office/drawing/2014/main" id="{A1797447-AC87-45DD-190E-4D609D01DDE4}"/>
+                    <a16:creationId xmlns:a16="http://schemas.microsoft.com/office/drawing/2014/main" id="{A19C7D55-1BF9-566B-52B7-EB5B5151C0D2}"/>
                   </a:ext>
                 </a:extLst>
               </p:cNvPr>
@@ -20163,10 +19962,10 @@
           </p:sp>
           <p:sp>
             <p:nvSpPr>
-              <p:cNvPr id="109" name="Google Shape;904;p28">
+              <p:cNvPr id="189" name="Google Shape;904;p28">
                 <a:extLst>
                   <a:ext uri="{FF2B5EF4-FFF2-40B4-BE49-F238E27FC236}">
-                    <a16:creationId xmlns:a16="http://schemas.microsoft.com/office/drawing/2014/main" id="{68B0250C-4CBB-122F-AD5F-3A016213D4F7}"/>
+                    <a16:creationId xmlns:a16="http://schemas.microsoft.com/office/drawing/2014/main" id="{9CE31D5A-9D3D-4AED-B13A-E20D14ECE3F6}"/>
                   </a:ext>
                 </a:extLst>
               </p:cNvPr>
@@ -20221,10 +20020,10 @@
           </p:sp>
           <p:sp>
             <p:nvSpPr>
-              <p:cNvPr id="110" name="Google Shape;909;p28">
+              <p:cNvPr id="190" name="Google Shape;909;p28">
                 <a:extLst>
                   <a:ext uri="{FF2B5EF4-FFF2-40B4-BE49-F238E27FC236}">
-                    <a16:creationId xmlns:a16="http://schemas.microsoft.com/office/drawing/2014/main" id="{D875CE52-B0E7-43B0-0945-62182394DC7A}"/>
+                    <a16:creationId xmlns:a16="http://schemas.microsoft.com/office/drawing/2014/main" id="{00ABFDAD-33D2-73C6-14D1-411A762C54E9}"/>
                   </a:ext>
                 </a:extLst>
               </p:cNvPr>
@@ -20281,10 +20080,10 @@
           <mc:Choice Requires="a14">
             <p:sp>
               <p:nvSpPr>
-                <p:cNvPr id="103" name="Google Shape;1018;p28">
+                <p:cNvPr id="183" name="Google Shape;1018;p28">
                   <a:extLst>
                     <a:ext uri="{FF2B5EF4-FFF2-40B4-BE49-F238E27FC236}">
-                      <a16:creationId xmlns:a16="http://schemas.microsoft.com/office/drawing/2014/main" id="{B7A94CB4-63F1-2124-6216-0CB9BAE598E9}"/>
+                      <a16:creationId xmlns:a16="http://schemas.microsoft.com/office/drawing/2014/main" id="{8C99C09B-17C2-88B9-7CC3-E3DAF88848CE}"/>
                     </a:ext>
                   </a:extLst>
                 </p:cNvPr>
@@ -20432,10 +20231,10 @@
           <mc:Choice Requires="a14">
             <p:sp>
               <p:nvSpPr>
-                <p:cNvPr id="104" name="Google Shape;1018;p28">
+                <p:cNvPr id="184" name="Google Shape;1018;p28">
                   <a:extLst>
                     <a:ext uri="{FF2B5EF4-FFF2-40B4-BE49-F238E27FC236}">
-                      <a16:creationId xmlns:a16="http://schemas.microsoft.com/office/drawing/2014/main" id="{EECBD87C-8062-889D-08BB-FFBE32F8C069}"/>
+                      <a16:creationId xmlns:a16="http://schemas.microsoft.com/office/drawing/2014/main" id="{B92CD278-2AD9-0A5E-671D-6B0388FDC480}"/>
                     </a:ext>
                   </a:extLst>
                 </p:cNvPr>
@@ -20611,10 +20410,10 @@
         </mc:AlternateContent>
         <p:sp>
           <p:nvSpPr>
-            <p:cNvPr id="105" name="Google Shape;899;p28">
+            <p:cNvPr id="185" name="Google Shape;899;p28">
               <a:extLst>
                 <a:ext uri="{FF2B5EF4-FFF2-40B4-BE49-F238E27FC236}">
-                  <a16:creationId xmlns:a16="http://schemas.microsoft.com/office/drawing/2014/main" id="{70CCD839-F117-6926-1859-277BB96142EE}"/>
+                  <a16:creationId xmlns:a16="http://schemas.microsoft.com/office/drawing/2014/main" id="{3FF98062-B071-F5EC-1EC7-CCC847CDCC4C}"/>
                 </a:ext>
               </a:extLst>
             </p:cNvPr>
@@ -20666,10 +20465,10 @@
         </p:sp>
         <p:sp>
           <p:nvSpPr>
-            <p:cNvPr id="106" name="Google Shape;909;p28">
+            <p:cNvPr id="186" name="Google Shape;909;p28">
               <a:extLst>
                 <a:ext uri="{FF2B5EF4-FFF2-40B4-BE49-F238E27FC236}">
-                  <a16:creationId xmlns:a16="http://schemas.microsoft.com/office/drawing/2014/main" id="{A1617C85-5B81-3AA0-0B07-BB090AD8A5CA}"/>
+                  <a16:creationId xmlns:a16="http://schemas.microsoft.com/office/drawing/2014/main" id="{4B6C9837-EC61-8003-244E-AE40BC5F14B1}"/>
                 </a:ext>
               </a:extLst>
             </p:cNvPr>
@@ -20723,10 +20522,10 @@
           <mc:Choice Requires="a14">
             <p:sp>
               <p:nvSpPr>
-                <p:cNvPr id="107" name="Google Shape;1018;p28">
+                <p:cNvPr id="187" name="Google Shape;1018;p28">
                   <a:extLst>
                     <a:ext uri="{FF2B5EF4-FFF2-40B4-BE49-F238E27FC236}">
-                      <a16:creationId xmlns:a16="http://schemas.microsoft.com/office/drawing/2014/main" id="{EF9AB846-BBB6-B93B-7803-0B374B08DCEB}"/>
+                      <a16:creationId xmlns:a16="http://schemas.microsoft.com/office/drawing/2014/main" id="{CEBCB2BA-E01E-4162-E5DB-AC93E1F27411}"/>
                     </a:ext>
                   </a:extLst>
                 </p:cNvPr>
@@ -20903,10 +20702,10 @@
       </p:grpSp>
       <p:grpSp>
         <p:nvGrpSpPr>
-          <p:cNvPr id="116" name="그룹 115">
+          <p:cNvPr id="213" name="그룹 212">
             <a:extLst>
               <a:ext uri="{FF2B5EF4-FFF2-40B4-BE49-F238E27FC236}">
-                <a16:creationId xmlns:a16="http://schemas.microsoft.com/office/drawing/2014/main" id="{E6BD00EA-CEE7-2844-AC27-91BF52DBDBE6}"/>
+                <a16:creationId xmlns:a16="http://schemas.microsoft.com/office/drawing/2014/main" id="{9E8F1288-217A-EF6F-BFC8-5D040A5C5928}"/>
               </a:ext>
             </a:extLst>
           </p:cNvPr>
@@ -20923,10 +20722,10 @@
         </p:grpSpPr>
         <p:grpSp>
           <p:nvGrpSpPr>
-            <p:cNvPr id="117" name="그룹 116">
+            <p:cNvPr id="244" name="그룹 243">
               <a:extLst>
                 <a:ext uri="{FF2B5EF4-FFF2-40B4-BE49-F238E27FC236}">
-                  <a16:creationId xmlns:a16="http://schemas.microsoft.com/office/drawing/2014/main" id="{143221D3-A5AE-B09F-4F12-14EF572956C6}"/>
+                  <a16:creationId xmlns:a16="http://schemas.microsoft.com/office/drawing/2014/main" id="{C0642E88-CA53-DDF4-6220-AFD713D4DA5F}"/>
                 </a:ext>
               </a:extLst>
             </p:cNvPr>
@@ -20943,10 +20742,10 @@
           </p:grpSpPr>
           <p:sp>
             <p:nvSpPr>
-              <p:cNvPr id="133" name="Google Shape;898;p28">
+              <p:cNvPr id="251" name="Google Shape;898;p28">
                 <a:extLst>
                   <a:ext uri="{FF2B5EF4-FFF2-40B4-BE49-F238E27FC236}">
-                    <a16:creationId xmlns:a16="http://schemas.microsoft.com/office/drawing/2014/main" id="{2D05B887-D776-CA62-7516-96D0B8576690}"/>
+                    <a16:creationId xmlns:a16="http://schemas.microsoft.com/office/drawing/2014/main" id="{F0158CE6-9060-49D9-CBBA-CB20EE08CC01}"/>
                   </a:ext>
                 </a:extLst>
               </p:cNvPr>
@@ -21000,10 +20799,10 @@
           </p:sp>
           <p:sp>
             <p:nvSpPr>
-              <p:cNvPr id="137" name="Google Shape;903;p28">
+              <p:cNvPr id="252" name="Google Shape;903;p28">
                 <a:extLst>
                   <a:ext uri="{FF2B5EF4-FFF2-40B4-BE49-F238E27FC236}">
-                    <a16:creationId xmlns:a16="http://schemas.microsoft.com/office/drawing/2014/main" id="{F6A5A5EC-EAC7-2AE3-FC31-83CEF5934338}"/>
+                    <a16:creationId xmlns:a16="http://schemas.microsoft.com/office/drawing/2014/main" id="{D97DAE80-BC53-82DD-5E13-1F2AA0001584}"/>
                   </a:ext>
                 </a:extLst>
               </p:cNvPr>
@@ -21057,10 +20856,10 @@
           </p:sp>
           <p:sp>
             <p:nvSpPr>
-              <p:cNvPr id="140" name="Google Shape;908;p28">
+              <p:cNvPr id="253" name="Google Shape;908;p28">
                 <a:extLst>
                   <a:ext uri="{FF2B5EF4-FFF2-40B4-BE49-F238E27FC236}">
-                    <a16:creationId xmlns:a16="http://schemas.microsoft.com/office/drawing/2014/main" id="{0BA6E5AD-FD64-9672-459D-2F2C50641535}"/>
+                    <a16:creationId xmlns:a16="http://schemas.microsoft.com/office/drawing/2014/main" id="{BE109D9E-30EC-26DC-5268-A5FA21285392}"/>
                   </a:ext>
                 </a:extLst>
               </p:cNvPr>
@@ -21115,10 +20914,10 @@
         </p:grpSp>
         <p:grpSp>
           <p:nvGrpSpPr>
-            <p:cNvPr id="119" name="그룹 118">
+            <p:cNvPr id="245" name="그룹 244">
               <a:extLst>
                 <a:ext uri="{FF2B5EF4-FFF2-40B4-BE49-F238E27FC236}">
-                  <a16:creationId xmlns:a16="http://schemas.microsoft.com/office/drawing/2014/main" id="{27053DEF-BC0E-5F83-C616-C34BE428B2EB}"/>
+                  <a16:creationId xmlns:a16="http://schemas.microsoft.com/office/drawing/2014/main" id="{C59592CA-F1EA-B454-BDEF-43E012FC2BAF}"/>
                 </a:ext>
               </a:extLst>
             </p:cNvPr>
@@ -21135,10 +20934,10 @@
           </p:grpSpPr>
           <p:sp>
             <p:nvSpPr>
-              <p:cNvPr id="123" name="Google Shape;899;p28">
+              <p:cNvPr id="248" name="Google Shape;899;p28">
                 <a:extLst>
                   <a:ext uri="{FF2B5EF4-FFF2-40B4-BE49-F238E27FC236}">
-                    <a16:creationId xmlns:a16="http://schemas.microsoft.com/office/drawing/2014/main" id="{643B2F11-F677-A547-C0D6-C44F7123C99C}"/>
+                    <a16:creationId xmlns:a16="http://schemas.microsoft.com/office/drawing/2014/main" id="{30CB92D3-856D-4CFE-8AD0-18FAE311635F}"/>
                   </a:ext>
                 </a:extLst>
               </p:cNvPr>
@@ -21192,10 +20991,10 @@
           </p:sp>
           <p:sp>
             <p:nvSpPr>
-              <p:cNvPr id="131" name="Google Shape;904;p28">
+              <p:cNvPr id="249" name="Google Shape;904;p28">
                 <a:extLst>
                   <a:ext uri="{FF2B5EF4-FFF2-40B4-BE49-F238E27FC236}">
-                    <a16:creationId xmlns:a16="http://schemas.microsoft.com/office/drawing/2014/main" id="{38EB69F4-71BA-906D-7712-1FF2BD0F1296}"/>
+                    <a16:creationId xmlns:a16="http://schemas.microsoft.com/office/drawing/2014/main" id="{A8F8A644-C5CD-14F6-87FF-F96436026735}"/>
                   </a:ext>
                 </a:extLst>
               </p:cNvPr>
@@ -21249,10 +21048,10 @@
           </p:sp>
           <p:sp>
             <p:nvSpPr>
-              <p:cNvPr id="132" name="Google Shape;909;p28">
+              <p:cNvPr id="250" name="Google Shape;909;p28">
                 <a:extLst>
                   <a:ext uri="{FF2B5EF4-FFF2-40B4-BE49-F238E27FC236}">
-                    <a16:creationId xmlns:a16="http://schemas.microsoft.com/office/drawing/2014/main" id="{B45FFB0E-00DC-65D9-3591-1DE689308478}"/>
+                    <a16:creationId xmlns:a16="http://schemas.microsoft.com/office/drawing/2014/main" id="{9B0934AA-E28F-6B4A-AE4D-ADC78764FA2B}"/>
                   </a:ext>
                 </a:extLst>
               </p:cNvPr>
@@ -21307,10 +21106,10 @@
           <mc:Choice Requires="a14">
             <p:sp>
               <p:nvSpPr>
-                <p:cNvPr id="120" name="Google Shape;1018;p28">
+                <p:cNvPr id="246" name="Google Shape;1018;p28">
                   <a:extLst>
                     <a:ext uri="{FF2B5EF4-FFF2-40B4-BE49-F238E27FC236}">
-                      <a16:creationId xmlns:a16="http://schemas.microsoft.com/office/drawing/2014/main" id="{C2A30582-FB44-A9C7-0B70-FE329496CA5B}"/>
+                      <a16:creationId xmlns:a16="http://schemas.microsoft.com/office/drawing/2014/main" id="{697CC1FA-5D00-959D-1460-027CEA95B8AB}"/>
                     </a:ext>
                   </a:extLst>
                 </p:cNvPr>
@@ -21528,10 +21327,10 @@
           <mc:Choice Requires="a14">
             <p:sp>
               <p:nvSpPr>
-                <p:cNvPr id="122" name="Google Shape;1018;p28">
+                <p:cNvPr id="247" name="Google Shape;1018;p28">
                   <a:extLst>
                     <a:ext uri="{FF2B5EF4-FFF2-40B4-BE49-F238E27FC236}">
-                      <a16:creationId xmlns:a16="http://schemas.microsoft.com/office/drawing/2014/main" id="{C37E9D65-FB6B-A44C-5727-786C14F7C621}"/>
+                      <a16:creationId xmlns:a16="http://schemas.microsoft.com/office/drawing/2014/main" id="{95269043-E003-4315-94E5-1CD7997169B1}"/>
                     </a:ext>
                   </a:extLst>
                 </p:cNvPr>
@@ -21748,10 +21547,10 @@
       </p:grpSp>
       <p:grpSp>
         <p:nvGrpSpPr>
-          <p:cNvPr id="146" name="그룹 145">
+          <p:cNvPr id="254" name="그룹 253">
             <a:extLst>
               <a:ext uri="{FF2B5EF4-FFF2-40B4-BE49-F238E27FC236}">
-                <a16:creationId xmlns:a16="http://schemas.microsoft.com/office/drawing/2014/main" id="{B15AFC51-56BA-4613-4701-F5EF15499025}"/>
+                <a16:creationId xmlns:a16="http://schemas.microsoft.com/office/drawing/2014/main" id="{04736127-6CE8-A2E5-3460-BCEDAAB71406}"/>
               </a:ext>
             </a:extLst>
           </p:cNvPr>
@@ -21770,10 +21569,10 @@
           <mc:Choice Requires="a14">
             <p:sp>
               <p:nvSpPr>
-                <p:cNvPr id="147" name="Google Shape;1018;p28">
+                <p:cNvPr id="255" name="Google Shape;1018;p28">
                   <a:extLst>
                     <a:ext uri="{FF2B5EF4-FFF2-40B4-BE49-F238E27FC236}">
-                      <a16:creationId xmlns:a16="http://schemas.microsoft.com/office/drawing/2014/main" id="{60D99A9E-8080-B9DB-8369-A0286346F7E1}"/>
+                      <a16:creationId xmlns:a16="http://schemas.microsoft.com/office/drawing/2014/main" id="{ABB5678C-79A5-CD29-EEED-EA7B6A10C468}"/>
                     </a:ext>
                   </a:extLst>
                 </p:cNvPr>
@@ -21936,10 +21735,10 @@
         </mc:AlternateContent>
         <p:grpSp>
           <p:nvGrpSpPr>
-            <p:cNvPr id="148" name="그룹 147">
+            <p:cNvPr id="256" name="그룹 255">
               <a:extLst>
                 <a:ext uri="{FF2B5EF4-FFF2-40B4-BE49-F238E27FC236}">
-                  <a16:creationId xmlns:a16="http://schemas.microsoft.com/office/drawing/2014/main" id="{AAC1E29D-52D6-DB49-C5E8-535CE16F8CD5}"/>
+                  <a16:creationId xmlns:a16="http://schemas.microsoft.com/office/drawing/2014/main" id="{29B83F8C-F76E-E447-8BA1-1298546F0668}"/>
                 </a:ext>
               </a:extLst>
             </p:cNvPr>
@@ -21956,10 +21755,10 @@
           </p:grpSpPr>
           <p:sp>
             <p:nvSpPr>
-              <p:cNvPr id="191" name="Google Shape;899;p28">
+              <p:cNvPr id="267" name="Google Shape;899;p28">
                 <a:extLst>
                   <a:ext uri="{FF2B5EF4-FFF2-40B4-BE49-F238E27FC236}">
-                    <a16:creationId xmlns:a16="http://schemas.microsoft.com/office/drawing/2014/main" id="{BD80CE02-BAF5-35A3-4C13-8DC2A532B73B}"/>
+                    <a16:creationId xmlns:a16="http://schemas.microsoft.com/office/drawing/2014/main" id="{F2B79E8D-A463-3EB1-0356-25719C6E83B0}"/>
                   </a:ext>
                 </a:extLst>
               </p:cNvPr>
@@ -22011,10 +21810,10 @@
           </p:sp>
           <p:sp>
             <p:nvSpPr>
-              <p:cNvPr id="192" name="Google Shape;909;p28">
+              <p:cNvPr id="268" name="Google Shape;909;p28">
                 <a:extLst>
                   <a:ext uri="{FF2B5EF4-FFF2-40B4-BE49-F238E27FC236}">
-                    <a16:creationId xmlns:a16="http://schemas.microsoft.com/office/drawing/2014/main" id="{32E63D99-06F1-45E2-84DA-E9F8A0965B56}"/>
+                    <a16:creationId xmlns:a16="http://schemas.microsoft.com/office/drawing/2014/main" id="{923715D5-90FC-2311-160E-2964DA5AF359}"/>
                   </a:ext>
                 </a:extLst>
               </p:cNvPr>
@@ -22069,10 +21868,10 @@
           <mc:Choice Requires="a14">
             <p:sp>
               <p:nvSpPr>
-                <p:cNvPr id="149" name="Google Shape;1018;p28">
+                <p:cNvPr id="257" name="Google Shape;1018;p28">
                   <a:extLst>
                     <a:ext uri="{FF2B5EF4-FFF2-40B4-BE49-F238E27FC236}">
-                      <a16:creationId xmlns:a16="http://schemas.microsoft.com/office/drawing/2014/main" id="{B17209D0-FB84-9A36-D511-CF5B4BCE4DBB}"/>
+                      <a16:creationId xmlns:a16="http://schemas.microsoft.com/office/drawing/2014/main" id="{9097ED0E-514F-1D1A-9DF4-D970BF07DB87}"/>
                     </a:ext>
                   </a:extLst>
                 </p:cNvPr>
@@ -22218,10 +22017,10 @@
         </mc:AlternateContent>
         <p:grpSp>
           <p:nvGrpSpPr>
-            <p:cNvPr id="150" name="그룹 149">
+            <p:cNvPr id="258" name="그룹 257">
               <a:extLst>
                 <a:ext uri="{FF2B5EF4-FFF2-40B4-BE49-F238E27FC236}">
-                  <a16:creationId xmlns:a16="http://schemas.microsoft.com/office/drawing/2014/main" id="{E2F07706-FC94-2474-B5CF-71C8BF137277}"/>
+                  <a16:creationId xmlns:a16="http://schemas.microsoft.com/office/drawing/2014/main" id="{E36758FF-4894-0F22-9CF2-5A672BDD8C01}"/>
                 </a:ext>
               </a:extLst>
             </p:cNvPr>
@@ -22238,10 +22037,10 @@
           </p:grpSpPr>
           <p:grpSp>
             <p:nvGrpSpPr>
-              <p:cNvPr id="151" name="그룹 150">
+              <p:cNvPr id="259" name="그룹 258">
                 <a:extLst>
                   <a:ext uri="{FF2B5EF4-FFF2-40B4-BE49-F238E27FC236}">
-                    <a16:creationId xmlns:a16="http://schemas.microsoft.com/office/drawing/2014/main" id="{E8B7CA08-1C18-5E5C-4878-8D7C53F391DB}"/>
+                    <a16:creationId xmlns:a16="http://schemas.microsoft.com/office/drawing/2014/main" id="{1337FD1F-2469-CDD7-B411-4BC8736F9C48}"/>
                   </a:ext>
                 </a:extLst>
               </p:cNvPr>
@@ -22258,10 +22057,10 @@
             </p:grpSpPr>
             <p:sp>
               <p:nvSpPr>
-                <p:cNvPr id="160" name="Google Shape;898;p28">
+                <p:cNvPr id="264" name="Google Shape;898;p28">
                   <a:extLst>
                     <a:ext uri="{FF2B5EF4-FFF2-40B4-BE49-F238E27FC236}">
-                      <a16:creationId xmlns:a16="http://schemas.microsoft.com/office/drawing/2014/main" id="{A7A830D6-C98F-56E7-0838-204458F91766}"/>
+                      <a16:creationId xmlns:a16="http://schemas.microsoft.com/office/drawing/2014/main" id="{F52B8416-A908-8177-E193-EF533082AD63}"/>
                     </a:ext>
                   </a:extLst>
                 </p:cNvPr>
@@ -22316,10 +22115,10 @@
             </p:sp>
             <p:sp>
               <p:nvSpPr>
-                <p:cNvPr id="161" name="Google Shape;903;p28">
+                <p:cNvPr id="265" name="Google Shape;903;p28">
                   <a:extLst>
                     <a:ext uri="{FF2B5EF4-FFF2-40B4-BE49-F238E27FC236}">
-                      <a16:creationId xmlns:a16="http://schemas.microsoft.com/office/drawing/2014/main" id="{05476C40-6AB2-490A-A9BD-196565B667B6}"/>
+                      <a16:creationId xmlns:a16="http://schemas.microsoft.com/office/drawing/2014/main" id="{CF60557A-6DB2-1A00-D746-11E521DC45C5}"/>
                     </a:ext>
                   </a:extLst>
                 </p:cNvPr>
@@ -22374,10 +22173,10 @@
             </p:sp>
             <p:sp>
               <p:nvSpPr>
-                <p:cNvPr id="174" name="Google Shape;908;p28">
+                <p:cNvPr id="266" name="Google Shape;908;p28">
                   <a:extLst>
                     <a:ext uri="{FF2B5EF4-FFF2-40B4-BE49-F238E27FC236}">
-                      <a16:creationId xmlns:a16="http://schemas.microsoft.com/office/drawing/2014/main" id="{F910076C-9CAE-131B-7612-34FB8C15D37E}"/>
+                      <a16:creationId xmlns:a16="http://schemas.microsoft.com/office/drawing/2014/main" id="{CD5B931C-8D67-BA49-45E6-E3BDBA82CBFC}"/>
                     </a:ext>
                   </a:extLst>
                 </p:cNvPr>
@@ -22433,10 +22232,10 @@
           </p:grpSp>
           <p:grpSp>
             <p:nvGrpSpPr>
-              <p:cNvPr id="152" name="그룹 151">
+              <p:cNvPr id="260" name="그룹 259">
                 <a:extLst>
                   <a:ext uri="{FF2B5EF4-FFF2-40B4-BE49-F238E27FC236}">
-                    <a16:creationId xmlns:a16="http://schemas.microsoft.com/office/drawing/2014/main" id="{A48496FE-78F3-A675-0A96-8A94CE3F4A68}"/>
+                    <a16:creationId xmlns:a16="http://schemas.microsoft.com/office/drawing/2014/main" id="{0EB6179D-277B-FE91-1F31-3D45558665BD}"/>
                   </a:ext>
                 </a:extLst>
               </p:cNvPr>
@@ -22453,10 +22252,10 @@
             </p:grpSpPr>
             <p:sp>
               <p:nvSpPr>
-                <p:cNvPr id="153" name="Google Shape;899;p28">
+                <p:cNvPr id="261" name="Google Shape;899;p28">
                   <a:extLst>
                     <a:ext uri="{FF2B5EF4-FFF2-40B4-BE49-F238E27FC236}">
-                      <a16:creationId xmlns:a16="http://schemas.microsoft.com/office/drawing/2014/main" id="{CFEBD936-E9FA-A201-E010-9846DC79280D}"/>
+                      <a16:creationId xmlns:a16="http://schemas.microsoft.com/office/drawing/2014/main" id="{A99CB9BC-8A40-C5F4-465A-73C03DB2CC78}"/>
                     </a:ext>
                   </a:extLst>
                 </p:cNvPr>
@@ -22511,10 +22310,10 @@
             </p:sp>
             <p:sp>
               <p:nvSpPr>
-                <p:cNvPr id="154" name="Google Shape;904;p28">
+                <p:cNvPr id="262" name="Google Shape;904;p28">
                   <a:extLst>
                     <a:ext uri="{FF2B5EF4-FFF2-40B4-BE49-F238E27FC236}">
-                      <a16:creationId xmlns:a16="http://schemas.microsoft.com/office/drawing/2014/main" id="{7A5C79B1-88CE-C503-B180-9B5B4D14757C}"/>
+                      <a16:creationId xmlns:a16="http://schemas.microsoft.com/office/drawing/2014/main" id="{595D3C62-0D11-3755-8F89-2B68925B11E9}"/>
                     </a:ext>
                   </a:extLst>
                 </p:cNvPr>
@@ -22569,10 +22368,10 @@
             </p:sp>
             <p:sp>
               <p:nvSpPr>
-                <p:cNvPr id="159" name="Google Shape;909;p28">
+                <p:cNvPr id="263" name="Google Shape;909;p28">
                   <a:extLst>
                     <a:ext uri="{FF2B5EF4-FFF2-40B4-BE49-F238E27FC236}">
-                      <a16:creationId xmlns:a16="http://schemas.microsoft.com/office/drawing/2014/main" id="{F2EAA62F-38E0-458E-7EE4-8B031EDC6594}"/>
+                      <a16:creationId xmlns:a16="http://schemas.microsoft.com/office/drawing/2014/main" id="{35735405-7ACC-430A-0F01-7C5656CBFC2F}"/>
                     </a:ext>
                   </a:extLst>
                 </p:cNvPr>
@@ -22629,10 +22428,10 @@
       </p:grpSp>
       <p:sp>
         <p:nvSpPr>
-          <p:cNvPr id="193" name="오른쪽 중괄호[R] 192">
+          <p:cNvPr id="269" name="오른쪽 중괄호[R] 268">
             <a:extLst>
               <a:ext uri="{FF2B5EF4-FFF2-40B4-BE49-F238E27FC236}">
-                <a16:creationId xmlns:a16="http://schemas.microsoft.com/office/drawing/2014/main" id="{14843003-A324-9AC0-B9A5-7233C82BB9CB}"/>
+                <a16:creationId xmlns:a16="http://schemas.microsoft.com/office/drawing/2014/main" id="{E30DBA2D-66F9-B2DD-17D5-CCD3FAB0F0D1}"/>
               </a:ext>
             </a:extLst>
           </p:cNvPr>
@@ -22681,10 +22480,10 @@
       </p:sp>
       <p:sp>
         <p:nvSpPr>
-          <p:cNvPr id="194" name="오른쪽 중괄호[R] 193">
+          <p:cNvPr id="270" name="오른쪽 중괄호[R] 269">
             <a:extLst>
               <a:ext uri="{FF2B5EF4-FFF2-40B4-BE49-F238E27FC236}">
-                <a16:creationId xmlns:a16="http://schemas.microsoft.com/office/drawing/2014/main" id="{7ED069AD-F1C3-B731-76C2-2CD3F2A5B6FE}"/>
+                <a16:creationId xmlns:a16="http://schemas.microsoft.com/office/drawing/2014/main" id="{74279C12-9A18-46B8-53A1-EC119ABBD433}"/>
               </a:ext>
             </a:extLst>
           </p:cNvPr>
@@ -22733,10 +22532,10 @@
       </p:sp>
       <p:grpSp>
         <p:nvGrpSpPr>
-          <p:cNvPr id="195" name="그룹 194">
+          <p:cNvPr id="271" name="그룹 270">
             <a:extLst>
               <a:ext uri="{FF2B5EF4-FFF2-40B4-BE49-F238E27FC236}">
-                <a16:creationId xmlns:a16="http://schemas.microsoft.com/office/drawing/2014/main" id="{0B281017-F610-B879-8152-3E395178AB67}"/>
+                <a16:creationId xmlns:a16="http://schemas.microsoft.com/office/drawing/2014/main" id="{2ACDD80C-7BF5-1C24-57D1-10AFEE4BE650}"/>
               </a:ext>
             </a:extLst>
           </p:cNvPr>
@@ -22753,10 +22552,10 @@
         </p:grpSpPr>
         <p:grpSp>
           <p:nvGrpSpPr>
-            <p:cNvPr id="196" name="그룹 195">
+            <p:cNvPr id="272" name="그룹 271">
               <a:extLst>
                 <a:ext uri="{FF2B5EF4-FFF2-40B4-BE49-F238E27FC236}">
-                  <a16:creationId xmlns:a16="http://schemas.microsoft.com/office/drawing/2014/main" id="{37BF5B88-458B-0AD4-A1A6-FC3BC3C1B883}"/>
+                  <a16:creationId xmlns:a16="http://schemas.microsoft.com/office/drawing/2014/main" id="{0108A252-E10E-4D1A-8C24-8B091AFC81A6}"/>
                 </a:ext>
               </a:extLst>
             </p:cNvPr>
@@ -22773,10 +22572,10 @@
           </p:grpSpPr>
           <p:sp>
             <p:nvSpPr>
-              <p:cNvPr id="204" name="Google Shape;898;p28">
+              <p:cNvPr id="278" name="Google Shape;898;p28">
                 <a:extLst>
                   <a:ext uri="{FF2B5EF4-FFF2-40B4-BE49-F238E27FC236}">
-                    <a16:creationId xmlns:a16="http://schemas.microsoft.com/office/drawing/2014/main" id="{E59AED3E-0CA4-3676-B90A-C0247B6EA585}"/>
+                    <a16:creationId xmlns:a16="http://schemas.microsoft.com/office/drawing/2014/main" id="{2B9BD70A-0BCF-C7C6-B45E-356B2313D787}"/>
                   </a:ext>
                 </a:extLst>
               </p:cNvPr>
@@ -22828,10 +22627,10 @@
           </p:sp>
           <p:sp>
             <p:nvSpPr>
-              <p:cNvPr id="205" name="Google Shape;903;p28">
+              <p:cNvPr id="279" name="Google Shape;903;p28">
                 <a:extLst>
                   <a:ext uri="{FF2B5EF4-FFF2-40B4-BE49-F238E27FC236}">
-                    <a16:creationId xmlns:a16="http://schemas.microsoft.com/office/drawing/2014/main" id="{2FF98D62-AEED-F63C-3DC6-14083D6B132A}"/>
+                    <a16:creationId xmlns:a16="http://schemas.microsoft.com/office/drawing/2014/main" id="{BAD6FDE5-5A67-52D4-1ACA-5CC2D4E0E134}"/>
                   </a:ext>
                 </a:extLst>
               </p:cNvPr>
@@ -22883,10 +22682,10 @@
           </p:sp>
           <p:sp>
             <p:nvSpPr>
-              <p:cNvPr id="206" name="Google Shape;908;p28">
+              <p:cNvPr id="280" name="Google Shape;908;p28">
                 <a:extLst>
                   <a:ext uri="{FF2B5EF4-FFF2-40B4-BE49-F238E27FC236}">
-                    <a16:creationId xmlns:a16="http://schemas.microsoft.com/office/drawing/2014/main" id="{1D803560-FD62-1B3A-7E17-9B5A3A538E3A}"/>
+                    <a16:creationId xmlns:a16="http://schemas.microsoft.com/office/drawing/2014/main" id="{A8AF1182-332D-8358-B017-68F163937D1C}"/>
                   </a:ext>
                 </a:extLst>
               </p:cNvPr>
@@ -22941,10 +22740,10 @@
           <mc:Choice Requires="a14">
             <p:sp>
               <p:nvSpPr>
-                <p:cNvPr id="197" name="Google Shape;1018;p28">
+                <p:cNvPr id="273" name="Google Shape;1018;p28">
                   <a:extLst>
                     <a:ext uri="{FF2B5EF4-FFF2-40B4-BE49-F238E27FC236}">
-                      <a16:creationId xmlns:a16="http://schemas.microsoft.com/office/drawing/2014/main" id="{A8B57EA7-AFB1-7D56-F74C-A29569A65ECA}"/>
+                      <a16:creationId xmlns:a16="http://schemas.microsoft.com/office/drawing/2014/main" id="{6FBB063D-3E4F-6DA4-6084-BC831897F6F3}"/>
                     </a:ext>
                   </a:extLst>
                 </p:cNvPr>
@@ -23092,10 +22891,10 @@
           <mc:Choice Requires="a14">
             <p:sp>
               <p:nvSpPr>
-                <p:cNvPr id="198" name="Google Shape;1018;p28">
+                <p:cNvPr id="274" name="Google Shape;1018;p28">
                   <a:extLst>
                     <a:ext uri="{FF2B5EF4-FFF2-40B4-BE49-F238E27FC236}">
-                      <a16:creationId xmlns:a16="http://schemas.microsoft.com/office/drawing/2014/main" id="{0FD0A8EF-C273-82DF-FE87-3DA86FE11799}"/>
+                      <a16:creationId xmlns:a16="http://schemas.microsoft.com/office/drawing/2014/main" id="{D5C62B1F-341C-9761-1512-C84ABDFC7BC7}"/>
                     </a:ext>
                   </a:extLst>
                 </p:cNvPr>
@@ -23271,10 +23070,10 @@
         </mc:AlternateContent>
         <p:sp>
           <p:nvSpPr>
-            <p:cNvPr id="201" name="Google Shape;899;p28">
+            <p:cNvPr id="275" name="Google Shape;899;p28">
               <a:extLst>
                 <a:ext uri="{FF2B5EF4-FFF2-40B4-BE49-F238E27FC236}">
-                  <a16:creationId xmlns:a16="http://schemas.microsoft.com/office/drawing/2014/main" id="{DA2338A3-0CBC-7569-042C-24211C9CAB81}"/>
+                  <a16:creationId xmlns:a16="http://schemas.microsoft.com/office/drawing/2014/main" id="{057C4F76-4933-6D6B-807A-B0D9F2EB566D}"/>
                 </a:ext>
               </a:extLst>
             </p:cNvPr>
@@ -23326,10 +23125,10 @@
         </p:sp>
         <p:sp>
           <p:nvSpPr>
-            <p:cNvPr id="202" name="Google Shape;909;p28">
+            <p:cNvPr id="276" name="Google Shape;909;p28">
               <a:extLst>
                 <a:ext uri="{FF2B5EF4-FFF2-40B4-BE49-F238E27FC236}">
-                  <a16:creationId xmlns:a16="http://schemas.microsoft.com/office/drawing/2014/main" id="{60FD40DE-1304-1AA8-EAE7-9A4B5F6CEBB4}"/>
+                  <a16:creationId xmlns:a16="http://schemas.microsoft.com/office/drawing/2014/main" id="{F47E06E3-C5CC-E4DA-32E7-E30328EAED9F}"/>
                 </a:ext>
               </a:extLst>
             </p:cNvPr>
@@ -23383,10 +23182,10 @@
           <mc:Choice Requires="a14">
             <p:sp>
               <p:nvSpPr>
-                <p:cNvPr id="203" name="Google Shape;1018;p28">
+                <p:cNvPr id="277" name="Google Shape;1018;p28">
                   <a:extLst>
                     <a:ext uri="{FF2B5EF4-FFF2-40B4-BE49-F238E27FC236}">
-                      <a16:creationId xmlns:a16="http://schemas.microsoft.com/office/drawing/2014/main" id="{A8778810-90CC-042B-A33E-A3A1CB4D0F13}"/>
+                      <a16:creationId xmlns:a16="http://schemas.microsoft.com/office/drawing/2014/main" id="{F4B6B995-C4D1-D444-DE48-F53D6CAA2C54}"/>
                     </a:ext>
                   </a:extLst>
                 </p:cNvPr>
@@ -23563,10 +23362,10 @@
       </p:grpSp>
       <p:grpSp>
         <p:nvGrpSpPr>
-          <p:cNvPr id="208" name="그룹 207">
+          <p:cNvPr id="281" name="그룹 280">
             <a:extLst>
               <a:ext uri="{FF2B5EF4-FFF2-40B4-BE49-F238E27FC236}">
-                <a16:creationId xmlns:a16="http://schemas.microsoft.com/office/drawing/2014/main" id="{54F344D0-2D57-A21E-713C-2D919223322C}"/>
+                <a16:creationId xmlns:a16="http://schemas.microsoft.com/office/drawing/2014/main" id="{1C2B2F50-2293-024E-272E-BCA9D4F852F4}"/>
               </a:ext>
             </a:extLst>
           </p:cNvPr>
@@ -23585,10 +23384,10 @@
           <mc:Choice Requires="a14">
             <p:sp>
               <p:nvSpPr>
-                <p:cNvPr id="209" name="Google Shape;1018;p28">
+                <p:cNvPr id="282" name="Google Shape;1018;p28">
                   <a:extLst>
                     <a:ext uri="{FF2B5EF4-FFF2-40B4-BE49-F238E27FC236}">
-                      <a16:creationId xmlns:a16="http://schemas.microsoft.com/office/drawing/2014/main" id="{67193B43-826C-0FCF-5A93-8FCFE667DB90}"/>
+                      <a16:creationId xmlns:a16="http://schemas.microsoft.com/office/drawing/2014/main" id="{ED2EB319-8E90-7941-7979-FC9A71D53FDD}"/>
                     </a:ext>
                   </a:extLst>
                 </p:cNvPr>
@@ -23806,10 +23605,10 @@
           <mc:Choice Requires="a14">
             <p:sp>
               <p:nvSpPr>
-                <p:cNvPr id="210" name="Google Shape;1018;p28">
+                <p:cNvPr id="283" name="Google Shape;1018;p28">
                   <a:extLst>
                     <a:ext uri="{FF2B5EF4-FFF2-40B4-BE49-F238E27FC236}">
-                      <a16:creationId xmlns:a16="http://schemas.microsoft.com/office/drawing/2014/main" id="{FD665312-D20B-C840-C306-EB96A2F4CC89}"/>
+                      <a16:creationId xmlns:a16="http://schemas.microsoft.com/office/drawing/2014/main" id="{B8F790B2-5FCF-5779-D25D-6FAE306EA178}"/>
                     </a:ext>
                   </a:extLst>
                 </p:cNvPr>
@@ -24025,10 +23824,10 @@
         </mc:AlternateContent>
         <p:grpSp>
           <p:nvGrpSpPr>
-            <p:cNvPr id="211" name="그룹 210">
+            <p:cNvPr id="284" name="그룹 283">
               <a:extLst>
                 <a:ext uri="{FF2B5EF4-FFF2-40B4-BE49-F238E27FC236}">
-                  <a16:creationId xmlns:a16="http://schemas.microsoft.com/office/drawing/2014/main" id="{99714ED3-8124-1DB7-9B23-4DE0172303EC}"/>
+                  <a16:creationId xmlns:a16="http://schemas.microsoft.com/office/drawing/2014/main" id="{482E129F-F867-1487-28A5-29A4689CB405}"/>
                 </a:ext>
               </a:extLst>
             </p:cNvPr>
@@ -24045,10 +23844,10 @@
           </p:grpSpPr>
           <p:sp>
             <p:nvSpPr>
-              <p:cNvPr id="217" name="Google Shape;898;p28">
+              <p:cNvPr id="289" name="Google Shape;898;p28">
                 <a:extLst>
                   <a:ext uri="{FF2B5EF4-FFF2-40B4-BE49-F238E27FC236}">
-                    <a16:creationId xmlns:a16="http://schemas.microsoft.com/office/drawing/2014/main" id="{4EA59128-D476-1133-B3D9-F1FD8C0BBC19}"/>
+                    <a16:creationId xmlns:a16="http://schemas.microsoft.com/office/drawing/2014/main" id="{D7F52C3C-27EE-E5A9-BC6E-F8FECF9CF506}"/>
                   </a:ext>
                 </a:extLst>
               </p:cNvPr>
@@ -24100,10 +23899,10 @@
           </p:sp>
           <p:sp>
             <p:nvSpPr>
-              <p:cNvPr id="218" name="Google Shape;903;p28">
+              <p:cNvPr id="290" name="Google Shape;903;p28">
                 <a:extLst>
                   <a:ext uri="{FF2B5EF4-FFF2-40B4-BE49-F238E27FC236}">
-                    <a16:creationId xmlns:a16="http://schemas.microsoft.com/office/drawing/2014/main" id="{B944290A-762F-552A-AE58-F314EEE66BC5}"/>
+                    <a16:creationId xmlns:a16="http://schemas.microsoft.com/office/drawing/2014/main" id="{3B1B8EAE-9361-F66B-6F55-78ACE1EFDB63}"/>
                   </a:ext>
                 </a:extLst>
               </p:cNvPr>
@@ -24155,10 +23954,10 @@
           </p:sp>
           <p:sp>
             <p:nvSpPr>
-              <p:cNvPr id="219" name="Google Shape;908;p28">
+              <p:cNvPr id="291" name="Google Shape;908;p28">
                 <a:extLst>
                   <a:ext uri="{FF2B5EF4-FFF2-40B4-BE49-F238E27FC236}">
-                    <a16:creationId xmlns:a16="http://schemas.microsoft.com/office/drawing/2014/main" id="{AD1926C6-97CE-0FDD-62BD-C3D2614FE33A}"/>
+                    <a16:creationId xmlns:a16="http://schemas.microsoft.com/office/drawing/2014/main" id="{466EC1A8-4A44-1E0F-2DBA-71C66E790E1D}"/>
                   </a:ext>
                 </a:extLst>
               </p:cNvPr>
@@ -24211,10 +24010,10 @@
         </p:grpSp>
         <p:grpSp>
           <p:nvGrpSpPr>
-            <p:cNvPr id="212" name="그룹 211">
+            <p:cNvPr id="285" name="그룹 284">
               <a:extLst>
                 <a:ext uri="{FF2B5EF4-FFF2-40B4-BE49-F238E27FC236}">
-                  <a16:creationId xmlns:a16="http://schemas.microsoft.com/office/drawing/2014/main" id="{A7735445-1E7A-07E0-F1F3-8ACDF522476C}"/>
+                  <a16:creationId xmlns:a16="http://schemas.microsoft.com/office/drawing/2014/main" id="{EC783CDC-E336-DA96-F228-FA78C53196A7}"/>
                 </a:ext>
               </a:extLst>
             </p:cNvPr>
@@ -24231,10 +24030,10 @@
           </p:grpSpPr>
           <p:sp>
             <p:nvSpPr>
-              <p:cNvPr id="214" name="Google Shape;898;p28">
+              <p:cNvPr id="286" name="Google Shape;898;p28">
                 <a:extLst>
                   <a:ext uri="{FF2B5EF4-FFF2-40B4-BE49-F238E27FC236}">
-                    <a16:creationId xmlns:a16="http://schemas.microsoft.com/office/drawing/2014/main" id="{92F191EB-775B-964F-54A1-BFBBBF7E9738}"/>
+                    <a16:creationId xmlns:a16="http://schemas.microsoft.com/office/drawing/2014/main" id="{696B5F16-498C-3176-3008-5980975A8C2A}"/>
                   </a:ext>
                 </a:extLst>
               </p:cNvPr>
@@ -24286,10 +24085,10 @@
           </p:sp>
           <p:sp>
             <p:nvSpPr>
-              <p:cNvPr id="215" name="Google Shape;903;p28">
+              <p:cNvPr id="287" name="Google Shape;903;p28">
                 <a:extLst>
                   <a:ext uri="{FF2B5EF4-FFF2-40B4-BE49-F238E27FC236}">
-                    <a16:creationId xmlns:a16="http://schemas.microsoft.com/office/drawing/2014/main" id="{4641075C-CAB4-A5E5-2269-8525E65240B4}"/>
+                    <a16:creationId xmlns:a16="http://schemas.microsoft.com/office/drawing/2014/main" id="{6D35669E-6499-03E9-A463-5D1D23D8C04F}"/>
                   </a:ext>
                 </a:extLst>
               </p:cNvPr>
@@ -24341,10 +24140,10 @@
           </p:sp>
           <p:sp>
             <p:nvSpPr>
-              <p:cNvPr id="216" name="Google Shape;908;p28">
+              <p:cNvPr id="288" name="Google Shape;908;p28">
                 <a:extLst>
                   <a:ext uri="{FF2B5EF4-FFF2-40B4-BE49-F238E27FC236}">
-                    <a16:creationId xmlns:a16="http://schemas.microsoft.com/office/drawing/2014/main" id="{4A25A2B7-273E-86DF-1F9B-F44C957D3D91}"/>
+                    <a16:creationId xmlns:a16="http://schemas.microsoft.com/office/drawing/2014/main" id="{8881B212-7385-16ED-FDF8-B3006EA47DF3}"/>
                   </a:ext>
                 </a:extLst>
               </p:cNvPr>
@@ -24400,10 +24199,10 @@
         <mc:Choice xmlns:a14="http://schemas.microsoft.com/office/drawing/2010/main" Requires="a14">
           <p:sp>
             <p:nvSpPr>
-              <p:cNvPr id="220" name="Google Shape;1018;p28">
+              <p:cNvPr id="292" name="Google Shape;1018;p28">
                 <a:extLst>
                   <a:ext uri="{FF2B5EF4-FFF2-40B4-BE49-F238E27FC236}">
-                    <a16:creationId xmlns:a16="http://schemas.microsoft.com/office/drawing/2014/main" id="{23EF5C96-0469-7D1B-AEDD-3928F2E23783}"/>
+                    <a16:creationId xmlns:a16="http://schemas.microsoft.com/office/drawing/2014/main" id="{E64666DF-7FD2-F274-C910-F9F7464A7B6A}"/>
                   </a:ext>
                 </a:extLst>
               </p:cNvPr>
@@ -24461,10 +24260,10 @@
         <mc:Fallback>
           <p:sp>
             <p:nvSpPr>
-              <p:cNvPr id="220" name="Google Shape;1018;p28">
+              <p:cNvPr id="292" name="Google Shape;1018;p28">
                 <a:extLst>
                   <a:ext uri="{FF2B5EF4-FFF2-40B4-BE49-F238E27FC236}">
-                    <a16:creationId xmlns:a16="http://schemas.microsoft.com/office/drawing/2014/main" id="{23EF5C96-0469-7D1B-AEDD-3928F2E23783}"/>
+                    <a16:creationId xmlns:a16="http://schemas.microsoft.com/office/drawing/2014/main" id="{E64666DF-7FD2-F274-C910-F9F7464A7B6A}"/>
                   </a:ext>
                 </a:extLst>
               </p:cNvPr>
@@ -24510,10 +24309,10 @@
         <mc:Choice xmlns:a14="http://schemas.microsoft.com/office/drawing/2010/main" Requires="a14">
           <p:sp>
             <p:nvSpPr>
-              <p:cNvPr id="221" name="Google Shape;1018;p28">
+              <p:cNvPr id="293" name="Google Shape;1018;p28">
                 <a:extLst>
                   <a:ext uri="{FF2B5EF4-FFF2-40B4-BE49-F238E27FC236}">
-                    <a16:creationId xmlns:a16="http://schemas.microsoft.com/office/drawing/2014/main" id="{31818A00-7950-7565-DF76-F58A8A07AEF9}"/>
+                    <a16:creationId xmlns:a16="http://schemas.microsoft.com/office/drawing/2014/main" id="{054638B9-7FF9-7A73-A635-524FA1694130}"/>
                   </a:ext>
                 </a:extLst>
               </p:cNvPr>
@@ -24523,6 +24322,117 @@
             <p:spPr>
               <a:xfrm>
                 <a:off x="1982493" y="1492323"/>
+                <a:ext cx="234135" cy="183129"/>
+              </a:xfrm>
+              <a:prstGeom prst="rect">
+                <a:avLst/>
+              </a:prstGeom>
+              <a:noFill/>
+              <a:ln>
+                <a:noFill/>
+              </a:ln>
+            </p:spPr>
+            <p:txBody>
+              <a:bodyPr spcFirstLastPara="1" wrap="square" lIns="0" tIns="0" rIns="0" bIns="0" anchor="t" anchorCtr="0">
+                <a:noAutofit/>
+              </a:bodyPr>
+              <a:lstStyle/>
+              <a:p>
+                <a:pPr algn="ctr" defTabSz="242042">
+                  <a:buClr>
+                    <a:srgbClr val="000000"/>
+                  </a:buClr>
+                </a:pPr>
+                <a14:m>
+                  <m:oMathPara xmlns:m="http://schemas.openxmlformats.org/officeDocument/2006/math">
+                    <m:oMathParaPr>
+                      <m:jc m:val="center"/>
+                    </m:oMathParaPr>
+                    <m:oMath xmlns:m="http://schemas.openxmlformats.org/officeDocument/2006/math">
+                      <m:r>
+                        <a:rPr lang="en-US" altLang="ko-KR" sz="800" b="0" i="1" kern="0" dirty="0" smtClean="0">
+                          <a:solidFill>
+                            <a:srgbClr val="000000"/>
+                          </a:solidFill>
+                          <a:latin typeface="Cambria Math" panose="02040503050406030204" pitchFamily="18" charset="0"/>
+                          <a:cs typeface="Consolas"/>
+                          <a:sym typeface="Consolas"/>
+                        </a:rPr>
+                        <m:t> 0</m:t>
+                      </m:r>
+                    </m:oMath>
+                  </m:oMathPara>
+                </a14:m>
+                <a:endParaRPr sz="800" dirty="0"/>
+              </a:p>
+            </p:txBody>
+          </p:sp>
+        </mc:Choice>
+        <mc:Fallback>
+          <p:sp>
+            <p:nvSpPr>
+              <p:cNvPr id="293" name="Google Shape;1018;p28">
+                <a:extLst>
+                  <a:ext uri="{FF2B5EF4-FFF2-40B4-BE49-F238E27FC236}">
+                    <a16:creationId xmlns:a16="http://schemas.microsoft.com/office/drawing/2014/main" id="{054638B9-7FF9-7A73-A635-524FA1694130}"/>
+                  </a:ext>
+                </a:extLst>
+              </p:cNvPr>
+              <p:cNvSpPr txBox="1">
+                <a:spLocks noRot="1" noChangeAspect="1" noMove="1" noResize="1" noEditPoints="1" noAdjustHandles="1" noChangeArrowheads="1" noChangeShapeType="1" noTextEdit="1"/>
+              </p:cNvSpPr>
+              <p:nvPr/>
+            </p:nvSpPr>
+            <p:spPr>
+              <a:xfrm>
+                <a:off x="1982493" y="1492323"/>
+                <a:ext cx="234135" cy="183129"/>
+              </a:xfrm>
+              <a:prstGeom prst="rect">
+                <a:avLst/>
+              </a:prstGeom>
+              <a:blipFill>
+                <a:blip r:embed="rId33"/>
+                <a:stretch>
+                  <a:fillRect/>
+                </a:stretch>
+              </a:blipFill>
+              <a:ln>
+                <a:noFill/>
+              </a:ln>
+            </p:spPr>
+            <p:txBody>
+              <a:bodyPr/>
+              <a:lstStyle/>
+              <a:p>
+                <a:r>
+                  <a:rPr lang="ko-KR" altLang="en-US">
+                    <a:noFill/>
+                  </a:rPr>
+                  <a:t> </a:t>
+                </a:r>
+              </a:p>
+            </p:txBody>
+          </p:sp>
+        </mc:Fallback>
+      </mc:AlternateContent>
+      <mc:AlternateContent xmlns:mc="http://schemas.openxmlformats.org/markup-compatibility/2006">
+        <mc:Choice xmlns:a14="http://schemas.microsoft.com/office/drawing/2010/main" Requires="a14">
+          <p:sp>
+            <p:nvSpPr>
+              <p:cNvPr id="294" name="Google Shape;1018;p28">
+                <a:extLst>
+                  <a:ext uri="{FF2B5EF4-FFF2-40B4-BE49-F238E27FC236}">
+                    <a16:creationId xmlns:a16="http://schemas.microsoft.com/office/drawing/2014/main" id="{5B3C776F-84AB-D449-AE31-3000F6C4D0C7}"/>
+                  </a:ext>
+                </a:extLst>
+              </p:cNvPr>
+              <p:cNvSpPr txBox="1"/>
+              <p:nvPr/>
+            </p:nvSpPr>
+            <p:spPr>
+              <a:xfrm>
+                <a:off x="2385608" y="1492323"/>
                 <a:ext cx="234135" cy="183129"/>
               </a:xfrm>
               <a:prstGeom prst="rect">
@@ -24572,10 +24482,10 @@
         <mc:Fallback>
           <p:sp>
             <p:nvSpPr>
-              <p:cNvPr id="221" name="Google Shape;1018;p28">
+              <p:cNvPr id="294" name="Google Shape;1018;p28">
                 <a:extLst>
                   <a:ext uri="{FF2B5EF4-FFF2-40B4-BE49-F238E27FC236}">
-                    <a16:creationId xmlns:a16="http://schemas.microsoft.com/office/drawing/2014/main" id="{31818A00-7950-7565-DF76-F58A8A07AEF9}"/>
+                    <a16:creationId xmlns:a16="http://schemas.microsoft.com/office/drawing/2014/main" id="{5B3C776F-84AB-D449-AE31-3000F6C4D0C7}"/>
                   </a:ext>
                 </a:extLst>
               </p:cNvPr>
@@ -24586,14 +24496,14 @@
             </p:nvSpPr>
             <p:spPr>
               <a:xfrm>
-                <a:off x="1982493" y="1492323"/>
+                <a:off x="2385608" y="1492323"/>
                 <a:ext cx="234135" cy="183129"/>
               </a:xfrm>
               <a:prstGeom prst="rect">
                 <a:avLst/>
               </a:prstGeom>
               <a:blipFill>
-                <a:blip r:embed="rId33"/>
+                <a:blip r:embed="rId34"/>
                 <a:stretch>
                   <a:fillRect/>
                 </a:stretch>
@@ -24621,10 +24531,10 @@
         <mc:Choice xmlns:a14="http://schemas.microsoft.com/office/drawing/2010/main" Requires="a14">
           <p:sp>
             <p:nvSpPr>
-              <p:cNvPr id="222" name="Google Shape;1018;p28">
+              <p:cNvPr id="295" name="Google Shape;1018;p28">
                 <a:extLst>
                   <a:ext uri="{FF2B5EF4-FFF2-40B4-BE49-F238E27FC236}">
-                    <a16:creationId xmlns:a16="http://schemas.microsoft.com/office/drawing/2014/main" id="{6A8060F8-C082-B896-1F78-323FC7FEFF0D}"/>
+                    <a16:creationId xmlns:a16="http://schemas.microsoft.com/office/drawing/2014/main" id="{6BDB090D-CC1D-9981-93EF-DED2FC7CCFFF}"/>
                   </a:ext>
                 </a:extLst>
               </p:cNvPr>
@@ -24633,7 +24543,7 @@
             </p:nvSpPr>
             <p:spPr>
               <a:xfrm>
-                <a:off x="2385608" y="1492323"/>
+                <a:off x="2788723" y="1492323"/>
                 <a:ext cx="234135" cy="183129"/>
               </a:xfrm>
               <a:prstGeom prst="rect">
@@ -24683,10 +24593,10 @@
         <mc:Fallback>
           <p:sp>
             <p:nvSpPr>
-              <p:cNvPr id="222" name="Google Shape;1018;p28">
+              <p:cNvPr id="295" name="Google Shape;1018;p28">
                 <a:extLst>
                   <a:ext uri="{FF2B5EF4-FFF2-40B4-BE49-F238E27FC236}">
-                    <a16:creationId xmlns:a16="http://schemas.microsoft.com/office/drawing/2014/main" id="{6A8060F8-C082-B896-1F78-323FC7FEFF0D}"/>
+                    <a16:creationId xmlns:a16="http://schemas.microsoft.com/office/drawing/2014/main" id="{6BDB090D-CC1D-9981-93EF-DED2FC7CCFFF}"/>
                   </a:ext>
                 </a:extLst>
               </p:cNvPr>
@@ -24697,14 +24607,14 @@
             </p:nvSpPr>
             <p:spPr>
               <a:xfrm>
-                <a:off x="2385608" y="1492323"/>
+                <a:off x="2788723" y="1492323"/>
                 <a:ext cx="234135" cy="183129"/>
               </a:xfrm>
               <a:prstGeom prst="rect">
                 <a:avLst/>
               </a:prstGeom>
               <a:blipFill>
-                <a:blip r:embed="rId34"/>
+                <a:blip r:embed="rId35"/>
                 <a:stretch>
                   <a:fillRect/>
                 </a:stretch>
@@ -24732,10 +24642,10 @@
         <mc:Choice xmlns:a14="http://schemas.microsoft.com/office/drawing/2010/main" Requires="a14">
           <p:sp>
             <p:nvSpPr>
-              <p:cNvPr id="223" name="Google Shape;1018;p28">
+              <p:cNvPr id="296" name="Google Shape;1018;p28">
                 <a:extLst>
                   <a:ext uri="{FF2B5EF4-FFF2-40B4-BE49-F238E27FC236}">
-                    <a16:creationId xmlns:a16="http://schemas.microsoft.com/office/drawing/2014/main" id="{5D0B3C4C-10BB-E435-0DA1-17900FE641E3}"/>
+                    <a16:creationId xmlns:a16="http://schemas.microsoft.com/office/drawing/2014/main" id="{7501EDD8-71DD-3386-37B1-093C7AB53657}"/>
                   </a:ext>
                 </a:extLst>
               </p:cNvPr>
@@ -24744,7 +24654,7 @@
             </p:nvSpPr>
             <p:spPr>
               <a:xfrm>
-                <a:off x="2788723" y="1492323"/>
+                <a:off x="3196554" y="1492323"/>
                 <a:ext cx="234135" cy="183129"/>
               </a:xfrm>
               <a:prstGeom prst="rect">
@@ -24794,10 +24704,10 @@
         <mc:Fallback>
           <p:sp>
             <p:nvSpPr>
-              <p:cNvPr id="223" name="Google Shape;1018;p28">
+              <p:cNvPr id="296" name="Google Shape;1018;p28">
                 <a:extLst>
                   <a:ext uri="{FF2B5EF4-FFF2-40B4-BE49-F238E27FC236}">
-                    <a16:creationId xmlns:a16="http://schemas.microsoft.com/office/drawing/2014/main" id="{5D0B3C4C-10BB-E435-0DA1-17900FE641E3}"/>
+                    <a16:creationId xmlns:a16="http://schemas.microsoft.com/office/drawing/2014/main" id="{7501EDD8-71DD-3386-37B1-093C7AB53657}"/>
                   </a:ext>
                 </a:extLst>
               </p:cNvPr>
@@ -24808,14 +24718,14 @@
             </p:nvSpPr>
             <p:spPr>
               <a:xfrm>
-                <a:off x="2788723" y="1492323"/>
+                <a:off x="3196554" y="1492323"/>
                 <a:ext cx="234135" cy="183129"/>
               </a:xfrm>
               <a:prstGeom prst="rect">
                 <a:avLst/>
               </a:prstGeom>
               <a:blipFill>
-                <a:blip r:embed="rId35"/>
+                <a:blip r:embed="rId36"/>
                 <a:stretch>
                   <a:fillRect/>
                 </a:stretch>
@@ -24843,10 +24753,10 @@
         <mc:Choice xmlns:a14="http://schemas.microsoft.com/office/drawing/2010/main" Requires="a14">
           <p:sp>
             <p:nvSpPr>
-              <p:cNvPr id="224" name="Google Shape;1018;p28">
+              <p:cNvPr id="297" name="Google Shape;1018;p28">
                 <a:extLst>
                   <a:ext uri="{FF2B5EF4-FFF2-40B4-BE49-F238E27FC236}">
-                    <a16:creationId xmlns:a16="http://schemas.microsoft.com/office/drawing/2014/main" id="{1A1D8C48-0E7A-BE2F-C484-47C013E2278D}"/>
+                    <a16:creationId xmlns:a16="http://schemas.microsoft.com/office/drawing/2014/main" id="{68CD1EB8-58FF-D51B-C1F7-274F9BEAF391}"/>
                   </a:ext>
                 </a:extLst>
               </p:cNvPr>
@@ -24855,7 +24765,7 @@
             </p:nvSpPr>
             <p:spPr>
               <a:xfrm>
-                <a:off x="3196554" y="1492323"/>
+                <a:off x="3597895" y="1492323"/>
                 <a:ext cx="234135" cy="183129"/>
               </a:xfrm>
               <a:prstGeom prst="rect">
@@ -24905,121 +24815,10 @@
         <mc:Fallback>
           <p:sp>
             <p:nvSpPr>
-              <p:cNvPr id="224" name="Google Shape;1018;p28">
+              <p:cNvPr id="297" name="Google Shape;1018;p28">
                 <a:extLst>
                   <a:ext uri="{FF2B5EF4-FFF2-40B4-BE49-F238E27FC236}">
-                    <a16:creationId xmlns:a16="http://schemas.microsoft.com/office/drawing/2014/main" id="{1A1D8C48-0E7A-BE2F-C484-47C013E2278D}"/>
-                  </a:ext>
-                </a:extLst>
-              </p:cNvPr>
-              <p:cNvSpPr txBox="1">
-                <a:spLocks noRot="1" noChangeAspect="1" noMove="1" noResize="1" noEditPoints="1" noAdjustHandles="1" noChangeArrowheads="1" noChangeShapeType="1" noTextEdit="1"/>
-              </p:cNvSpPr>
-              <p:nvPr/>
-            </p:nvSpPr>
-            <p:spPr>
-              <a:xfrm>
-                <a:off x="3196554" y="1492323"/>
-                <a:ext cx="234135" cy="183129"/>
-              </a:xfrm>
-              <a:prstGeom prst="rect">
-                <a:avLst/>
-              </a:prstGeom>
-              <a:blipFill>
-                <a:blip r:embed="rId36"/>
-                <a:stretch>
-                  <a:fillRect/>
-                </a:stretch>
-              </a:blipFill>
-              <a:ln>
-                <a:noFill/>
-              </a:ln>
-            </p:spPr>
-            <p:txBody>
-              <a:bodyPr/>
-              <a:lstStyle/>
-              <a:p>
-                <a:r>
-                  <a:rPr lang="ko-KR" altLang="en-US">
-                    <a:noFill/>
-                  </a:rPr>
-                  <a:t> </a:t>
-                </a:r>
-              </a:p>
-            </p:txBody>
-          </p:sp>
-        </mc:Fallback>
-      </mc:AlternateContent>
-      <mc:AlternateContent xmlns:mc="http://schemas.openxmlformats.org/markup-compatibility/2006">
-        <mc:Choice xmlns:a14="http://schemas.microsoft.com/office/drawing/2010/main" Requires="a14">
-          <p:sp>
-            <p:nvSpPr>
-              <p:cNvPr id="225" name="Google Shape;1018;p28">
-                <a:extLst>
-                  <a:ext uri="{FF2B5EF4-FFF2-40B4-BE49-F238E27FC236}">
-                    <a16:creationId xmlns:a16="http://schemas.microsoft.com/office/drawing/2014/main" id="{AEB3D20C-0F92-23CE-9918-89E9FC7D2EFA}"/>
-                  </a:ext>
-                </a:extLst>
-              </p:cNvPr>
-              <p:cNvSpPr txBox="1"/>
-              <p:nvPr/>
-            </p:nvSpPr>
-            <p:spPr>
-              <a:xfrm>
-                <a:off x="3597895" y="1492323"/>
-                <a:ext cx="234135" cy="183129"/>
-              </a:xfrm>
-              <a:prstGeom prst="rect">
-                <a:avLst/>
-              </a:prstGeom>
-              <a:noFill/>
-              <a:ln>
-                <a:noFill/>
-              </a:ln>
-            </p:spPr>
-            <p:txBody>
-              <a:bodyPr spcFirstLastPara="1" wrap="square" lIns="0" tIns="0" rIns="0" bIns="0" anchor="t" anchorCtr="0">
-                <a:noAutofit/>
-              </a:bodyPr>
-              <a:lstStyle/>
-              <a:p>
-                <a:pPr algn="ctr" defTabSz="242042">
-                  <a:buClr>
-                    <a:srgbClr val="000000"/>
-                  </a:buClr>
-                </a:pPr>
-                <a14:m>
-                  <m:oMathPara xmlns:m="http://schemas.openxmlformats.org/officeDocument/2006/math">
-                    <m:oMathParaPr>
-                      <m:jc m:val="center"/>
-                    </m:oMathParaPr>
-                    <m:oMath xmlns:m="http://schemas.openxmlformats.org/officeDocument/2006/math">
-                      <m:r>
-                        <a:rPr lang="en-US" altLang="ko-KR" sz="800" b="0" i="1" kern="0" dirty="0" smtClean="0">
-                          <a:solidFill>
-                            <a:srgbClr val="000000"/>
-                          </a:solidFill>
-                          <a:latin typeface="Cambria Math" panose="02040503050406030204" pitchFamily="18" charset="0"/>
-                          <a:cs typeface="Consolas"/>
-                          <a:sym typeface="Consolas"/>
-                        </a:rPr>
-                        <m:t> 5</m:t>
-                      </m:r>
-                    </m:oMath>
-                  </m:oMathPara>
-                </a14:m>
-                <a:endParaRPr sz="800" dirty="0"/>
-              </a:p>
-            </p:txBody>
-          </p:sp>
-        </mc:Choice>
-        <mc:Fallback>
-          <p:sp>
-            <p:nvSpPr>
-              <p:cNvPr id="225" name="Google Shape;1018;p28">
-                <a:extLst>
-                  <a:ext uri="{FF2B5EF4-FFF2-40B4-BE49-F238E27FC236}">
-                    <a16:creationId xmlns:a16="http://schemas.microsoft.com/office/drawing/2014/main" id="{AEB3D20C-0F92-23CE-9918-89E9FC7D2EFA}"/>
+                    <a16:creationId xmlns:a16="http://schemas.microsoft.com/office/drawing/2014/main" id="{68CD1EB8-58FF-D51B-C1F7-274F9BEAF391}"/>
                   </a:ext>
                 </a:extLst>
               </p:cNvPr>
@@ -25065,10 +24864,10 @@
         <mc:Choice xmlns:a14="http://schemas.microsoft.com/office/drawing/2010/main" Requires="a14">
           <p:sp>
             <p:nvSpPr>
-              <p:cNvPr id="226" name="Google Shape;1018;p28">
+              <p:cNvPr id="298" name="Google Shape;1018;p28">
                 <a:extLst>
                   <a:ext uri="{FF2B5EF4-FFF2-40B4-BE49-F238E27FC236}">
-                    <a16:creationId xmlns:a16="http://schemas.microsoft.com/office/drawing/2014/main" id="{EFB848CB-CF56-3038-A90F-20A13CF86B91}"/>
+                    <a16:creationId xmlns:a16="http://schemas.microsoft.com/office/drawing/2014/main" id="{29BBE22F-C94F-A0C5-014C-5A31ED727299}"/>
                   </a:ext>
                 </a:extLst>
               </p:cNvPr>
@@ -25126,10 +24925,10 @@
         <mc:Fallback>
           <p:sp>
             <p:nvSpPr>
-              <p:cNvPr id="226" name="Google Shape;1018;p28">
+              <p:cNvPr id="298" name="Google Shape;1018;p28">
                 <a:extLst>
                   <a:ext uri="{FF2B5EF4-FFF2-40B4-BE49-F238E27FC236}">
-                    <a16:creationId xmlns:a16="http://schemas.microsoft.com/office/drawing/2014/main" id="{EFB848CB-CF56-3038-A90F-20A13CF86B91}"/>
+                    <a16:creationId xmlns:a16="http://schemas.microsoft.com/office/drawing/2014/main" id="{29BBE22F-C94F-A0C5-014C-5A31ED727299}"/>
                   </a:ext>
                 </a:extLst>
               </p:cNvPr>
@@ -25175,10 +24974,10 @@
         <mc:Choice xmlns:a14="http://schemas.microsoft.com/office/drawing/2010/main" Requires="a14">
           <p:sp>
             <p:nvSpPr>
-              <p:cNvPr id="227" name="Google Shape;1018;p28">
+              <p:cNvPr id="299" name="Google Shape;1018;p28">
                 <a:extLst>
                   <a:ext uri="{FF2B5EF4-FFF2-40B4-BE49-F238E27FC236}">
-                    <a16:creationId xmlns:a16="http://schemas.microsoft.com/office/drawing/2014/main" id="{2CB443DB-B1B1-E669-449A-97A59005EB3F}"/>
+                    <a16:creationId xmlns:a16="http://schemas.microsoft.com/office/drawing/2014/main" id="{7640AB39-5FC9-172F-F065-AC5B339014EF}"/>
                   </a:ext>
                 </a:extLst>
               </p:cNvPr>
@@ -25227,7 +25026,7 @@
                           <a:cs typeface="Consolas"/>
                           <a:sym typeface="Consolas"/>
                         </a:rPr>
-                        <m:t> 1</m:t>
+                        <m:t> 0</m:t>
                       </m:r>
                     </m:oMath>
                   </m:oMathPara>
@@ -25244,10 +25043,10 @@
         <mc:Fallback>
           <p:sp>
             <p:nvSpPr>
-              <p:cNvPr id="227" name="Google Shape;1018;p28">
+              <p:cNvPr id="299" name="Google Shape;1018;p28">
                 <a:extLst>
                   <a:ext uri="{FF2B5EF4-FFF2-40B4-BE49-F238E27FC236}">
-                    <a16:creationId xmlns:a16="http://schemas.microsoft.com/office/drawing/2014/main" id="{2CB443DB-B1B1-E669-449A-97A59005EB3F}"/>
+                    <a16:creationId xmlns:a16="http://schemas.microsoft.com/office/drawing/2014/main" id="{7640AB39-5FC9-172F-F065-AC5B339014EF}"/>
                   </a:ext>
                 </a:extLst>
               </p:cNvPr>
@@ -25293,10 +25092,10 @@
         <mc:Choice xmlns:a14="http://schemas.microsoft.com/office/drawing/2010/main" Requires="a14">
           <p:sp>
             <p:nvSpPr>
-              <p:cNvPr id="228" name="Google Shape;1018;p28">
+              <p:cNvPr id="300" name="Google Shape;1018;p28">
                 <a:extLst>
                   <a:ext uri="{FF2B5EF4-FFF2-40B4-BE49-F238E27FC236}">
-                    <a16:creationId xmlns:a16="http://schemas.microsoft.com/office/drawing/2014/main" id="{AA1F50B2-A304-670D-6A92-BC59718409DA}"/>
+                    <a16:creationId xmlns:a16="http://schemas.microsoft.com/office/drawing/2014/main" id="{BA2B340C-1B5D-CFB6-AF23-7B79C8ACC31C}"/>
                   </a:ext>
                 </a:extLst>
               </p:cNvPr>
@@ -25306,6 +25105,228 @@
             <p:spPr>
               <a:xfrm>
                 <a:off x="3058447" y="730512"/>
+                <a:ext cx="234135" cy="183129"/>
+              </a:xfrm>
+              <a:prstGeom prst="rect">
+                <a:avLst/>
+              </a:prstGeom>
+              <a:noFill/>
+              <a:ln>
+                <a:noFill/>
+              </a:ln>
+            </p:spPr>
+            <p:txBody>
+              <a:bodyPr spcFirstLastPara="1" wrap="square" lIns="0" tIns="0" rIns="0" bIns="0" anchor="t" anchorCtr="0">
+                <a:noAutofit/>
+              </a:bodyPr>
+              <a:lstStyle/>
+              <a:p>
+                <a:pPr algn="ctr" defTabSz="242042">
+                  <a:buClr>
+                    <a:srgbClr val="000000"/>
+                  </a:buClr>
+                </a:pPr>
+                <a14:m>
+                  <m:oMathPara xmlns:m="http://schemas.openxmlformats.org/officeDocument/2006/math">
+                    <m:oMathParaPr>
+                      <m:jc m:val="center"/>
+                    </m:oMathParaPr>
+                    <m:oMath xmlns:m="http://schemas.openxmlformats.org/officeDocument/2006/math">
+                      <m:r>
+                        <a:rPr lang="en-US" altLang="ko-KR" sz="800" b="0" i="1" kern="0" dirty="0" smtClean="0">
+                          <a:solidFill>
+                            <a:srgbClr val="000000"/>
+                          </a:solidFill>
+                          <a:latin typeface="Cambria Math" panose="02040503050406030204" pitchFamily="18" charset="0"/>
+                          <a:cs typeface="Consolas"/>
+                          <a:sym typeface="Consolas"/>
+                        </a:rPr>
+                        <m:t> 2</m:t>
+                      </m:r>
+                    </m:oMath>
+                  </m:oMathPara>
+                </a14:m>
+                <a:endParaRPr sz="800" dirty="0"/>
+              </a:p>
+            </p:txBody>
+          </p:sp>
+        </mc:Choice>
+        <mc:Fallback>
+          <p:sp>
+            <p:nvSpPr>
+              <p:cNvPr id="300" name="Google Shape;1018;p28">
+                <a:extLst>
+                  <a:ext uri="{FF2B5EF4-FFF2-40B4-BE49-F238E27FC236}">
+                    <a16:creationId xmlns:a16="http://schemas.microsoft.com/office/drawing/2014/main" id="{BA2B340C-1B5D-CFB6-AF23-7B79C8ACC31C}"/>
+                  </a:ext>
+                </a:extLst>
+              </p:cNvPr>
+              <p:cNvSpPr txBox="1">
+                <a:spLocks noRot="1" noChangeAspect="1" noMove="1" noResize="1" noEditPoints="1" noAdjustHandles="1" noChangeArrowheads="1" noChangeShapeType="1" noTextEdit="1"/>
+              </p:cNvSpPr>
+              <p:nvPr/>
+            </p:nvSpPr>
+            <p:spPr>
+              <a:xfrm>
+                <a:off x="3058447" y="730512"/>
+                <a:ext cx="234135" cy="183129"/>
+              </a:xfrm>
+              <a:prstGeom prst="rect">
+                <a:avLst/>
+              </a:prstGeom>
+              <a:blipFill>
+                <a:blip r:embed="rId39"/>
+                <a:stretch>
+                  <a:fillRect/>
+                </a:stretch>
+              </a:blipFill>
+              <a:ln>
+                <a:noFill/>
+              </a:ln>
+            </p:spPr>
+            <p:txBody>
+              <a:bodyPr/>
+              <a:lstStyle/>
+              <a:p>
+                <a:r>
+                  <a:rPr lang="ko-KR" altLang="en-US">
+                    <a:noFill/>
+                  </a:rPr>
+                  <a:t> </a:t>
+                </a:r>
+              </a:p>
+            </p:txBody>
+          </p:sp>
+        </mc:Fallback>
+      </mc:AlternateContent>
+      <mc:AlternateContent xmlns:mc="http://schemas.openxmlformats.org/markup-compatibility/2006">
+        <mc:Choice xmlns:a14="http://schemas.microsoft.com/office/drawing/2010/main" Requires="a14">
+          <p:sp>
+            <p:nvSpPr>
+              <p:cNvPr id="301" name="Google Shape;1018;p28">
+                <a:extLst>
+                  <a:ext uri="{FF2B5EF4-FFF2-40B4-BE49-F238E27FC236}">
+                    <a16:creationId xmlns:a16="http://schemas.microsoft.com/office/drawing/2014/main" id="{37533DB6-8C85-2C72-9C89-CEA56E2F7C30}"/>
+                  </a:ext>
+                </a:extLst>
+              </p:cNvPr>
+              <p:cNvSpPr txBox="1"/>
+              <p:nvPr/>
+            </p:nvSpPr>
+            <p:spPr>
+              <a:xfrm>
+                <a:off x="2788723" y="730512"/>
+                <a:ext cx="234135" cy="183129"/>
+              </a:xfrm>
+              <a:prstGeom prst="rect">
+                <a:avLst/>
+              </a:prstGeom>
+              <a:noFill/>
+              <a:ln>
+                <a:noFill/>
+              </a:ln>
+            </p:spPr>
+            <p:txBody>
+              <a:bodyPr spcFirstLastPara="1" wrap="square" lIns="0" tIns="0" rIns="0" bIns="0" anchor="t" anchorCtr="0">
+                <a:noAutofit/>
+              </a:bodyPr>
+              <a:lstStyle/>
+              <a:p>
+                <a:pPr algn="ctr" defTabSz="242042">
+                  <a:buClr>
+                    <a:srgbClr val="000000"/>
+                  </a:buClr>
+                </a:pPr>
+                <a14:m>
+                  <m:oMathPara xmlns:m="http://schemas.openxmlformats.org/officeDocument/2006/math">
+                    <m:oMathParaPr>
+                      <m:jc m:val="center"/>
+                    </m:oMathParaPr>
+                    <m:oMath xmlns:m="http://schemas.openxmlformats.org/officeDocument/2006/math">
+                      <m:r>
+                        <a:rPr lang="en-US" altLang="ko-KR" sz="800" b="0" i="1" kern="0" dirty="0" smtClean="0">
+                          <a:solidFill>
+                            <a:srgbClr val="000000"/>
+                          </a:solidFill>
+                          <a:latin typeface="Cambria Math" panose="02040503050406030204" pitchFamily="18" charset="0"/>
+                          <a:cs typeface="Consolas"/>
+                          <a:sym typeface="Consolas"/>
+                        </a:rPr>
+                        <m:t> 1</m:t>
+                      </m:r>
+                    </m:oMath>
+                  </m:oMathPara>
+                </a14:m>
+                <a:endParaRPr sz="800" dirty="0"/>
+              </a:p>
+            </p:txBody>
+          </p:sp>
+        </mc:Choice>
+        <mc:Fallback>
+          <p:sp>
+            <p:nvSpPr>
+              <p:cNvPr id="301" name="Google Shape;1018;p28">
+                <a:extLst>
+                  <a:ext uri="{FF2B5EF4-FFF2-40B4-BE49-F238E27FC236}">
+                    <a16:creationId xmlns:a16="http://schemas.microsoft.com/office/drawing/2014/main" id="{37533DB6-8C85-2C72-9C89-CEA56E2F7C30}"/>
+                  </a:ext>
+                </a:extLst>
+              </p:cNvPr>
+              <p:cNvSpPr txBox="1">
+                <a:spLocks noRot="1" noChangeAspect="1" noMove="1" noResize="1" noEditPoints="1" noAdjustHandles="1" noChangeArrowheads="1" noChangeShapeType="1" noTextEdit="1"/>
+              </p:cNvSpPr>
+              <p:nvPr/>
+            </p:nvSpPr>
+            <p:spPr>
+              <a:xfrm>
+                <a:off x="2788723" y="730512"/>
+                <a:ext cx="234135" cy="183129"/>
+              </a:xfrm>
+              <a:prstGeom prst="rect">
+                <a:avLst/>
+              </a:prstGeom>
+              <a:blipFill>
+                <a:blip r:embed="rId40"/>
+                <a:stretch>
+                  <a:fillRect/>
+                </a:stretch>
+              </a:blipFill>
+              <a:ln>
+                <a:noFill/>
+              </a:ln>
+            </p:spPr>
+            <p:txBody>
+              <a:bodyPr/>
+              <a:lstStyle/>
+              <a:p>
+                <a:r>
+                  <a:rPr lang="ko-KR" altLang="en-US">
+                    <a:noFill/>
+                  </a:rPr>
+                  <a:t> </a:t>
+                </a:r>
+              </a:p>
+            </p:txBody>
+          </p:sp>
+        </mc:Fallback>
+      </mc:AlternateContent>
+      <mc:AlternateContent xmlns:mc="http://schemas.openxmlformats.org/markup-compatibility/2006">
+        <mc:Choice xmlns:a14="http://schemas.microsoft.com/office/drawing/2010/main" Requires="a14">
+          <p:sp>
+            <p:nvSpPr>
+              <p:cNvPr id="302" name="Google Shape;1018;p28">
+                <a:extLst>
+                  <a:ext uri="{FF2B5EF4-FFF2-40B4-BE49-F238E27FC236}">
+                    <a16:creationId xmlns:a16="http://schemas.microsoft.com/office/drawing/2014/main" id="{A6F9DB30-1ECC-36A1-5528-EC78259EAAC4}"/>
+                  </a:ext>
+                </a:extLst>
+              </p:cNvPr>
+              <p:cNvSpPr txBox="1"/>
+              <p:nvPr/>
+            </p:nvSpPr>
+            <p:spPr>
+              <a:xfrm>
+                <a:off x="3328171" y="730512"/>
                 <a:ext cx="234135" cy="183129"/>
               </a:xfrm>
               <a:prstGeom prst="rect">
@@ -25355,10 +25376,10 @@
         <mc:Fallback>
           <p:sp>
             <p:nvSpPr>
-              <p:cNvPr id="228" name="Google Shape;1018;p28">
+              <p:cNvPr id="302" name="Google Shape;1018;p28">
                 <a:extLst>
                   <a:ext uri="{FF2B5EF4-FFF2-40B4-BE49-F238E27FC236}">
-                    <a16:creationId xmlns:a16="http://schemas.microsoft.com/office/drawing/2014/main" id="{AA1F50B2-A304-670D-6A92-BC59718409DA}"/>
+                    <a16:creationId xmlns:a16="http://schemas.microsoft.com/office/drawing/2014/main" id="{A6F9DB30-1ECC-36A1-5528-EC78259EAAC4}"/>
                   </a:ext>
                 </a:extLst>
               </p:cNvPr>
@@ -25369,14 +25390,14 @@
             </p:nvSpPr>
             <p:spPr>
               <a:xfrm>
-                <a:off x="3058447" y="730512"/>
+                <a:off x="3328171" y="730512"/>
                 <a:ext cx="234135" cy="183129"/>
               </a:xfrm>
               <a:prstGeom prst="rect">
                 <a:avLst/>
               </a:prstGeom>
               <a:blipFill>
-                <a:blip r:embed="rId39"/>
+                <a:blip r:embed="rId41"/>
                 <a:stretch>
                   <a:fillRect/>
                 </a:stretch>
@@ -25404,10 +25425,10 @@
         <mc:Choice xmlns:a14="http://schemas.microsoft.com/office/drawing/2010/main" Requires="a14">
           <p:sp>
             <p:nvSpPr>
-              <p:cNvPr id="229" name="Google Shape;1018;p28">
+              <p:cNvPr id="303" name="Google Shape;1018;p28">
                 <a:extLst>
                   <a:ext uri="{FF2B5EF4-FFF2-40B4-BE49-F238E27FC236}">
-                    <a16:creationId xmlns:a16="http://schemas.microsoft.com/office/drawing/2014/main" id="{B20396BC-6DF6-05C5-3FF8-7538F4802095}"/>
+                    <a16:creationId xmlns:a16="http://schemas.microsoft.com/office/drawing/2014/main" id="{8235F9EF-AE18-002E-012F-B79A3E01946A}"/>
                   </a:ext>
                 </a:extLst>
               </p:cNvPr>
@@ -25416,118 +25437,7 @@
             </p:nvSpPr>
             <p:spPr>
               <a:xfrm>
-                <a:off x="2788723" y="730512"/>
-                <a:ext cx="234135" cy="183129"/>
-              </a:xfrm>
-              <a:prstGeom prst="rect">
-                <a:avLst/>
-              </a:prstGeom>
-              <a:noFill/>
-              <a:ln>
-                <a:noFill/>
-              </a:ln>
-            </p:spPr>
-            <p:txBody>
-              <a:bodyPr spcFirstLastPara="1" wrap="square" lIns="0" tIns="0" rIns="0" bIns="0" anchor="t" anchorCtr="0">
-                <a:noAutofit/>
-              </a:bodyPr>
-              <a:lstStyle/>
-              <a:p>
-                <a:pPr algn="ctr" defTabSz="242042">
-                  <a:buClr>
-                    <a:srgbClr val="000000"/>
-                  </a:buClr>
-                </a:pPr>
-                <a14:m>
-                  <m:oMathPara xmlns:m="http://schemas.openxmlformats.org/officeDocument/2006/math">
-                    <m:oMathParaPr>
-                      <m:jc m:val="center"/>
-                    </m:oMathParaPr>
-                    <m:oMath xmlns:m="http://schemas.openxmlformats.org/officeDocument/2006/math">
-                      <m:r>
-                        <a:rPr lang="en-US" altLang="ko-KR" sz="800" b="0" i="1" kern="0" dirty="0" smtClean="0">
-                          <a:solidFill>
-                            <a:srgbClr val="000000"/>
-                          </a:solidFill>
-                          <a:latin typeface="Cambria Math" panose="02040503050406030204" pitchFamily="18" charset="0"/>
-                          <a:cs typeface="Consolas"/>
-                          <a:sym typeface="Consolas"/>
-                        </a:rPr>
-                        <m:t> 2</m:t>
-                      </m:r>
-                    </m:oMath>
-                  </m:oMathPara>
-                </a14:m>
-                <a:endParaRPr sz="800" dirty="0"/>
-              </a:p>
-            </p:txBody>
-          </p:sp>
-        </mc:Choice>
-        <mc:Fallback>
-          <p:sp>
-            <p:nvSpPr>
-              <p:cNvPr id="229" name="Google Shape;1018;p28">
-                <a:extLst>
-                  <a:ext uri="{FF2B5EF4-FFF2-40B4-BE49-F238E27FC236}">
-                    <a16:creationId xmlns:a16="http://schemas.microsoft.com/office/drawing/2014/main" id="{B20396BC-6DF6-05C5-3FF8-7538F4802095}"/>
-                  </a:ext>
-                </a:extLst>
-              </p:cNvPr>
-              <p:cNvSpPr txBox="1">
-                <a:spLocks noRot="1" noChangeAspect="1" noMove="1" noResize="1" noEditPoints="1" noAdjustHandles="1" noChangeArrowheads="1" noChangeShapeType="1" noTextEdit="1"/>
-              </p:cNvSpPr>
-              <p:nvPr/>
-            </p:nvSpPr>
-            <p:spPr>
-              <a:xfrm>
-                <a:off x="2788723" y="730512"/>
-                <a:ext cx="234135" cy="183129"/>
-              </a:xfrm>
-              <a:prstGeom prst="rect">
-                <a:avLst/>
-              </a:prstGeom>
-              <a:blipFill>
-                <a:blip r:embed="rId40"/>
-                <a:stretch>
-                  <a:fillRect/>
-                </a:stretch>
-              </a:blipFill>
-              <a:ln>
-                <a:noFill/>
-              </a:ln>
-            </p:spPr>
-            <p:txBody>
-              <a:bodyPr/>
-              <a:lstStyle/>
-              <a:p>
-                <a:r>
-                  <a:rPr lang="ko-KR" altLang="en-US">
-                    <a:noFill/>
-                  </a:rPr>
-                  <a:t> </a:t>
-                </a:r>
-              </a:p>
-            </p:txBody>
-          </p:sp>
-        </mc:Fallback>
-      </mc:AlternateContent>
-      <mc:AlternateContent xmlns:mc="http://schemas.openxmlformats.org/markup-compatibility/2006">
-        <mc:Choice xmlns:a14="http://schemas.microsoft.com/office/drawing/2010/main" Requires="a14">
-          <p:sp>
-            <p:nvSpPr>
-              <p:cNvPr id="230" name="Google Shape;1018;p28">
-                <a:extLst>
-                  <a:ext uri="{FF2B5EF4-FFF2-40B4-BE49-F238E27FC236}">
-                    <a16:creationId xmlns:a16="http://schemas.microsoft.com/office/drawing/2014/main" id="{16F164D5-6120-D9E0-03F0-53CA24BE82E3}"/>
-                  </a:ext>
-                </a:extLst>
-              </p:cNvPr>
-              <p:cNvSpPr txBox="1"/>
-              <p:nvPr/>
-            </p:nvSpPr>
-            <p:spPr>
-              <a:xfrm>
-                <a:off x="3328171" y="730512"/>
+                <a:off x="3597895" y="730512"/>
                 <a:ext cx="234135" cy="183129"/>
               </a:xfrm>
               <a:prstGeom prst="rect">
@@ -25577,121 +25487,10 @@
         <mc:Fallback>
           <p:sp>
             <p:nvSpPr>
-              <p:cNvPr id="230" name="Google Shape;1018;p28">
+              <p:cNvPr id="303" name="Google Shape;1018;p28">
                 <a:extLst>
                   <a:ext uri="{FF2B5EF4-FFF2-40B4-BE49-F238E27FC236}">
-                    <a16:creationId xmlns:a16="http://schemas.microsoft.com/office/drawing/2014/main" id="{16F164D5-6120-D9E0-03F0-53CA24BE82E3}"/>
-                  </a:ext>
-                </a:extLst>
-              </p:cNvPr>
-              <p:cNvSpPr txBox="1">
-                <a:spLocks noRot="1" noChangeAspect="1" noMove="1" noResize="1" noEditPoints="1" noAdjustHandles="1" noChangeArrowheads="1" noChangeShapeType="1" noTextEdit="1"/>
-              </p:cNvSpPr>
-              <p:nvPr/>
-            </p:nvSpPr>
-            <p:spPr>
-              <a:xfrm>
-                <a:off x="3328171" y="730512"/>
-                <a:ext cx="234135" cy="183129"/>
-              </a:xfrm>
-              <a:prstGeom prst="rect">
-                <a:avLst/>
-              </a:prstGeom>
-              <a:blipFill>
-                <a:blip r:embed="rId41"/>
-                <a:stretch>
-                  <a:fillRect/>
-                </a:stretch>
-              </a:blipFill>
-              <a:ln>
-                <a:noFill/>
-              </a:ln>
-            </p:spPr>
-            <p:txBody>
-              <a:bodyPr/>
-              <a:lstStyle/>
-              <a:p>
-                <a:r>
-                  <a:rPr lang="ko-KR" altLang="en-US">
-                    <a:noFill/>
-                  </a:rPr>
-                  <a:t> </a:t>
-                </a:r>
-              </a:p>
-            </p:txBody>
-          </p:sp>
-        </mc:Fallback>
-      </mc:AlternateContent>
-      <mc:AlternateContent xmlns:mc="http://schemas.openxmlformats.org/markup-compatibility/2006">
-        <mc:Choice xmlns:a14="http://schemas.microsoft.com/office/drawing/2010/main" Requires="a14">
-          <p:sp>
-            <p:nvSpPr>
-              <p:cNvPr id="231" name="Google Shape;1018;p28">
-                <a:extLst>
-                  <a:ext uri="{FF2B5EF4-FFF2-40B4-BE49-F238E27FC236}">
-                    <a16:creationId xmlns:a16="http://schemas.microsoft.com/office/drawing/2014/main" id="{456D4F94-577C-03D5-D866-E05635745120}"/>
-                  </a:ext>
-                </a:extLst>
-              </p:cNvPr>
-              <p:cNvSpPr txBox="1"/>
-              <p:nvPr/>
-            </p:nvSpPr>
-            <p:spPr>
-              <a:xfrm>
-                <a:off x="3597895" y="730512"/>
-                <a:ext cx="234135" cy="183129"/>
-              </a:xfrm>
-              <a:prstGeom prst="rect">
-                <a:avLst/>
-              </a:prstGeom>
-              <a:noFill/>
-              <a:ln>
-                <a:noFill/>
-              </a:ln>
-            </p:spPr>
-            <p:txBody>
-              <a:bodyPr spcFirstLastPara="1" wrap="square" lIns="0" tIns="0" rIns="0" bIns="0" anchor="t" anchorCtr="0">
-                <a:noAutofit/>
-              </a:bodyPr>
-              <a:lstStyle/>
-              <a:p>
-                <a:pPr algn="ctr" defTabSz="242042">
-                  <a:buClr>
-                    <a:srgbClr val="000000"/>
-                  </a:buClr>
-                </a:pPr>
-                <a14:m>
-                  <m:oMathPara xmlns:m="http://schemas.openxmlformats.org/officeDocument/2006/math">
-                    <m:oMathParaPr>
-                      <m:jc m:val="center"/>
-                    </m:oMathParaPr>
-                    <m:oMath xmlns:m="http://schemas.openxmlformats.org/officeDocument/2006/math">
-                      <m:r>
-                        <a:rPr lang="en-US" altLang="ko-KR" sz="800" b="0" i="1" kern="0" dirty="0" smtClean="0">
-                          <a:solidFill>
-                            <a:srgbClr val="000000"/>
-                          </a:solidFill>
-                          <a:latin typeface="Cambria Math" panose="02040503050406030204" pitchFamily="18" charset="0"/>
-                          <a:cs typeface="Consolas"/>
-                          <a:sym typeface="Consolas"/>
-                        </a:rPr>
-                        <m:t> 5</m:t>
-                      </m:r>
-                    </m:oMath>
-                  </m:oMathPara>
-                </a14:m>
-                <a:endParaRPr sz="800" dirty="0"/>
-              </a:p>
-            </p:txBody>
-          </p:sp>
-        </mc:Choice>
-        <mc:Fallback>
-          <p:sp>
-            <p:nvSpPr>
-              <p:cNvPr id="231" name="Google Shape;1018;p28">
-                <a:extLst>
-                  <a:ext uri="{FF2B5EF4-FFF2-40B4-BE49-F238E27FC236}">
-                    <a16:creationId xmlns:a16="http://schemas.microsoft.com/office/drawing/2014/main" id="{456D4F94-577C-03D5-D866-E05635745120}"/>
+                    <a16:creationId xmlns:a16="http://schemas.microsoft.com/office/drawing/2014/main" id="{8235F9EF-AE18-002E-012F-B79A3E01946A}"/>
                   </a:ext>
                 </a:extLst>
               </p:cNvPr>
@@ -25737,10 +25536,10 @@
         <mc:Choice xmlns:a14="http://schemas.microsoft.com/office/drawing/2010/main" Requires="a14">
           <p:sp>
             <p:nvSpPr>
-              <p:cNvPr id="232" name="Google Shape;1018;p28">
+              <p:cNvPr id="304" name="Google Shape;1018;p28">
                 <a:extLst>
                   <a:ext uri="{FF2B5EF4-FFF2-40B4-BE49-F238E27FC236}">
-                    <a16:creationId xmlns:a16="http://schemas.microsoft.com/office/drawing/2014/main" id="{819F2D51-5684-D2D2-C3F3-78433164BC2A}"/>
+                    <a16:creationId xmlns:a16="http://schemas.microsoft.com/office/drawing/2014/main" id="{63AC310A-FC75-9525-134A-32D2882B455F}"/>
                   </a:ext>
                 </a:extLst>
               </p:cNvPr>
@@ -25798,10 +25597,10 @@
         <mc:Fallback>
           <p:sp>
             <p:nvSpPr>
-              <p:cNvPr id="232" name="Google Shape;1018;p28">
+              <p:cNvPr id="304" name="Google Shape;1018;p28">
                 <a:extLst>
                   <a:ext uri="{FF2B5EF4-FFF2-40B4-BE49-F238E27FC236}">
-                    <a16:creationId xmlns:a16="http://schemas.microsoft.com/office/drawing/2014/main" id="{819F2D51-5684-D2D2-C3F3-78433164BC2A}"/>
+                    <a16:creationId xmlns:a16="http://schemas.microsoft.com/office/drawing/2014/main" id="{63AC310A-FC75-9525-134A-32D2882B455F}"/>
                   </a:ext>
                 </a:extLst>
               </p:cNvPr>
@@ -25847,10 +25646,10 @@
         <mc:Choice xmlns:a14="http://schemas.microsoft.com/office/drawing/2010/main" Requires="a14">
           <p:sp>
             <p:nvSpPr>
-              <p:cNvPr id="233" name="Google Shape;1018;p28">
+              <p:cNvPr id="305" name="Google Shape;1018;p28">
                 <a:extLst>
                   <a:ext uri="{FF2B5EF4-FFF2-40B4-BE49-F238E27FC236}">
-                    <a16:creationId xmlns:a16="http://schemas.microsoft.com/office/drawing/2014/main" id="{D23CAB85-67C2-2245-CD09-2B46F9C06BBF}"/>
+                    <a16:creationId xmlns:a16="http://schemas.microsoft.com/office/drawing/2014/main" id="{ED6F9EC6-494A-AE8D-0109-0B64BEDD92EA}"/>
                   </a:ext>
                 </a:extLst>
               </p:cNvPr>
@@ -25896,7 +25695,7 @@
                           <a:cs typeface="Consolas"/>
                           <a:sym typeface="Consolas"/>
                         </a:rPr>
-                        <m:t> 1</m:t>
+                        <m:t> 0</m:t>
                       </m:r>
                     </m:oMath>
                   </m:oMathPara>
@@ -25913,10 +25712,10 @@
         <mc:Fallback>
           <p:sp>
             <p:nvSpPr>
-              <p:cNvPr id="233" name="Google Shape;1018;p28">
+              <p:cNvPr id="305" name="Google Shape;1018;p28">
                 <a:extLst>
                   <a:ext uri="{FF2B5EF4-FFF2-40B4-BE49-F238E27FC236}">
-                    <a16:creationId xmlns:a16="http://schemas.microsoft.com/office/drawing/2014/main" id="{D23CAB85-67C2-2245-CD09-2B46F9C06BBF}"/>
+                    <a16:creationId xmlns:a16="http://schemas.microsoft.com/office/drawing/2014/main" id="{ED6F9EC6-494A-AE8D-0109-0B64BEDD92EA}"/>
                   </a:ext>
                 </a:extLst>
               </p:cNvPr>
@@ -25962,10 +25761,10 @@
         <mc:Choice xmlns:a14="http://schemas.microsoft.com/office/drawing/2010/main" Requires="a14">
           <p:sp>
             <p:nvSpPr>
-              <p:cNvPr id="234" name="Google Shape;1018;p28">
+              <p:cNvPr id="306" name="Google Shape;1018;p28">
                 <a:extLst>
                   <a:ext uri="{FF2B5EF4-FFF2-40B4-BE49-F238E27FC236}">
-                    <a16:creationId xmlns:a16="http://schemas.microsoft.com/office/drawing/2014/main" id="{CE52956B-C919-00A7-769A-B25CF4D2BA50}"/>
+                    <a16:creationId xmlns:a16="http://schemas.microsoft.com/office/drawing/2014/main" id="{1A9FE783-49D9-0B45-8FF3-E33AD6B95129}"/>
                   </a:ext>
                 </a:extLst>
               </p:cNvPr>
@@ -25975,6 +25774,117 @@
             <p:spPr>
               <a:xfrm>
                 <a:off x="349817" y="1504909"/>
+                <a:ext cx="234135" cy="183129"/>
+              </a:xfrm>
+              <a:prstGeom prst="rect">
+                <a:avLst/>
+              </a:prstGeom>
+              <a:noFill/>
+              <a:ln>
+                <a:noFill/>
+              </a:ln>
+            </p:spPr>
+            <p:txBody>
+              <a:bodyPr spcFirstLastPara="1" wrap="square" lIns="0" tIns="0" rIns="0" bIns="0" anchor="t" anchorCtr="0">
+                <a:noAutofit/>
+              </a:bodyPr>
+              <a:lstStyle/>
+              <a:p>
+                <a:pPr algn="ctr" defTabSz="242042">
+                  <a:buClr>
+                    <a:srgbClr val="000000"/>
+                  </a:buClr>
+                </a:pPr>
+                <a14:m>
+                  <m:oMathPara xmlns:m="http://schemas.openxmlformats.org/officeDocument/2006/math">
+                    <m:oMathParaPr>
+                      <m:jc m:val="center"/>
+                    </m:oMathParaPr>
+                    <m:oMath xmlns:m="http://schemas.openxmlformats.org/officeDocument/2006/math">
+                      <m:r>
+                        <a:rPr lang="en-US" altLang="ko-KR" sz="800" b="0" i="1" kern="0" dirty="0" smtClean="0">
+                          <a:solidFill>
+                            <a:srgbClr val="000000"/>
+                          </a:solidFill>
+                          <a:latin typeface="Cambria Math" panose="02040503050406030204" pitchFamily="18" charset="0"/>
+                          <a:cs typeface="Consolas"/>
+                          <a:sym typeface="Consolas"/>
+                        </a:rPr>
+                        <m:t> 1</m:t>
+                      </m:r>
+                    </m:oMath>
+                  </m:oMathPara>
+                </a14:m>
+                <a:endParaRPr sz="800" dirty="0"/>
+              </a:p>
+            </p:txBody>
+          </p:sp>
+        </mc:Choice>
+        <mc:Fallback>
+          <p:sp>
+            <p:nvSpPr>
+              <p:cNvPr id="306" name="Google Shape;1018;p28">
+                <a:extLst>
+                  <a:ext uri="{FF2B5EF4-FFF2-40B4-BE49-F238E27FC236}">
+                    <a16:creationId xmlns:a16="http://schemas.microsoft.com/office/drawing/2014/main" id="{1A9FE783-49D9-0B45-8FF3-E33AD6B95129}"/>
+                  </a:ext>
+                </a:extLst>
+              </p:cNvPr>
+              <p:cNvSpPr txBox="1">
+                <a:spLocks noRot="1" noChangeAspect="1" noMove="1" noResize="1" noEditPoints="1" noAdjustHandles="1" noChangeArrowheads="1" noChangeShapeType="1" noTextEdit="1"/>
+              </p:cNvSpPr>
+              <p:nvPr/>
+            </p:nvSpPr>
+            <p:spPr>
+              <a:xfrm>
+                <a:off x="349817" y="1504909"/>
+                <a:ext cx="234135" cy="183129"/>
+              </a:xfrm>
+              <a:prstGeom prst="rect">
+                <a:avLst/>
+              </a:prstGeom>
+              <a:blipFill>
+                <a:blip r:embed="rId40"/>
+                <a:stretch>
+                  <a:fillRect/>
+                </a:stretch>
+              </a:blipFill>
+              <a:ln>
+                <a:noFill/>
+              </a:ln>
+            </p:spPr>
+            <p:txBody>
+              <a:bodyPr/>
+              <a:lstStyle/>
+              <a:p>
+                <a:r>
+                  <a:rPr lang="ko-KR" altLang="en-US">
+                    <a:noFill/>
+                  </a:rPr>
+                  <a:t> </a:t>
+                </a:r>
+              </a:p>
+            </p:txBody>
+          </p:sp>
+        </mc:Fallback>
+      </mc:AlternateContent>
+      <mc:AlternateContent xmlns:mc="http://schemas.openxmlformats.org/markup-compatibility/2006">
+        <mc:Choice xmlns:a14="http://schemas.microsoft.com/office/drawing/2010/main" Requires="a14">
+          <p:sp>
+            <p:nvSpPr>
+              <p:cNvPr id="307" name="Google Shape;1018;p28">
+                <a:extLst>
+                  <a:ext uri="{FF2B5EF4-FFF2-40B4-BE49-F238E27FC236}">
+                    <a16:creationId xmlns:a16="http://schemas.microsoft.com/office/drawing/2014/main" id="{2FBD7A3F-FA9A-537A-0205-B51BD64FF5F2}"/>
+                  </a:ext>
+                </a:extLst>
+              </p:cNvPr>
+              <p:cNvSpPr txBox="1"/>
+              <p:nvPr/>
+            </p:nvSpPr>
+            <p:spPr>
+              <a:xfrm>
+                <a:off x="715508" y="1504909"/>
                 <a:ext cx="234135" cy="183129"/>
               </a:xfrm>
               <a:prstGeom prst="rect">
@@ -26024,10 +25934,10 @@
         <mc:Fallback>
           <p:sp>
             <p:nvSpPr>
-              <p:cNvPr id="234" name="Google Shape;1018;p28">
+              <p:cNvPr id="307" name="Google Shape;1018;p28">
                 <a:extLst>
                   <a:ext uri="{FF2B5EF4-FFF2-40B4-BE49-F238E27FC236}">
-                    <a16:creationId xmlns:a16="http://schemas.microsoft.com/office/drawing/2014/main" id="{CE52956B-C919-00A7-769A-B25CF4D2BA50}"/>
+                    <a16:creationId xmlns:a16="http://schemas.microsoft.com/office/drawing/2014/main" id="{2FBD7A3F-FA9A-537A-0205-B51BD64FF5F2}"/>
                   </a:ext>
                 </a:extLst>
               </p:cNvPr>
@@ -26038,14 +25948,14 @@
             </p:nvSpPr>
             <p:spPr>
               <a:xfrm>
-                <a:off x="349817" y="1504909"/>
+                <a:off x="715508" y="1504909"/>
                 <a:ext cx="234135" cy="183129"/>
               </a:xfrm>
               <a:prstGeom prst="rect">
                 <a:avLst/>
               </a:prstGeom>
               <a:blipFill>
-                <a:blip r:embed="rId40"/>
+                <a:blip r:embed="rId44"/>
                 <a:stretch>
                   <a:fillRect/>
                 </a:stretch>
@@ -26073,10 +25983,10 @@
         <mc:Choice xmlns:a14="http://schemas.microsoft.com/office/drawing/2010/main" Requires="a14">
           <p:sp>
             <p:nvSpPr>
-              <p:cNvPr id="235" name="Google Shape;1018;p28">
+              <p:cNvPr id="308" name="Google Shape;1018;p28">
                 <a:extLst>
                   <a:ext uri="{FF2B5EF4-FFF2-40B4-BE49-F238E27FC236}">
-                    <a16:creationId xmlns:a16="http://schemas.microsoft.com/office/drawing/2014/main" id="{C1FD1E41-F784-22F3-BF9E-784CAB38AA2F}"/>
+                    <a16:creationId xmlns:a16="http://schemas.microsoft.com/office/drawing/2014/main" id="{8755973C-5827-F094-FDDF-DCCD9A47F329}"/>
                   </a:ext>
                 </a:extLst>
               </p:cNvPr>
@@ -26085,7 +25995,7 @@
             </p:nvSpPr>
             <p:spPr>
               <a:xfrm>
-                <a:off x="715508" y="1504909"/>
+                <a:off x="1081199" y="1504909"/>
                 <a:ext cx="234135" cy="183129"/>
               </a:xfrm>
               <a:prstGeom prst="rect">
@@ -26135,10 +26045,10 @@
         <mc:Fallback>
           <p:sp>
             <p:nvSpPr>
-              <p:cNvPr id="235" name="Google Shape;1018;p28">
+              <p:cNvPr id="308" name="Google Shape;1018;p28">
                 <a:extLst>
                   <a:ext uri="{FF2B5EF4-FFF2-40B4-BE49-F238E27FC236}">
-                    <a16:creationId xmlns:a16="http://schemas.microsoft.com/office/drawing/2014/main" id="{C1FD1E41-F784-22F3-BF9E-784CAB38AA2F}"/>
+                    <a16:creationId xmlns:a16="http://schemas.microsoft.com/office/drawing/2014/main" id="{8755973C-5827-F094-FDDF-DCCD9A47F329}"/>
                   </a:ext>
                 </a:extLst>
               </p:cNvPr>
@@ -26149,14 +26059,14 @@
             </p:nvSpPr>
             <p:spPr>
               <a:xfrm>
-                <a:off x="715508" y="1504909"/>
+                <a:off x="1081199" y="1504909"/>
                 <a:ext cx="234135" cy="183129"/>
               </a:xfrm>
               <a:prstGeom prst="rect">
                 <a:avLst/>
               </a:prstGeom>
               <a:blipFill>
-                <a:blip r:embed="rId44"/>
+                <a:blip r:embed="rId45"/>
                 <a:stretch>
                   <a:fillRect/>
                 </a:stretch>
@@ -26184,10 +26094,10 @@
         <mc:Choice xmlns:a14="http://schemas.microsoft.com/office/drawing/2010/main" Requires="a14">
           <p:sp>
             <p:nvSpPr>
-              <p:cNvPr id="236" name="Google Shape;1018;p28">
+              <p:cNvPr id="309" name="Google Shape;1018;p28">
                 <a:extLst>
                   <a:ext uri="{FF2B5EF4-FFF2-40B4-BE49-F238E27FC236}">
-                    <a16:creationId xmlns:a16="http://schemas.microsoft.com/office/drawing/2014/main" id="{8147B9B4-2D4D-4357-14CA-3FE5D96EA5A5}"/>
+                    <a16:creationId xmlns:a16="http://schemas.microsoft.com/office/drawing/2014/main" id="{987E3501-0844-AE72-F9E8-21364735793B}"/>
                   </a:ext>
                 </a:extLst>
               </p:cNvPr>
@@ -26196,7 +26106,7 @@
             </p:nvSpPr>
             <p:spPr>
               <a:xfrm>
-                <a:off x="1081199" y="1504909"/>
+                <a:off x="1446890" y="1504909"/>
                 <a:ext cx="234135" cy="183129"/>
               </a:xfrm>
               <a:prstGeom prst="rect">
@@ -26246,121 +26156,10 @@
         <mc:Fallback>
           <p:sp>
             <p:nvSpPr>
-              <p:cNvPr id="236" name="Google Shape;1018;p28">
+              <p:cNvPr id="309" name="Google Shape;1018;p28">
                 <a:extLst>
                   <a:ext uri="{FF2B5EF4-FFF2-40B4-BE49-F238E27FC236}">
-                    <a16:creationId xmlns:a16="http://schemas.microsoft.com/office/drawing/2014/main" id="{8147B9B4-2D4D-4357-14CA-3FE5D96EA5A5}"/>
-                  </a:ext>
-                </a:extLst>
-              </p:cNvPr>
-              <p:cNvSpPr txBox="1">
-                <a:spLocks noRot="1" noChangeAspect="1" noMove="1" noResize="1" noEditPoints="1" noAdjustHandles="1" noChangeArrowheads="1" noChangeShapeType="1" noTextEdit="1"/>
-              </p:cNvSpPr>
-              <p:nvPr/>
-            </p:nvSpPr>
-            <p:spPr>
-              <a:xfrm>
-                <a:off x="1081199" y="1504909"/>
-                <a:ext cx="234135" cy="183129"/>
-              </a:xfrm>
-              <a:prstGeom prst="rect">
-                <a:avLst/>
-              </a:prstGeom>
-              <a:blipFill>
-                <a:blip r:embed="rId45"/>
-                <a:stretch>
-                  <a:fillRect/>
-                </a:stretch>
-              </a:blipFill>
-              <a:ln>
-                <a:noFill/>
-              </a:ln>
-            </p:spPr>
-            <p:txBody>
-              <a:bodyPr/>
-              <a:lstStyle/>
-              <a:p>
-                <a:r>
-                  <a:rPr lang="ko-KR" altLang="en-US">
-                    <a:noFill/>
-                  </a:rPr>
-                  <a:t> </a:t>
-                </a:r>
-              </a:p>
-            </p:txBody>
-          </p:sp>
-        </mc:Fallback>
-      </mc:AlternateContent>
-      <mc:AlternateContent xmlns:mc="http://schemas.openxmlformats.org/markup-compatibility/2006">
-        <mc:Choice xmlns:a14="http://schemas.microsoft.com/office/drawing/2010/main" Requires="a14">
-          <p:sp>
-            <p:nvSpPr>
-              <p:cNvPr id="237" name="Google Shape;1018;p28">
-                <a:extLst>
-                  <a:ext uri="{FF2B5EF4-FFF2-40B4-BE49-F238E27FC236}">
-                    <a16:creationId xmlns:a16="http://schemas.microsoft.com/office/drawing/2014/main" id="{7D7B6129-7DFB-6D3D-8DC5-2349A8FAEFE1}"/>
-                  </a:ext>
-                </a:extLst>
-              </p:cNvPr>
-              <p:cNvSpPr txBox="1"/>
-              <p:nvPr/>
-            </p:nvSpPr>
-            <p:spPr>
-              <a:xfrm>
-                <a:off x="1446890" y="1504909"/>
-                <a:ext cx="234135" cy="183129"/>
-              </a:xfrm>
-              <a:prstGeom prst="rect">
-                <a:avLst/>
-              </a:prstGeom>
-              <a:noFill/>
-              <a:ln>
-                <a:noFill/>
-              </a:ln>
-            </p:spPr>
-            <p:txBody>
-              <a:bodyPr spcFirstLastPara="1" wrap="square" lIns="0" tIns="0" rIns="0" bIns="0" anchor="t" anchorCtr="0">
-                <a:noAutofit/>
-              </a:bodyPr>
-              <a:lstStyle/>
-              <a:p>
-                <a:pPr algn="ctr" defTabSz="242042">
-                  <a:buClr>
-                    <a:srgbClr val="000000"/>
-                  </a:buClr>
-                </a:pPr>
-                <a14:m>
-                  <m:oMathPara xmlns:m="http://schemas.openxmlformats.org/officeDocument/2006/math">
-                    <m:oMathParaPr>
-                      <m:jc m:val="center"/>
-                    </m:oMathParaPr>
-                    <m:oMath xmlns:m="http://schemas.openxmlformats.org/officeDocument/2006/math">
-                      <m:r>
-                        <a:rPr lang="en-US" altLang="ko-KR" sz="800" b="0" i="1" kern="0" dirty="0" smtClean="0">
-                          <a:solidFill>
-                            <a:srgbClr val="000000"/>
-                          </a:solidFill>
-                          <a:latin typeface="Cambria Math" panose="02040503050406030204" pitchFamily="18" charset="0"/>
-                          <a:cs typeface="Consolas"/>
-                          <a:sym typeface="Consolas"/>
-                        </a:rPr>
-                        <m:t> 5</m:t>
-                      </m:r>
-                    </m:oMath>
-                  </m:oMathPara>
-                </a14:m>
-                <a:endParaRPr sz="800" dirty="0"/>
-              </a:p>
-            </p:txBody>
-          </p:sp>
-        </mc:Choice>
-        <mc:Fallback>
-          <p:sp>
-            <p:nvSpPr>
-              <p:cNvPr id="237" name="Google Shape;1018;p28">
-                <a:extLst>
-                  <a:ext uri="{FF2B5EF4-FFF2-40B4-BE49-F238E27FC236}">
-                    <a16:creationId xmlns:a16="http://schemas.microsoft.com/office/drawing/2014/main" id="{7D7B6129-7DFB-6D3D-8DC5-2349A8FAEFE1}"/>
+                    <a16:creationId xmlns:a16="http://schemas.microsoft.com/office/drawing/2014/main" id="{987E3501-0844-AE72-F9E8-21364735793B}"/>
                   </a:ext>
                 </a:extLst>
               </p:cNvPr>
@@ -26406,10 +26205,10 @@
         <mc:Choice xmlns:a14="http://schemas.microsoft.com/office/drawing/2010/main" Requires="a14">
           <p:sp>
             <p:nvSpPr>
-              <p:cNvPr id="238" name="Google Shape;1018;p28">
+              <p:cNvPr id="310" name="Google Shape;1018;p28">
                 <a:extLst>
                   <a:ext uri="{FF2B5EF4-FFF2-40B4-BE49-F238E27FC236}">
-                    <a16:creationId xmlns:a16="http://schemas.microsoft.com/office/drawing/2014/main" id="{5779BBD4-2848-53CC-D38C-EE2D57F506E9}"/>
+                    <a16:creationId xmlns:a16="http://schemas.microsoft.com/office/drawing/2014/main" id="{CD8CF500-6B60-9184-2307-90ABA8956DD0}"/>
                   </a:ext>
                 </a:extLst>
               </p:cNvPr>
@@ -26467,10 +26266,10 @@
         <mc:Fallback>
           <p:sp>
             <p:nvSpPr>
-              <p:cNvPr id="238" name="Google Shape;1018;p28">
+              <p:cNvPr id="310" name="Google Shape;1018;p28">
                 <a:extLst>
                   <a:ext uri="{FF2B5EF4-FFF2-40B4-BE49-F238E27FC236}">
-                    <a16:creationId xmlns:a16="http://schemas.microsoft.com/office/drawing/2014/main" id="{5779BBD4-2848-53CC-D38C-EE2D57F506E9}"/>
+                    <a16:creationId xmlns:a16="http://schemas.microsoft.com/office/drawing/2014/main" id="{CD8CF500-6B60-9184-2307-90ABA8956DD0}"/>
                   </a:ext>
                 </a:extLst>
               </p:cNvPr>
@@ -26516,10 +26315,10 @@
         <mc:Choice xmlns:a14="http://schemas.microsoft.com/office/drawing/2010/main" Requires="a14">
           <p:sp>
             <p:nvSpPr>
-              <p:cNvPr id="239" name="Google Shape;1018;p28">
+              <p:cNvPr id="311" name="Google Shape;1018;p28">
                 <a:extLst>
                   <a:ext uri="{FF2B5EF4-FFF2-40B4-BE49-F238E27FC236}">
-                    <a16:creationId xmlns:a16="http://schemas.microsoft.com/office/drawing/2014/main" id="{730E18C6-B044-514B-2AC2-4B39A36442F6}"/>
+                    <a16:creationId xmlns:a16="http://schemas.microsoft.com/office/drawing/2014/main" id="{6C1F406D-5BAC-CB3A-7FC2-0467C26ABE14}"/>
                   </a:ext>
                 </a:extLst>
               </p:cNvPr>
@@ -26529,6 +26328,127 @@
             <p:spPr>
               <a:xfrm>
                 <a:off x="-15874" y="739330"/>
+                <a:ext cx="234135" cy="183129"/>
+              </a:xfrm>
+              <a:prstGeom prst="rect">
+                <a:avLst/>
+              </a:prstGeom>
+              <a:noFill/>
+              <a:ln>
+                <a:noFill/>
+              </a:ln>
+            </p:spPr>
+            <p:txBody>
+              <a:bodyPr spcFirstLastPara="1" wrap="square" lIns="0" tIns="0" rIns="0" bIns="0" anchor="t" anchorCtr="0">
+                <a:noAutofit/>
+              </a:bodyPr>
+              <a:lstStyle/>
+              <a:p>
+                <a:pPr algn="ctr" defTabSz="242042">
+                  <a:buClr>
+                    <a:srgbClr val="000000"/>
+                  </a:buClr>
+                </a:pPr>
+                <a14:m>
+                  <m:oMathPara xmlns:m="http://schemas.openxmlformats.org/officeDocument/2006/math">
+                    <m:oMathParaPr>
+                      <m:jc m:val="center"/>
+                    </m:oMathParaPr>
+                    <m:oMath xmlns:m="http://schemas.openxmlformats.org/officeDocument/2006/math">
+                      <m:r>
+                        <a:rPr lang="en-US" altLang="ko-KR" sz="800" b="0" i="1" kern="0" dirty="0" smtClean="0">
+                          <a:solidFill>
+                            <a:srgbClr val="000000"/>
+                          </a:solidFill>
+                          <a:highlight>
+                            <a:srgbClr val="FFFFFF"/>
+                          </a:highlight>
+                          <a:latin typeface="Cambria Math" panose="02040503050406030204" pitchFamily="18" charset="0"/>
+                          <a:cs typeface="Consolas"/>
+                          <a:sym typeface="Consolas"/>
+                        </a:rPr>
+                        <m:t> 0</m:t>
+                      </m:r>
+                    </m:oMath>
+                  </m:oMathPara>
+                </a14:m>
+                <a:endParaRPr lang="en-US" sz="800" dirty="0">
+                  <a:solidFill>
+                    <a:srgbClr val="000000"/>
+                  </a:solidFill>
+                  <a:highlight>
+                    <a:srgbClr val="FFFFFF"/>
+                  </a:highlight>
+                </a:endParaRPr>
+              </a:p>
+            </p:txBody>
+          </p:sp>
+        </mc:Choice>
+        <mc:Fallback>
+          <p:sp>
+            <p:nvSpPr>
+              <p:cNvPr id="311" name="Google Shape;1018;p28">
+                <a:extLst>
+                  <a:ext uri="{FF2B5EF4-FFF2-40B4-BE49-F238E27FC236}">
+                    <a16:creationId xmlns:a16="http://schemas.microsoft.com/office/drawing/2014/main" id="{6C1F406D-5BAC-CB3A-7FC2-0467C26ABE14}"/>
+                  </a:ext>
+                </a:extLst>
+              </p:cNvPr>
+              <p:cNvSpPr txBox="1">
+                <a:spLocks noRot="1" noChangeAspect="1" noMove="1" noResize="1" noEditPoints="1" noAdjustHandles="1" noChangeArrowheads="1" noChangeShapeType="1" noTextEdit="1"/>
+              </p:cNvSpPr>
+              <p:nvPr/>
+            </p:nvSpPr>
+            <p:spPr>
+              <a:xfrm>
+                <a:off x="-15874" y="739330"/>
+                <a:ext cx="234135" cy="183129"/>
+              </a:xfrm>
+              <a:prstGeom prst="rect">
+                <a:avLst/>
+              </a:prstGeom>
+              <a:blipFill>
+                <a:blip r:embed="rId48"/>
+                <a:stretch>
+                  <a:fillRect t="-6667"/>
+                </a:stretch>
+              </a:blipFill>
+              <a:ln>
+                <a:noFill/>
+              </a:ln>
+            </p:spPr>
+            <p:txBody>
+              <a:bodyPr/>
+              <a:lstStyle/>
+              <a:p>
+                <a:r>
+                  <a:rPr lang="ko-KR" altLang="en-US">
+                    <a:noFill/>
+                  </a:rPr>
+                  <a:t> </a:t>
+                </a:r>
+              </a:p>
+            </p:txBody>
+          </p:sp>
+        </mc:Fallback>
+      </mc:AlternateContent>
+      <mc:AlternateContent xmlns:mc="http://schemas.openxmlformats.org/markup-compatibility/2006">
+        <mc:Choice xmlns:a14="http://schemas.microsoft.com/office/drawing/2010/main" Requires="a14">
+          <p:sp>
+            <p:nvSpPr>
+              <p:cNvPr id="312" name="Google Shape;1018;p28">
+                <a:extLst>
+                  <a:ext uri="{FF2B5EF4-FFF2-40B4-BE49-F238E27FC236}">
+                    <a16:creationId xmlns:a16="http://schemas.microsoft.com/office/drawing/2014/main" id="{000B3360-38E8-00FB-6F9D-64281CA3C094}"/>
+                  </a:ext>
+                </a:extLst>
+              </p:cNvPr>
+              <p:cNvSpPr txBox="1"/>
+              <p:nvPr/>
+            </p:nvSpPr>
+            <p:spPr>
+              <a:xfrm>
+                <a:off x="349817" y="739330"/>
                 <a:ext cx="234135" cy="183129"/>
               </a:xfrm>
               <a:prstGeom prst="rect">
@@ -26588,10 +26508,10 @@
         <mc:Fallback>
           <p:sp>
             <p:nvSpPr>
-              <p:cNvPr id="239" name="Google Shape;1018;p28">
+              <p:cNvPr id="312" name="Google Shape;1018;p28">
                 <a:extLst>
                   <a:ext uri="{FF2B5EF4-FFF2-40B4-BE49-F238E27FC236}">
-                    <a16:creationId xmlns:a16="http://schemas.microsoft.com/office/drawing/2014/main" id="{730E18C6-B044-514B-2AC2-4B39A36442F6}"/>
+                    <a16:creationId xmlns:a16="http://schemas.microsoft.com/office/drawing/2014/main" id="{000B3360-38E8-00FB-6F9D-64281CA3C094}"/>
                   </a:ext>
                 </a:extLst>
               </p:cNvPr>
@@ -26602,14 +26522,14 @@
             </p:nvSpPr>
             <p:spPr>
               <a:xfrm>
-                <a:off x="-15874" y="739330"/>
+                <a:off x="349817" y="739330"/>
                 <a:ext cx="234135" cy="183129"/>
               </a:xfrm>
               <a:prstGeom prst="rect">
                 <a:avLst/>
               </a:prstGeom>
               <a:blipFill>
-                <a:blip r:embed="rId48"/>
+                <a:blip r:embed="rId49"/>
                 <a:stretch>
                   <a:fillRect t="-6667"/>
                 </a:stretch>
@@ -26637,10 +26557,10 @@
         <mc:Choice xmlns:a14="http://schemas.microsoft.com/office/drawing/2010/main" Requires="a14">
           <p:sp>
             <p:nvSpPr>
-              <p:cNvPr id="240" name="Google Shape;1018;p28">
+              <p:cNvPr id="313" name="Google Shape;1018;p28">
                 <a:extLst>
                   <a:ext uri="{FF2B5EF4-FFF2-40B4-BE49-F238E27FC236}">
-                    <a16:creationId xmlns:a16="http://schemas.microsoft.com/office/drawing/2014/main" id="{B82F1052-7495-29C9-ED86-9FCAF67B7BE6}"/>
+                    <a16:creationId xmlns:a16="http://schemas.microsoft.com/office/drawing/2014/main" id="{6838E1A0-965F-015A-72DD-84AC38244D42}"/>
                   </a:ext>
                 </a:extLst>
               </p:cNvPr>
@@ -26649,7 +26569,7 @@
             </p:nvSpPr>
             <p:spPr>
               <a:xfrm>
-                <a:off x="349817" y="739330"/>
+                <a:off x="715508" y="739330"/>
                 <a:ext cx="234135" cy="183129"/>
               </a:xfrm>
               <a:prstGeom prst="rect">
@@ -26709,10 +26629,10 @@
         <mc:Fallback>
           <p:sp>
             <p:nvSpPr>
-              <p:cNvPr id="240" name="Google Shape;1018;p28">
+              <p:cNvPr id="313" name="Google Shape;1018;p28">
                 <a:extLst>
                   <a:ext uri="{FF2B5EF4-FFF2-40B4-BE49-F238E27FC236}">
-                    <a16:creationId xmlns:a16="http://schemas.microsoft.com/office/drawing/2014/main" id="{B82F1052-7495-29C9-ED86-9FCAF67B7BE6}"/>
+                    <a16:creationId xmlns:a16="http://schemas.microsoft.com/office/drawing/2014/main" id="{6838E1A0-965F-015A-72DD-84AC38244D42}"/>
                   </a:ext>
                 </a:extLst>
               </p:cNvPr>
@@ -26723,14 +26643,14 @@
             </p:nvSpPr>
             <p:spPr>
               <a:xfrm>
-                <a:off x="349817" y="739330"/>
+                <a:off x="715508" y="739330"/>
                 <a:ext cx="234135" cy="183129"/>
               </a:xfrm>
               <a:prstGeom prst="rect">
                 <a:avLst/>
               </a:prstGeom>
               <a:blipFill>
-                <a:blip r:embed="rId49"/>
+                <a:blip r:embed="rId50"/>
                 <a:stretch>
                   <a:fillRect t="-6667"/>
                 </a:stretch>
@@ -26758,10 +26678,10 @@
         <mc:Choice xmlns:a14="http://schemas.microsoft.com/office/drawing/2010/main" Requires="a14">
           <p:sp>
             <p:nvSpPr>
-              <p:cNvPr id="241" name="Google Shape;1018;p28">
+              <p:cNvPr id="314" name="Google Shape;1018;p28">
                 <a:extLst>
                   <a:ext uri="{FF2B5EF4-FFF2-40B4-BE49-F238E27FC236}">
-                    <a16:creationId xmlns:a16="http://schemas.microsoft.com/office/drawing/2014/main" id="{EBCD0DA0-C868-B255-897C-A71F4F662611}"/>
+                    <a16:creationId xmlns:a16="http://schemas.microsoft.com/office/drawing/2014/main" id="{6A1613CC-33C7-5F8F-BCFE-61B9410235C3}"/>
                   </a:ext>
                 </a:extLst>
               </p:cNvPr>
@@ -26770,7 +26690,7 @@
             </p:nvSpPr>
             <p:spPr>
               <a:xfrm>
-                <a:off x="715508" y="739330"/>
+                <a:off x="1081199" y="739330"/>
                 <a:ext cx="234135" cy="183129"/>
               </a:xfrm>
               <a:prstGeom prst="rect">
@@ -26830,10 +26750,10 @@
         <mc:Fallback>
           <p:sp>
             <p:nvSpPr>
-              <p:cNvPr id="241" name="Google Shape;1018;p28">
+              <p:cNvPr id="314" name="Google Shape;1018;p28">
                 <a:extLst>
                   <a:ext uri="{FF2B5EF4-FFF2-40B4-BE49-F238E27FC236}">
-                    <a16:creationId xmlns:a16="http://schemas.microsoft.com/office/drawing/2014/main" id="{EBCD0DA0-C868-B255-897C-A71F4F662611}"/>
+                    <a16:creationId xmlns:a16="http://schemas.microsoft.com/office/drawing/2014/main" id="{6A1613CC-33C7-5F8F-BCFE-61B9410235C3}"/>
                   </a:ext>
                 </a:extLst>
               </p:cNvPr>
@@ -26844,14 +26764,14 @@
             </p:nvSpPr>
             <p:spPr>
               <a:xfrm>
-                <a:off x="715508" y="739330"/>
+                <a:off x="1081199" y="739330"/>
                 <a:ext cx="234135" cy="183129"/>
               </a:xfrm>
               <a:prstGeom prst="rect">
                 <a:avLst/>
               </a:prstGeom>
               <a:blipFill>
-                <a:blip r:embed="rId50"/>
+                <a:blip r:embed="rId51"/>
                 <a:stretch>
                   <a:fillRect t="-6667"/>
                 </a:stretch>
@@ -26879,10 +26799,10 @@
         <mc:Choice xmlns:a14="http://schemas.microsoft.com/office/drawing/2010/main" Requires="a14">
           <p:sp>
             <p:nvSpPr>
-              <p:cNvPr id="242" name="Google Shape;1018;p28">
+              <p:cNvPr id="315" name="Google Shape;1018;p28">
                 <a:extLst>
                   <a:ext uri="{FF2B5EF4-FFF2-40B4-BE49-F238E27FC236}">
-                    <a16:creationId xmlns:a16="http://schemas.microsoft.com/office/drawing/2014/main" id="{49217C50-2353-5F52-D4C5-9A5C6C55742C}"/>
+                    <a16:creationId xmlns:a16="http://schemas.microsoft.com/office/drawing/2014/main" id="{A4299D36-E2B1-65A2-1EC2-D6E13B9E194A}"/>
                   </a:ext>
                 </a:extLst>
               </p:cNvPr>
@@ -26891,7 +26811,7 @@
             </p:nvSpPr>
             <p:spPr>
               <a:xfrm>
-                <a:off x="1081199" y="739330"/>
+                <a:off x="1446890" y="739330"/>
                 <a:ext cx="234135" cy="183129"/>
               </a:xfrm>
               <a:prstGeom prst="rect">
@@ -26951,131 +26871,10 @@
         <mc:Fallback>
           <p:sp>
             <p:nvSpPr>
-              <p:cNvPr id="242" name="Google Shape;1018;p28">
+              <p:cNvPr id="315" name="Google Shape;1018;p28">
                 <a:extLst>
                   <a:ext uri="{FF2B5EF4-FFF2-40B4-BE49-F238E27FC236}">
-                    <a16:creationId xmlns:a16="http://schemas.microsoft.com/office/drawing/2014/main" id="{49217C50-2353-5F52-D4C5-9A5C6C55742C}"/>
-                  </a:ext>
-                </a:extLst>
-              </p:cNvPr>
-              <p:cNvSpPr txBox="1">
-                <a:spLocks noRot="1" noChangeAspect="1" noMove="1" noResize="1" noEditPoints="1" noAdjustHandles="1" noChangeArrowheads="1" noChangeShapeType="1" noTextEdit="1"/>
-              </p:cNvSpPr>
-              <p:nvPr/>
-            </p:nvSpPr>
-            <p:spPr>
-              <a:xfrm>
-                <a:off x="1081199" y="739330"/>
-                <a:ext cx="234135" cy="183129"/>
-              </a:xfrm>
-              <a:prstGeom prst="rect">
-                <a:avLst/>
-              </a:prstGeom>
-              <a:blipFill>
-                <a:blip r:embed="rId51"/>
-                <a:stretch>
-                  <a:fillRect t="-6667"/>
-                </a:stretch>
-              </a:blipFill>
-              <a:ln>
-                <a:noFill/>
-              </a:ln>
-            </p:spPr>
-            <p:txBody>
-              <a:bodyPr/>
-              <a:lstStyle/>
-              <a:p>
-                <a:r>
-                  <a:rPr lang="ko-KR" altLang="en-US">
-                    <a:noFill/>
-                  </a:rPr>
-                  <a:t> </a:t>
-                </a:r>
-              </a:p>
-            </p:txBody>
-          </p:sp>
-        </mc:Fallback>
-      </mc:AlternateContent>
-      <mc:AlternateContent xmlns:mc="http://schemas.openxmlformats.org/markup-compatibility/2006">
-        <mc:Choice xmlns:a14="http://schemas.microsoft.com/office/drawing/2010/main" Requires="a14">
-          <p:sp>
-            <p:nvSpPr>
-              <p:cNvPr id="243" name="Google Shape;1018;p28">
-                <a:extLst>
-                  <a:ext uri="{FF2B5EF4-FFF2-40B4-BE49-F238E27FC236}">
-                    <a16:creationId xmlns:a16="http://schemas.microsoft.com/office/drawing/2014/main" id="{608D20B3-70F1-E314-AA34-A87FA946FFE7}"/>
-                  </a:ext>
-                </a:extLst>
-              </p:cNvPr>
-              <p:cNvSpPr txBox="1"/>
-              <p:nvPr/>
-            </p:nvSpPr>
-            <p:spPr>
-              <a:xfrm>
-                <a:off x="1446890" y="739330"/>
-                <a:ext cx="234135" cy="183129"/>
-              </a:xfrm>
-              <a:prstGeom prst="rect">
-                <a:avLst/>
-              </a:prstGeom>
-              <a:noFill/>
-              <a:ln>
-                <a:noFill/>
-              </a:ln>
-            </p:spPr>
-            <p:txBody>
-              <a:bodyPr spcFirstLastPara="1" wrap="square" lIns="0" tIns="0" rIns="0" bIns="0" anchor="t" anchorCtr="0">
-                <a:noAutofit/>
-              </a:bodyPr>
-              <a:lstStyle/>
-              <a:p>
-                <a:pPr algn="ctr" defTabSz="242042">
-                  <a:buClr>
-                    <a:srgbClr val="000000"/>
-                  </a:buClr>
-                </a:pPr>
-                <a14:m>
-                  <m:oMathPara xmlns:m="http://schemas.openxmlformats.org/officeDocument/2006/math">
-                    <m:oMathParaPr>
-                      <m:jc m:val="center"/>
-                    </m:oMathParaPr>
-                    <m:oMath xmlns:m="http://schemas.openxmlformats.org/officeDocument/2006/math">
-                      <m:r>
-                        <a:rPr lang="en-US" altLang="ko-KR" sz="800" b="0" i="1" kern="0" dirty="0" smtClean="0">
-                          <a:solidFill>
-                            <a:srgbClr val="000000"/>
-                          </a:solidFill>
-                          <a:highlight>
-                            <a:srgbClr val="FFFFFF"/>
-                          </a:highlight>
-                          <a:latin typeface="Cambria Math" panose="02040503050406030204" pitchFamily="18" charset="0"/>
-                          <a:cs typeface="Consolas"/>
-                          <a:sym typeface="Consolas"/>
-                        </a:rPr>
-                        <m:t> 5</m:t>
-                      </m:r>
-                    </m:oMath>
-                  </m:oMathPara>
-                </a14:m>
-                <a:endParaRPr lang="en-US" sz="800" dirty="0">
-                  <a:solidFill>
-                    <a:srgbClr val="000000"/>
-                  </a:solidFill>
-                  <a:highlight>
-                    <a:srgbClr val="FFFFFF"/>
-                  </a:highlight>
-                </a:endParaRPr>
-              </a:p>
-            </p:txBody>
-          </p:sp>
-        </mc:Choice>
-        <mc:Fallback>
-          <p:sp>
-            <p:nvSpPr>
-              <p:cNvPr id="243" name="Google Shape;1018;p28">
-                <a:extLst>
-                  <a:ext uri="{FF2B5EF4-FFF2-40B4-BE49-F238E27FC236}">
-                    <a16:creationId xmlns:a16="http://schemas.microsoft.com/office/drawing/2014/main" id="{608D20B3-70F1-E314-AA34-A87FA946FFE7}"/>
+                    <a16:creationId xmlns:a16="http://schemas.microsoft.com/office/drawing/2014/main" id="{A4299D36-E2B1-65A2-1EC2-D6E13B9E194A}"/>
                   </a:ext>
                 </a:extLst>
               </p:cNvPr>
@@ -27941,8 +27740,8 @@
           </a:p>
         </p:txBody>
       </p:sp>
-      <mc:AlternateContent xmlns:mc="http://schemas.openxmlformats.org/markup-compatibility/2006">
-        <mc:Choice xmlns:a14="http://schemas.microsoft.com/office/drawing/2010/main" Requires="a14">
+      <mc:AlternateContent xmlns:mc="http://schemas.openxmlformats.org/markup-compatibility/2006" xmlns:a14="http://schemas.microsoft.com/office/drawing/2010/main">
+        <mc:Choice Requires="a14">
           <p:sp>
             <p:nvSpPr>
               <p:cNvPr id="98" name="Google Shape;1018;p28">
@@ -28055,7 +27854,7 @@
             </p:txBody>
           </p:sp>
         </mc:Choice>
-        <mc:Fallback>
+        <mc:Fallback xmlns="">
           <p:sp>
             <p:nvSpPr>
               <p:cNvPr id="98" name="Google Shape;1018;p28">
@@ -32170,8 +31969,8 @@
           </a:p>
         </p:txBody>
       </p:sp>
-      <mc:AlternateContent xmlns:mc="http://schemas.openxmlformats.org/markup-compatibility/2006">
-        <mc:Choice xmlns:a14="http://schemas.microsoft.com/office/drawing/2010/main" Requires="a14">
+      <mc:AlternateContent xmlns:mc="http://schemas.openxmlformats.org/markup-compatibility/2006" xmlns:a14="http://schemas.microsoft.com/office/drawing/2010/main">
+        <mc:Choice Requires="a14">
           <p:sp>
             <p:nvSpPr>
               <p:cNvPr id="177" name="Google Shape;1018;p28">
@@ -32233,7 +32032,7 @@
             </p:txBody>
           </p:sp>
         </mc:Choice>
-        <mc:Fallback>
+        <mc:Fallback xmlns="">
           <p:sp>
             <p:nvSpPr>
               <p:cNvPr id="177" name="Google Shape;1018;p28">
@@ -32416,8 +32215,8 @@
           </p:txBody>
         </p:sp>
       </p:grpSp>
-      <mc:AlternateContent xmlns:mc="http://schemas.openxmlformats.org/markup-compatibility/2006">
-        <mc:Choice xmlns:a14="http://schemas.microsoft.com/office/drawing/2010/main" Requires="a14">
+      <mc:AlternateContent xmlns:mc="http://schemas.openxmlformats.org/markup-compatibility/2006" xmlns:a14="http://schemas.microsoft.com/office/drawing/2010/main">
+        <mc:Choice Requires="a14">
           <p:sp>
             <p:nvSpPr>
               <p:cNvPr id="181" name="Google Shape;1018;p28">
@@ -32519,7 +32318,7 @@
             </p:txBody>
           </p:sp>
         </mc:Choice>
-        <mc:Fallback>
+        <mc:Fallback xmlns="">
           <p:sp>
             <p:nvSpPr>
               <p:cNvPr id="181" name="Google Shape;1018;p28">
@@ -32567,8 +32366,8 @@
           </p:sp>
         </mc:Fallback>
       </mc:AlternateContent>
-      <mc:AlternateContent xmlns:mc="http://schemas.openxmlformats.org/markup-compatibility/2006">
-        <mc:Choice xmlns:a14="http://schemas.microsoft.com/office/drawing/2010/main" Requires="a14">
+      <mc:AlternateContent xmlns:mc="http://schemas.openxmlformats.org/markup-compatibility/2006" xmlns:a14="http://schemas.microsoft.com/office/drawing/2010/main">
+        <mc:Choice Requires="a14">
           <p:sp>
             <p:nvSpPr>
               <p:cNvPr id="182" name="Google Shape;1018;p28">
@@ -32721,7 +32520,7 @@
             </p:txBody>
           </p:sp>
         </mc:Choice>
-        <mc:Fallback>
+        <mc:Fallback xmlns="">
           <p:sp>
             <p:nvSpPr>
               <p:cNvPr id="182" name="Google Shape;1018;p28">
@@ -32769,8 +32568,8 @@
           </p:sp>
         </mc:Fallback>
       </mc:AlternateContent>
-      <mc:AlternateContent xmlns:mc="http://schemas.openxmlformats.org/markup-compatibility/2006">
-        <mc:Choice xmlns:a14="http://schemas.microsoft.com/office/drawing/2010/main" Requires="a14">
+      <mc:AlternateContent xmlns:mc="http://schemas.openxmlformats.org/markup-compatibility/2006" xmlns:a14="http://schemas.microsoft.com/office/drawing/2010/main">
+        <mc:Choice Requires="a14">
           <p:sp>
             <p:nvSpPr>
               <p:cNvPr id="183" name="Google Shape;1018;p28">
@@ -32872,7 +32671,7 @@
             </p:txBody>
           </p:sp>
         </mc:Choice>
-        <mc:Fallback>
+        <mc:Fallback xmlns="">
           <p:sp>
             <p:nvSpPr>
               <p:cNvPr id="183" name="Google Shape;1018;p28">
@@ -32920,8 +32719,8 @@
           </p:sp>
         </mc:Fallback>
       </mc:AlternateContent>
-      <mc:AlternateContent xmlns:mc="http://schemas.openxmlformats.org/markup-compatibility/2006">
-        <mc:Choice xmlns:a14="http://schemas.microsoft.com/office/drawing/2010/main" Requires="a14">
+      <mc:AlternateContent xmlns:mc="http://schemas.openxmlformats.org/markup-compatibility/2006" xmlns:a14="http://schemas.microsoft.com/office/drawing/2010/main">
+        <mc:Choice Requires="a14">
           <p:sp>
             <p:nvSpPr>
               <p:cNvPr id="184" name="Google Shape;1018;p28">
@@ -33023,7 +32822,7 @@
             </p:txBody>
           </p:sp>
         </mc:Choice>
-        <mc:Fallback>
+        <mc:Fallback xmlns="">
           <p:sp>
             <p:nvSpPr>
               <p:cNvPr id="184" name="Google Shape;1018;p28">
